--- a/projects/uti/deck/UTI-Eduface-deck.pptx
+++ b/projects/uti/deck/UTI-Eduface-deck.pptx
@@ -6107,7 +6107,23 @@
                 </a:solidFill>
                 <a:latin typeface="League Spartan"/>
               </a:rPr>
-              <a:t>for new programs</a:t>
+              <a:t>for new</a:t>
+            </a:r>
+          </a:p>
+          <a:p>
+            <a:pPr algn="l">
+              <a:lnSpc>
+                <a:spcPct val="98000"/>
+              </a:lnSpc>
+            </a:pPr>
+            <a:r>
+              <a:rPr sz="6600" b="1">
+                <a:solidFill>
+                  <a:srgbClr val="FFFFFF"/>
+                </a:solidFill>
+                <a:latin typeface="League Spartan"/>
+              </a:rPr>
+              <a:t>programs</a:t>
             </a:r>
           </a:p>
           <a:p>
@@ -6136,7 +6152,7 @@
         </p:nvSpPr>
         <p:spPr>
           <a:xfrm>
-            <a:off x="4953000" y="4876800"/>
+            <a:off x="4953000" y="4749800"/>
             <a:ext cx="5461000" cy="1016000"/>
           </a:xfrm>
           <a:prstGeom prst="rect">
@@ -7925,7 +7941,7 @@
                 </a:solidFill>
                 <a:latin typeface="League Spartan"/>
               </a:rPr>
-              <a:t>Institution-wide feedback for $3 per student</a:t>
+              <a:t>Institution-wide feedback, priced per student</a:t>
             </a:r>
           </a:p>
         </p:txBody>
@@ -7938,8 +7954,8 @@
         </p:nvSpPr>
         <p:spPr>
           <a:xfrm>
-            <a:off x="762000" y="1244600"/>
-            <a:ext cx="10668000" cy="317500"/>
+            <a:off x="762000" y="1270000"/>
+            <a:ext cx="10668000" cy="304800"/>
           </a:xfrm>
           <a:prstGeom prst="rect">
             <a:avLst/>
@@ -7971,153 +7987,22 @@
       </p:sp>
       <p:sp>
         <p:nvSpPr>
-          <p:cNvPr id="5" name="TextBox 4"/>
-          <p:cNvSpPr txBox="1"/>
+          <p:cNvPr id="5" name="Rounded Rectangle 4"/>
+          <p:cNvSpPr/>
           <p:nvPr/>
         </p:nvSpPr>
         <p:spPr>
           <a:xfrm>
             <a:off x="762000" y="1905000"/>
-            <a:ext cx="2667000" cy="1270000"/>
-          </a:xfrm>
-          <a:prstGeom prst="rect">
-            <a:avLst/>
-          </a:prstGeom>
-          <a:noFill/>
-        </p:spPr>
-        <p:txBody>
-          <a:bodyPr wrap="square" lIns="0" rIns="0" tIns="0" bIns="0">
-            <a:spAutoFit/>
-          </a:bodyPr>
-          <a:lstStyle/>
-          <a:p>
-            <a:pPr algn="l">
-              <a:lnSpc>
-                <a:spcPct val="90000"/>
-              </a:lnSpc>
-            </a:pPr>
-            <a:r>
-              <a:rPr sz="9000" b="1">
-                <a:solidFill>
-                  <a:srgbClr val="002333"/>
-                </a:solidFill>
-                <a:latin typeface="League Spartan"/>
-              </a:rPr>
-              <a:t>$3</a:t>
-            </a:r>
-          </a:p>
-        </p:txBody>
-      </p:sp>
-      <p:sp>
-        <p:nvSpPr>
-          <p:cNvPr id="6" name="TextBox 5"/>
-          <p:cNvSpPr txBox="1"/>
-          <p:nvPr/>
-        </p:nvSpPr>
-        <p:spPr>
-          <a:xfrm>
-            <a:off x="2667000" y="2184400"/>
-            <a:ext cx="3302000" cy="381000"/>
-          </a:xfrm>
-          <a:prstGeom prst="rect">
-            <a:avLst/>
-          </a:prstGeom>
-          <a:noFill/>
-        </p:spPr>
-        <p:txBody>
-          <a:bodyPr wrap="square" lIns="0" rIns="0" tIns="0" bIns="0">
-            <a:spAutoFit/>
-          </a:bodyPr>
-          <a:lstStyle/>
-          <a:p>
-            <a:pPr algn="l">
-              <a:lnSpc>
-                <a:spcPct val="115000"/>
-              </a:lnSpc>
-            </a:pPr>
-            <a:r>
-              <a:rPr sz="2200" b="1">
-                <a:solidFill>
-                  <a:srgbClr val="002333"/>
-                </a:solidFill>
-                <a:latin typeface="League Spartan"/>
-              </a:rPr>
-              <a:t>per student,</a:t>
-            </a:r>
-          </a:p>
-          <a:p>
-            <a:pPr algn="l">
-              <a:lnSpc>
-                <a:spcPct val="115000"/>
-              </a:lnSpc>
-            </a:pPr>
-            <a:r>
-              <a:rPr sz="2200" b="1">
-                <a:solidFill>
-                  <a:srgbClr val="002333"/>
-                </a:solidFill>
-                <a:latin typeface="League Spartan"/>
-              </a:rPr>
-              <a:t>per month</a:t>
-            </a:r>
-          </a:p>
-        </p:txBody>
-      </p:sp>
-      <p:sp>
-        <p:nvSpPr>
-          <p:cNvPr id="7" name="TextBox 6"/>
-          <p:cNvSpPr txBox="1"/>
-          <p:nvPr/>
-        </p:nvSpPr>
-        <p:spPr>
-          <a:xfrm>
-            <a:off x="762000" y="3225800"/>
-            <a:ext cx="4445000" cy="279400"/>
-          </a:xfrm>
-          <a:prstGeom prst="rect">
-            <a:avLst/>
-          </a:prstGeom>
-          <a:noFill/>
-        </p:spPr>
-        <p:txBody>
-          <a:bodyPr wrap="square" lIns="0" rIns="0" tIns="0" bIns="0">
-            <a:spAutoFit/>
-          </a:bodyPr>
-          <a:lstStyle/>
-          <a:p>
-            <a:pPr algn="l">
-              <a:lnSpc>
-                <a:spcPct val="120000"/>
-              </a:lnSpc>
-            </a:pPr>
-            <a:r>
-              <a:rPr sz="1600" b="0">
-                <a:solidFill>
-                  <a:srgbClr val="5B7480"/>
-                </a:solidFill>
-                <a:latin typeface="Inter"/>
-              </a:rPr>
-              <a:t>billed annually</a:t>
-            </a:r>
-          </a:p>
-        </p:txBody>
-      </p:sp>
-      <p:sp>
-        <p:nvSpPr>
-          <p:cNvPr id="8" name="Rectangle 7"/>
-          <p:cNvSpPr/>
-          <p:nvPr/>
-        </p:nvSpPr>
-        <p:spPr>
-          <a:xfrm>
-            <a:off x="6477000" y="2095500"/>
-            <a:ext cx="50800" cy="355600"/>
-          </a:xfrm>
-          <a:prstGeom prst="rect">
-            <a:avLst/>
+            <a:ext cx="10668000" cy="2260600"/>
+          </a:xfrm>
+          <a:prstGeom prst="roundRect">
+            <a:avLst>
+              <a:gd name="adj" fmla="val 6741"/>
+            </a:avLst>
           </a:prstGeom>
           <a:solidFill>
-            <a:srgbClr val="00E075"/>
+            <a:srgbClr val="002333"/>
           </a:solidFill>
           <a:ln>
             <a:noFill/>
@@ -8148,14 +8033,14 @@
       </p:sp>
       <p:sp>
         <p:nvSpPr>
-          <p:cNvPr id="9" name="TextBox 8"/>
+          <p:cNvPr id="6" name="TextBox 5"/>
           <p:cNvSpPr txBox="1"/>
           <p:nvPr/>
         </p:nvSpPr>
         <p:spPr>
           <a:xfrm>
-            <a:off x="6731000" y="2120900"/>
-            <a:ext cx="4699000" cy="635000"/>
+            <a:off x="1219200" y="2362200"/>
+            <a:ext cx="1905000" cy="1333500"/>
           </a:xfrm>
           <a:prstGeom prst="rect">
             <a:avLst/>
@@ -8170,37 +8055,131 @@
           <a:p>
             <a:pPr algn="l">
               <a:lnSpc>
-                <a:spcPct val="135000"/>
+                <a:spcPct val="90000"/>
+              </a:lnSpc>
+            </a:pPr>
+            <a:r>
+              <a:rPr sz="9000" b="1">
+                <a:solidFill>
+                  <a:srgbClr val="FFFFFF"/>
+                </a:solidFill>
+                <a:latin typeface="League Spartan"/>
+              </a:rPr>
+              <a:t>$3</a:t>
+            </a:r>
+          </a:p>
+        </p:txBody>
+      </p:sp>
+      <p:sp>
+        <p:nvSpPr>
+          <p:cNvPr id="7" name="TextBox 6"/>
+          <p:cNvSpPr txBox="1"/>
+          <p:nvPr/>
+        </p:nvSpPr>
+        <p:spPr>
+          <a:xfrm>
+            <a:off x="2717800" y="2540000"/>
+            <a:ext cx="2667000" cy="711200"/>
+          </a:xfrm>
+          <a:prstGeom prst="rect">
+            <a:avLst/>
+          </a:prstGeom>
+          <a:noFill/>
+        </p:spPr>
+        <p:txBody>
+          <a:bodyPr wrap="square" lIns="0" rIns="0" tIns="0" bIns="0">
+            <a:spAutoFit/>
+          </a:bodyPr>
+          <a:lstStyle/>
+          <a:p>
+            <a:pPr algn="l">
+              <a:lnSpc>
+                <a:spcPct val="115000"/>
+              </a:lnSpc>
+            </a:pPr>
+            <a:r>
+              <a:rPr sz="2200" b="1">
+                <a:solidFill>
+                  <a:srgbClr val="FFFFFF"/>
+                </a:solidFill>
+                <a:latin typeface="League Spartan"/>
+              </a:rPr>
+              <a:t>per student,</a:t>
+            </a:r>
+          </a:p>
+          <a:p>
+            <a:pPr algn="l">
+              <a:lnSpc>
+                <a:spcPct val="115000"/>
+              </a:lnSpc>
+            </a:pPr>
+            <a:r>
+              <a:rPr sz="2200" b="1">
+                <a:solidFill>
+                  <a:srgbClr val="FFFFFF"/>
+                </a:solidFill>
+                <a:latin typeface="League Spartan"/>
+              </a:rPr>
+              <a:t>per month</a:t>
+            </a:r>
+          </a:p>
+        </p:txBody>
+      </p:sp>
+      <p:sp>
+        <p:nvSpPr>
+          <p:cNvPr id="8" name="TextBox 7"/>
+          <p:cNvSpPr txBox="1"/>
+          <p:nvPr/>
+        </p:nvSpPr>
+        <p:spPr>
+          <a:xfrm>
+            <a:off x="1219200" y="3429000"/>
+            <a:ext cx="3302000" cy="279400"/>
+          </a:xfrm>
+          <a:prstGeom prst="rect">
+            <a:avLst/>
+          </a:prstGeom>
+          <a:noFill/>
+        </p:spPr>
+        <p:txBody>
+          <a:bodyPr wrap="square" lIns="0" rIns="0" tIns="0" bIns="0">
+            <a:spAutoFit/>
+          </a:bodyPr>
+          <a:lstStyle/>
+          <a:p>
+            <a:pPr algn="l">
+              <a:lnSpc>
+                <a:spcPct val="120000"/>
               </a:lnSpc>
             </a:pPr>
             <a:r>
               <a:rPr sz="1600" b="0">
                 <a:solidFill>
-                  <a:srgbClr val="002333"/>
+                  <a:srgbClr val="9EABB1"/>
                 </a:solidFill>
                 <a:latin typeface="Inter"/>
               </a:rPr>
-              <a:t>Discount for multi-year commitment</a:t>
-            </a:r>
-          </a:p>
-        </p:txBody>
-      </p:sp>
-      <p:sp>
-        <p:nvSpPr>
-          <p:cNvPr id="10" name="Rectangle 9"/>
+              <a:t>billed annually</a:t>
+            </a:r>
+          </a:p>
+        </p:txBody>
+      </p:sp>
+      <p:sp>
+        <p:nvSpPr>
+          <p:cNvPr id="9" name="Rectangle 8"/>
           <p:cNvSpPr/>
           <p:nvPr/>
         </p:nvSpPr>
         <p:spPr>
           <a:xfrm>
-            <a:off x="6477000" y="2781300"/>
-            <a:ext cx="50800" cy="355600"/>
+            <a:off x="5715000" y="2159000"/>
+            <a:ext cx="6350" cy="1752600"/>
           </a:xfrm>
           <a:prstGeom prst="rect">
             <a:avLst/>
           </a:prstGeom>
           <a:solidFill>
-            <a:srgbClr val="00E075"/>
+            <a:srgbClr val="1F3D4B"/>
           </a:solidFill>
           <a:ln>
             <a:noFill/>
@@ -8231,14 +8210,84 @@
       </p:sp>
       <p:sp>
         <p:nvSpPr>
-          <p:cNvPr id="11" name="TextBox 10"/>
+          <p:cNvPr id="10" name="Rounded Rectangle 9"/>
+          <p:cNvSpPr/>
+          <p:nvPr/>
+        </p:nvSpPr>
+        <p:spPr>
+          <a:xfrm>
+            <a:off x="6121400" y="2552700"/>
+            <a:ext cx="355600" cy="355600"/>
+          </a:xfrm>
+          <a:prstGeom prst="roundRect">
+            <a:avLst>
+              <a:gd name="adj" fmla="val 25000"/>
+            </a:avLst>
+          </a:prstGeom>
+          <a:solidFill>
+            <a:srgbClr val="0A2C3B"/>
+          </a:solidFill>
+          <a:ln>
+            <a:noFill/>
+          </a:ln>
+          <a:effectLst/>
+        </p:spPr>
+        <p:style>
+          <a:lnRef idx="1">
+            <a:schemeClr val="accent1"/>
+          </a:lnRef>
+          <a:fillRef idx="3">
+            <a:schemeClr val="accent1"/>
+          </a:fillRef>
+          <a:effectRef idx="2">
+            <a:schemeClr val="accent1"/>
+          </a:effectRef>
+          <a:fontRef idx="minor">
+            <a:schemeClr val="lt1"/>
+          </a:fontRef>
+        </p:style>
+        <p:txBody>
+          <a:bodyPr rtlCol="0" anchor="ctr"/>
+          <a:lstStyle/>
+          <a:p>
+            <a:pPr algn="ctr"/>
+          </a:p>
+        </p:txBody>
+      </p:sp>
+      <p:pic>
+        <p:nvPicPr>
+          <p:cNvPr id="11" name="Picture 10" descr="icon-check-green.png"/>
+          <p:cNvPicPr>
+            <a:picLocks noChangeAspect="1"/>
+          </p:cNvPicPr>
+          <p:nvPr/>
+        </p:nvPicPr>
+        <p:blipFill>
+          <a:blip r:embed="rId2"/>
+          <a:stretch>
+            <a:fillRect/>
+          </a:stretch>
+        </p:blipFill>
+        <p:spPr>
+          <a:xfrm>
+            <a:off x="6210300" y="2641600"/>
+            <a:ext cx="177800" cy="177800"/>
+          </a:xfrm>
+          <a:prstGeom prst="rect">
+            <a:avLst/>
+          </a:prstGeom>
+        </p:spPr>
+      </p:pic>
+      <p:sp>
+        <p:nvSpPr>
+          <p:cNvPr id="12" name="TextBox 11"/>
           <p:cNvSpPr txBox="1"/>
           <p:nvPr/>
         </p:nvSpPr>
         <p:spPr>
           <a:xfrm>
-            <a:off x="6731000" y="2806700"/>
-            <a:ext cx="4699000" cy="635000"/>
+            <a:off x="6654800" y="2590800"/>
+            <a:ext cx="4318000" cy="304800"/>
           </a:xfrm>
           <a:prstGeom prst="rect">
             <a:avLst/>
@@ -8259,10 +8308,119 @@
             <a:r>
               <a:rPr sz="1600" b="0">
                 <a:solidFill>
-                  <a:srgbClr val="002333"/>
+                  <a:srgbClr val="FFFFFF"/>
                 </a:solidFill>
                 <a:latin typeface="Inter"/>
               </a:rPr>
+              <a:t>Discount for multi-year commitment</a:t>
+            </a:r>
+          </a:p>
+        </p:txBody>
+      </p:sp>
+      <p:sp>
+        <p:nvSpPr>
+          <p:cNvPr id="13" name="Rounded Rectangle 12"/>
+          <p:cNvSpPr/>
+          <p:nvPr/>
+        </p:nvSpPr>
+        <p:spPr>
+          <a:xfrm>
+            <a:off x="6121400" y="3162300"/>
+            <a:ext cx="355600" cy="355600"/>
+          </a:xfrm>
+          <a:prstGeom prst="roundRect">
+            <a:avLst>
+              <a:gd name="adj" fmla="val 25000"/>
+            </a:avLst>
+          </a:prstGeom>
+          <a:solidFill>
+            <a:srgbClr val="0A2C3B"/>
+          </a:solidFill>
+          <a:ln>
+            <a:noFill/>
+          </a:ln>
+          <a:effectLst/>
+        </p:spPr>
+        <p:style>
+          <a:lnRef idx="1">
+            <a:schemeClr val="accent1"/>
+          </a:lnRef>
+          <a:fillRef idx="3">
+            <a:schemeClr val="accent1"/>
+          </a:fillRef>
+          <a:effectRef idx="2">
+            <a:schemeClr val="accent1"/>
+          </a:effectRef>
+          <a:fontRef idx="minor">
+            <a:schemeClr val="lt1"/>
+          </a:fontRef>
+        </p:style>
+        <p:txBody>
+          <a:bodyPr rtlCol="0" anchor="ctr"/>
+          <a:lstStyle/>
+          <a:p>
+            <a:pPr algn="ctr"/>
+          </a:p>
+        </p:txBody>
+      </p:sp>
+      <p:pic>
+        <p:nvPicPr>
+          <p:cNvPr id="14" name="Picture 13" descr="icon-check-green.png"/>
+          <p:cNvPicPr>
+            <a:picLocks noChangeAspect="1"/>
+          </p:cNvPicPr>
+          <p:nvPr/>
+        </p:nvPicPr>
+        <p:blipFill>
+          <a:blip r:embed="rId2"/>
+          <a:stretch>
+            <a:fillRect/>
+          </a:stretch>
+        </p:blipFill>
+        <p:spPr>
+          <a:xfrm>
+            <a:off x="6210300" y="3251200"/>
+            <a:ext cx="177800" cy="177800"/>
+          </a:xfrm>
+          <a:prstGeom prst="rect">
+            <a:avLst/>
+          </a:prstGeom>
+        </p:spPr>
+      </p:pic>
+      <p:sp>
+        <p:nvSpPr>
+          <p:cNvPr id="15" name="TextBox 14"/>
+          <p:cNvSpPr txBox="1"/>
+          <p:nvPr/>
+        </p:nvSpPr>
+        <p:spPr>
+          <a:xfrm>
+            <a:off x="6654800" y="3200400"/>
+            <a:ext cx="4318000" cy="304800"/>
+          </a:xfrm>
+          <a:prstGeom prst="rect">
+            <a:avLst/>
+          </a:prstGeom>
+          <a:noFill/>
+        </p:spPr>
+        <p:txBody>
+          <a:bodyPr wrap="square" lIns="0" rIns="0" tIns="0" bIns="0">
+            <a:spAutoFit/>
+          </a:bodyPr>
+          <a:lstStyle/>
+          <a:p>
+            <a:pPr algn="l">
+              <a:lnSpc>
+                <a:spcPct val="135000"/>
+              </a:lnSpc>
+            </a:pPr>
+            <a:r>
+              <a:rPr sz="1600" b="0">
+                <a:solidFill>
+                  <a:srgbClr val="FFFFFF"/>
+                </a:solidFill>
+                <a:latin typeface="Inter"/>
+              </a:rPr>
               <a:t>Scales with growing students &amp; instructors</a:t>
             </a:r>
           </a:p>
@@ -8270,13 +8428,13 @@
       </p:sp>
       <p:sp>
         <p:nvSpPr>
-          <p:cNvPr id="12" name="Rectangle 11"/>
+          <p:cNvPr id="16" name="Rectangle 15"/>
           <p:cNvSpPr/>
           <p:nvPr/>
         </p:nvSpPr>
         <p:spPr>
           <a:xfrm>
-            <a:off x="762000" y="3962400"/>
+            <a:off x="762000" y="4673600"/>
             <a:ext cx="10668000" cy="6350"/>
           </a:xfrm>
           <a:prstGeom prst="rect">
@@ -8314,14 +8472,14 @@
       </p:sp>
       <p:sp>
         <p:nvSpPr>
-          <p:cNvPr id="13" name="TextBox 12"/>
+          <p:cNvPr id="17" name="TextBox 16"/>
           <p:cNvSpPr txBox="1"/>
           <p:nvPr/>
         </p:nvSpPr>
         <p:spPr>
           <a:xfrm>
-            <a:off x="762000" y="4064000"/>
-            <a:ext cx="3810000" cy="228600"/>
+            <a:off x="762000" y="4826000"/>
+            <a:ext cx="3810000" cy="215900"/>
           </a:xfrm>
           <a:prstGeom prst="rect">
             <a:avLst/>
@@ -8353,13 +8511,13 @@
       </p:sp>
       <p:sp>
         <p:nvSpPr>
-          <p:cNvPr id="14" name="Rounded Rectangle 13"/>
+          <p:cNvPr id="18" name="Rounded Rectangle 17"/>
           <p:cNvSpPr/>
           <p:nvPr/>
         </p:nvSpPr>
         <p:spPr>
           <a:xfrm>
-            <a:off x="762000" y="4394200"/>
+            <a:off x="762000" y="5207000"/>
             <a:ext cx="457200" cy="457200"/>
           </a:xfrm>
           <a:prstGeom prst="roundRect">
@@ -8399,21 +8557,21 @@
       </p:sp>
       <p:pic>
         <p:nvPicPr>
-          <p:cNvPr id="15" name="Picture 14" descr="icon-doel-navy.png"/>
+          <p:cNvPr id="19" name="Picture 18" descr="icon-doel-navy.png"/>
           <p:cNvPicPr>
             <a:picLocks noChangeAspect="1"/>
           </p:cNvPicPr>
           <p:nvPr/>
         </p:nvPicPr>
         <p:blipFill>
-          <a:blip r:embed="rId2"/>
+          <a:blip r:embed="rId3"/>
           <a:stretch>
             <a:fillRect/>
           </a:stretch>
         </p:blipFill>
         <p:spPr>
           <a:xfrm>
-            <a:off x="876300" y="4508500"/>
+            <a:off x="876300" y="5321300"/>
             <a:ext cx="228600" cy="228600"/>
           </a:xfrm>
           <a:prstGeom prst="rect">
@@ -8423,14 +8581,14 @@
       </p:pic>
       <p:sp>
         <p:nvSpPr>
-          <p:cNvPr id="16" name="TextBox 15"/>
+          <p:cNvPr id="20" name="TextBox 19"/>
           <p:cNvSpPr txBox="1"/>
           <p:nvPr/>
         </p:nvSpPr>
         <p:spPr>
           <a:xfrm>
-            <a:off x="1346200" y="4508500"/>
-            <a:ext cx="1854200" cy="444500"/>
+            <a:off x="1346200" y="5334000"/>
+            <a:ext cx="1854200" cy="254000"/>
           </a:xfrm>
           <a:prstGeom prst="rect">
             <a:avLst/>
@@ -8462,13 +8620,13 @@
       </p:sp>
       <p:sp>
         <p:nvSpPr>
-          <p:cNvPr id="17" name="Rounded Rectangle 16"/>
+          <p:cNvPr id="21" name="Rounded Rectangle 20"/>
           <p:cNvSpPr/>
           <p:nvPr/>
         </p:nvSpPr>
         <p:spPr>
           <a:xfrm>
-            <a:off x="3505200" y="4394200"/>
+            <a:off x="3505200" y="5207000"/>
             <a:ext cx="457200" cy="457200"/>
           </a:xfrm>
           <a:prstGeom prst="roundRect">
@@ -8508,21 +8666,21 @@
       </p:sp>
       <p:pic>
         <p:nvPicPr>
-          <p:cNvPr id="18" name="Picture 17" descr="icon-sleutel-navy.png"/>
+          <p:cNvPr id="22" name="Picture 21" descr="icon-sleutel-navy.png"/>
           <p:cNvPicPr>
             <a:picLocks noChangeAspect="1"/>
           </p:cNvPicPr>
           <p:nvPr/>
         </p:nvPicPr>
         <p:blipFill>
-          <a:blip r:embed="rId3"/>
+          <a:blip r:embed="rId4"/>
           <a:stretch>
             <a:fillRect/>
           </a:stretch>
         </p:blipFill>
         <p:spPr>
           <a:xfrm>
-            <a:off x="3619500" y="4508500"/>
+            <a:off x="3619500" y="5321300"/>
             <a:ext cx="228600" cy="228600"/>
           </a:xfrm>
           <a:prstGeom prst="rect">
@@ -8532,14 +8690,14 @@
       </p:pic>
       <p:sp>
         <p:nvSpPr>
-          <p:cNvPr id="19" name="TextBox 18"/>
+          <p:cNvPr id="23" name="TextBox 22"/>
           <p:cNvSpPr txBox="1"/>
           <p:nvPr/>
         </p:nvSpPr>
         <p:spPr>
           <a:xfrm>
-            <a:off x="4089400" y="4508500"/>
-            <a:ext cx="1854200" cy="444500"/>
+            <a:off x="4089400" y="5334000"/>
+            <a:ext cx="1854200" cy="254000"/>
           </a:xfrm>
           <a:prstGeom prst="rect">
             <a:avLst/>
@@ -8571,13 +8729,13 @@
       </p:sp>
       <p:sp>
         <p:nvSpPr>
-          <p:cNvPr id="20" name="Rounded Rectangle 19"/>
+          <p:cNvPr id="24" name="Rounded Rectangle 23"/>
           <p:cNvSpPr/>
           <p:nvPr/>
         </p:nvSpPr>
         <p:spPr>
           <a:xfrm>
-            <a:off x="6248400" y="4394200"/>
+            <a:off x="6248400" y="5207000"/>
             <a:ext cx="457200" cy="457200"/>
           </a:xfrm>
           <a:prstGeom prst="roundRect">
@@ -8617,21 +8775,21 @@
       </p:sp>
       <p:pic>
         <p:nvPicPr>
-          <p:cNvPr id="21" name="Picture 20" descr="icon-instelling-navy.png"/>
+          <p:cNvPr id="25" name="Picture 24" descr="icon-instelling-navy.png"/>
           <p:cNvPicPr>
             <a:picLocks noChangeAspect="1"/>
           </p:cNvPicPr>
           <p:nvPr/>
         </p:nvPicPr>
         <p:blipFill>
-          <a:blip r:embed="rId4"/>
+          <a:blip r:embed="rId5"/>
           <a:stretch>
             <a:fillRect/>
           </a:stretch>
         </p:blipFill>
         <p:spPr>
           <a:xfrm>
-            <a:off x="6362700" y="4508500"/>
+            <a:off x="6362700" y="5321300"/>
             <a:ext cx="228600" cy="228600"/>
           </a:xfrm>
           <a:prstGeom prst="rect">
@@ -8641,14 +8799,14 @@
       </p:pic>
       <p:sp>
         <p:nvSpPr>
-          <p:cNvPr id="22" name="TextBox 21"/>
+          <p:cNvPr id="26" name="TextBox 25"/>
           <p:cNvSpPr txBox="1"/>
           <p:nvPr/>
         </p:nvSpPr>
         <p:spPr>
           <a:xfrm>
-            <a:off x="6832600" y="4508500"/>
-            <a:ext cx="1854200" cy="444500"/>
+            <a:off x="6832600" y="5334000"/>
+            <a:ext cx="1854200" cy="254000"/>
           </a:xfrm>
           <a:prstGeom prst="rect">
             <a:avLst/>
@@ -8680,13 +8838,13 @@
       </p:sp>
       <p:sp>
         <p:nvSpPr>
-          <p:cNvPr id="23" name="Rounded Rectangle 22"/>
+          <p:cNvPr id="27" name="Rounded Rectangle 26"/>
           <p:cNvSpPr/>
           <p:nvPr/>
         </p:nvSpPr>
         <p:spPr>
           <a:xfrm>
-            <a:off x="8991600" y="4394200"/>
+            <a:off x="8991600" y="5207000"/>
             <a:ext cx="457200" cy="457200"/>
           </a:xfrm>
           <a:prstGeom prst="roundRect">
@@ -8726,21 +8884,21 @@
       </p:sp>
       <p:pic>
         <p:nvPicPr>
-          <p:cNvPr id="24" name="Picture 23" descr="icon-schuifjes-navy.png"/>
+          <p:cNvPr id="28" name="Picture 27" descr="icon-schuifjes-navy.png"/>
           <p:cNvPicPr>
             <a:picLocks noChangeAspect="1"/>
           </p:cNvPicPr>
           <p:nvPr/>
         </p:nvPicPr>
         <p:blipFill>
-          <a:blip r:embed="rId5"/>
+          <a:blip r:embed="rId6"/>
           <a:stretch>
             <a:fillRect/>
           </a:stretch>
         </p:blipFill>
         <p:spPr>
           <a:xfrm>
-            <a:off x="9105900" y="4508500"/>
+            <a:off x="9105900" y="5321300"/>
             <a:ext cx="228600" cy="228600"/>
           </a:xfrm>
           <a:prstGeom prst="rect">
@@ -8750,14 +8908,14 @@
       </p:pic>
       <p:sp>
         <p:nvSpPr>
-          <p:cNvPr id="25" name="TextBox 24"/>
+          <p:cNvPr id="29" name="TextBox 28"/>
           <p:cNvSpPr txBox="1"/>
           <p:nvPr/>
         </p:nvSpPr>
         <p:spPr>
           <a:xfrm>
-            <a:off x="9575800" y="4508500"/>
-            <a:ext cx="1854200" cy="444500"/>
+            <a:off x="9575800" y="5334000"/>
+            <a:ext cx="1854200" cy="254000"/>
           </a:xfrm>
           <a:prstGeom prst="rect">
             <a:avLst/>
@@ -8789,7 +8947,7 @@
       </p:sp>
       <p:sp>
         <p:nvSpPr>
-          <p:cNvPr id="26" name="Rectangle 25"/>
+          <p:cNvPr id="30" name="Rectangle 29"/>
           <p:cNvSpPr/>
           <p:nvPr/>
         </p:nvSpPr>
@@ -8833,14 +8991,14 @@
       </p:sp>
       <p:pic>
         <p:nvPicPr>
-          <p:cNvPr id="27" name="Picture 26" descr="logo_navy.png"/>
+          <p:cNvPr id="31" name="Picture 30" descr="logo_navy.png"/>
           <p:cNvPicPr>
             <a:picLocks noChangeAspect="1"/>
           </p:cNvPicPr>
           <p:nvPr/>
         </p:nvPicPr>
         <p:blipFill>
-          <a:blip r:embed="rId6"/>
+          <a:blip r:embed="rId7"/>
           <a:stretch>
             <a:fillRect/>
           </a:stretch>
@@ -8857,7 +9015,7 @@
       </p:pic>
       <p:sp>
         <p:nvSpPr>
-          <p:cNvPr id="28" name="Rectangle 27"/>
+          <p:cNvPr id="32" name="Rectangle 31"/>
           <p:cNvSpPr/>
           <p:nvPr/>
         </p:nvSpPr>
@@ -8901,7 +9059,7 @@
       </p:sp>
       <p:sp>
         <p:nvSpPr>
-          <p:cNvPr id="29" name="TextBox 28"/>
+          <p:cNvPr id="33" name="TextBox 32"/>
           <p:cNvSpPr txBox="1"/>
           <p:nvPr/>
         </p:nvSpPr>
@@ -8940,7 +9098,7 @@
       </p:sp>
       <p:sp>
         <p:nvSpPr>
-          <p:cNvPr id="30" name="TextBox 29"/>
+          <p:cNvPr id="34" name="TextBox 33"/>
           <p:cNvSpPr txBox="1"/>
           <p:nvPr/>
         </p:nvSpPr>
@@ -9086,7 +9244,7 @@
         </p:nvSpPr>
         <p:spPr>
           <a:xfrm>
-            <a:off x="1981200" y="2692400"/>
+            <a:off x="1981200" y="2717800"/>
             <a:ext cx="8229600" cy="12700"/>
           </a:xfrm>
           <a:prstGeom prst="rect">
@@ -9130,12 +9288,247 @@
         </p:nvSpPr>
         <p:spPr>
           <a:xfrm>
-            <a:off x="1701800" y="2413000"/>
-            <a:ext cx="558800" cy="558800"/>
+            <a:off x="1625600" y="2362200"/>
+            <a:ext cx="711200" cy="711200"/>
           </a:xfrm>
           <a:prstGeom prst="roundRect">
             <a:avLst>
-              <a:gd name="adj" fmla="val 20454"/>
+              <a:gd name="adj" fmla="val 19642"/>
+            </a:avLst>
+          </a:prstGeom>
+          <a:solidFill>
+            <a:srgbClr val="00E075"/>
+          </a:solidFill>
+          <a:ln>
+            <a:noFill/>
+          </a:ln>
+          <a:effectLst/>
+        </p:spPr>
+        <p:style>
+          <a:lnRef idx="1">
+            <a:schemeClr val="accent1"/>
+          </a:lnRef>
+          <a:fillRef idx="3">
+            <a:schemeClr val="accent1"/>
+          </a:fillRef>
+          <a:effectRef idx="2">
+            <a:schemeClr val="accent1"/>
+          </a:effectRef>
+          <a:fontRef idx="minor">
+            <a:schemeClr val="lt1"/>
+          </a:fontRef>
+        </p:style>
+        <p:txBody>
+          <a:bodyPr rtlCol="0" anchor="ctr"/>
+          <a:lstStyle/>
+          <a:p>
+            <a:pPr algn="ctr"/>
+          </a:p>
+        </p:txBody>
+      </p:sp>
+      <p:pic>
+        <p:nvPicPr>
+          <p:cNvPr id="6" name="Picture 5" descr="icon-mensen-navy.png"/>
+          <p:cNvPicPr>
+            <a:picLocks noChangeAspect="1"/>
+          </p:cNvPicPr>
+          <p:nvPr/>
+        </p:nvPicPr>
+        <p:blipFill>
+          <a:blip r:embed="rId2"/>
+          <a:stretch>
+            <a:fillRect/>
+          </a:stretch>
+        </p:blipFill>
+        <p:spPr>
+          <a:xfrm>
+            <a:off x="1803400" y="2540000"/>
+            <a:ext cx="355600" cy="355600"/>
+          </a:xfrm>
+          <a:prstGeom prst="rect">
+            <a:avLst/>
+          </a:prstGeom>
+        </p:spPr>
+      </p:pic>
+      <p:sp>
+        <p:nvSpPr>
+          <p:cNvPr id="7" name="TextBox 6"/>
+          <p:cNvSpPr txBox="1"/>
+          <p:nvPr/>
+        </p:nvSpPr>
+        <p:spPr>
+          <a:xfrm>
+            <a:off x="762000" y="2032000"/>
+            <a:ext cx="2438400" cy="228600"/>
+          </a:xfrm>
+          <a:prstGeom prst="rect">
+            <a:avLst/>
+          </a:prstGeom>
+          <a:noFill/>
+        </p:spPr>
+        <p:txBody>
+          <a:bodyPr wrap="square" lIns="0" rIns="0" tIns="0" bIns="0">
+            <a:spAutoFit/>
+          </a:bodyPr>
+          <a:lstStyle/>
+          <a:p>
+            <a:pPr algn="ctr">
+              <a:lnSpc>
+                <a:spcPct val="100000"/>
+              </a:lnSpc>
+            </a:pPr>
+            <a:r>
+              <a:rPr sz="1200" b="0">
+                <a:solidFill>
+                  <a:srgbClr val="00E075"/>
+                </a:solidFill>
+                <a:latin typeface="League Spartan"/>
+              </a:rPr>
+              <a:t>01</a:t>
+            </a:r>
+          </a:p>
+        </p:txBody>
+      </p:sp>
+      <p:sp>
+        <p:nvSpPr>
+          <p:cNvPr id="8" name="TextBox 7"/>
+          <p:cNvSpPr txBox="1"/>
+          <p:nvPr/>
+        </p:nvSpPr>
+        <p:spPr>
+          <a:xfrm>
+            <a:off x="762000" y="3403600"/>
+            <a:ext cx="2438400" cy="736600"/>
+          </a:xfrm>
+          <a:prstGeom prst="rect">
+            <a:avLst/>
+          </a:prstGeom>
+          <a:noFill/>
+        </p:spPr>
+        <p:txBody>
+          <a:bodyPr wrap="square" lIns="0" rIns="0" tIns="0" bIns="0">
+            <a:spAutoFit/>
+          </a:bodyPr>
+          <a:lstStyle/>
+          <a:p>
+            <a:pPr algn="ctr">
+              <a:lnSpc>
+                <a:spcPct val="118000"/>
+              </a:lnSpc>
+            </a:pPr>
+            <a:r>
+              <a:rPr sz="2200" b="1">
+                <a:solidFill>
+                  <a:srgbClr val="FFFFFF"/>
+                </a:solidFill>
+                <a:latin typeface="League Spartan"/>
+              </a:rPr>
+              <a:t>Confirm Priority</a:t>
+            </a:r>
+          </a:p>
+          <a:p>
+            <a:pPr algn="ctr">
+              <a:lnSpc>
+                <a:spcPct val="118000"/>
+              </a:lnSpc>
+            </a:pPr>
+            <a:r>
+              <a:rPr sz="2200" b="1">
+                <a:solidFill>
+                  <a:srgbClr val="FFFFFF"/>
+                </a:solidFill>
+                <a:latin typeface="League Spartan"/>
+              </a:rPr>
+              <a:t>and Budget</a:t>
+            </a:r>
+          </a:p>
+        </p:txBody>
+      </p:sp>
+      <p:sp>
+        <p:nvSpPr>
+          <p:cNvPr id="9" name="TextBox 8"/>
+          <p:cNvSpPr txBox="1"/>
+          <p:nvPr/>
+        </p:nvSpPr>
+        <p:spPr>
+          <a:xfrm>
+            <a:off x="762000" y="4267200"/>
+            <a:ext cx="2438400" cy="952500"/>
+          </a:xfrm>
+          <a:prstGeom prst="rect">
+            <a:avLst/>
+          </a:prstGeom>
+          <a:noFill/>
+        </p:spPr>
+        <p:txBody>
+          <a:bodyPr wrap="square" lIns="0" rIns="0" tIns="0" bIns="0">
+            <a:spAutoFit/>
+          </a:bodyPr>
+          <a:lstStyle/>
+          <a:p>
+            <a:pPr algn="ctr">
+              <a:lnSpc>
+                <a:spcPct val="140000"/>
+              </a:lnSpc>
+            </a:pPr>
+            <a:r>
+              <a:rPr sz="1600" b="0">
+                <a:solidFill>
+                  <a:srgbClr val="9EABB1"/>
+                </a:solidFill>
+                <a:latin typeface="Inter"/>
+              </a:rPr>
+              <a:t>Gauge with the Executive</a:t>
+            </a:r>
+          </a:p>
+          <a:p>
+            <a:pPr algn="ctr">
+              <a:lnSpc>
+                <a:spcPct val="140000"/>
+              </a:lnSpc>
+            </a:pPr>
+            <a:r>
+              <a:rPr sz="1600" b="0">
+                <a:solidFill>
+                  <a:srgbClr val="9EABB1"/>
+                </a:solidFill>
+                <a:latin typeface="Inter"/>
+              </a:rPr>
+              <a:t>Board whether this is</a:t>
+            </a:r>
+          </a:p>
+          <a:p>
+            <a:pPr algn="ctr">
+              <a:lnSpc>
+                <a:spcPct val="140000"/>
+              </a:lnSpc>
+            </a:pPr>
+            <a:r>
+              <a:rPr sz="1600" b="0">
+                <a:solidFill>
+                  <a:srgbClr val="9EABB1"/>
+                </a:solidFill>
+                <a:latin typeface="Inter"/>
+              </a:rPr>
+              <a:t>a priority now.</a:t>
+            </a:r>
+          </a:p>
+        </p:txBody>
+      </p:sp>
+      <p:sp>
+        <p:nvSpPr>
+          <p:cNvPr id="10" name="Rounded Rectangle 9"/>
+          <p:cNvSpPr/>
+          <p:nvPr/>
+        </p:nvSpPr>
+        <p:spPr>
+          <a:xfrm>
+            <a:off x="4368800" y="2362200"/>
+            <a:ext cx="711200" cy="711200"/>
+          </a:xfrm>
+          <a:prstGeom prst="roundRect">
+            <a:avLst>
+              <a:gd name="adj" fmla="val 19642"/>
             </a:avLst>
           </a:prstGeom>
           <a:solidFill>
@@ -9170,22 +9563,22 @@
       </p:sp>
       <p:pic>
         <p:nvPicPr>
-          <p:cNvPr id="6" name="Picture 5" descr="icon-mensen-green.png"/>
+          <p:cNvPr id="11" name="Picture 10" descr="icon-globe-green.png"/>
           <p:cNvPicPr>
             <a:picLocks noChangeAspect="1"/>
           </p:cNvPicPr>
           <p:nvPr/>
         </p:nvPicPr>
         <p:blipFill>
-          <a:blip r:embed="rId2"/>
+          <a:blip r:embed="rId3"/>
           <a:stretch>
             <a:fillRect/>
           </a:stretch>
         </p:blipFill>
         <p:spPr>
           <a:xfrm>
-            <a:off x="1841500" y="2552700"/>
-            <a:ext cx="279400" cy="279400"/>
+            <a:off x="4546600" y="2540000"/>
+            <a:ext cx="355600" cy="355600"/>
           </a:xfrm>
           <a:prstGeom prst="rect">
             <a:avLst/>
@@ -9194,14 +9587,14 @@
       </p:pic>
       <p:sp>
         <p:nvSpPr>
-          <p:cNvPr id="7" name="TextBox 6"/>
+          <p:cNvPr id="12" name="TextBox 11"/>
           <p:cNvSpPr txBox="1"/>
           <p:nvPr/>
         </p:nvSpPr>
         <p:spPr>
           <a:xfrm>
-            <a:off x="762000" y="1930400"/>
-            <a:ext cx="2438400" cy="279400"/>
+            <a:off x="3505200" y="2032000"/>
+            <a:ext cx="2438400" cy="228600"/>
           </a:xfrm>
           <a:prstGeom prst="rect">
             <a:avLst/>
@@ -9226,21 +9619,21 @@
                 </a:solidFill>
                 <a:latin typeface="League Spartan"/>
               </a:rPr>
-              <a:t>01</a:t>
-            </a:r>
-          </a:p>
-        </p:txBody>
-      </p:sp>
-      <p:sp>
-        <p:nvSpPr>
-          <p:cNvPr id="8" name="TextBox 7"/>
+              <a:t>02</a:t>
+            </a:r>
+          </a:p>
+        </p:txBody>
+      </p:sp>
+      <p:sp>
+        <p:nvSpPr>
+          <p:cNvPr id="13" name="TextBox 12"/>
           <p:cNvSpPr txBox="1"/>
           <p:nvPr/>
         </p:nvSpPr>
         <p:spPr>
           <a:xfrm>
-            <a:off x="762000" y="3251200"/>
-            <a:ext cx="2438400" cy="762000"/>
+            <a:off x="3505200" y="3403600"/>
+            <a:ext cx="2438400" cy="736600"/>
           </a:xfrm>
           <a:prstGeom prst="rect">
             <a:avLst/>
@@ -9255,47 +9648,47 @@
           <a:p>
             <a:pPr algn="ctr">
               <a:lnSpc>
-                <a:spcPct val="120000"/>
-              </a:lnSpc>
-            </a:pPr>
-            <a:r>
-              <a:rPr sz="1600" b="1">
+                <a:spcPct val="118000"/>
+              </a:lnSpc>
+            </a:pPr>
+            <a:r>
+              <a:rPr sz="2200" b="1">
                 <a:solidFill>
                   <a:srgbClr val="FFFFFF"/>
                 </a:solidFill>
                 <a:latin typeface="League Spartan"/>
               </a:rPr>
-              <a:t>Confirm Priority</a:t>
+              <a:t>Validate</a:t>
             </a:r>
           </a:p>
           <a:p>
             <a:pPr algn="ctr">
               <a:lnSpc>
-                <a:spcPct val="120000"/>
-              </a:lnSpc>
-            </a:pPr>
-            <a:r>
-              <a:rPr sz="1600" b="1">
+                <a:spcPct val="118000"/>
+              </a:lnSpc>
+            </a:pPr>
+            <a:r>
+              <a:rPr sz="2200" b="1">
                 <a:solidFill>
                   <a:srgbClr val="FFFFFF"/>
                 </a:solidFill>
                 <a:latin typeface="League Spartan"/>
               </a:rPr>
-              <a:t>and Budget</a:t>
-            </a:r>
-          </a:p>
-        </p:txBody>
-      </p:sp>
-      <p:sp>
-        <p:nvSpPr>
-          <p:cNvPr id="9" name="TextBox 8"/>
+              <a:t>in the U.S.</a:t>
+            </a:r>
+          </a:p>
+        </p:txBody>
+      </p:sp>
+      <p:sp>
+        <p:nvSpPr>
+          <p:cNvPr id="14" name="TextBox 13"/>
           <p:cNvSpPr txBox="1"/>
           <p:nvPr/>
         </p:nvSpPr>
         <p:spPr>
           <a:xfrm>
-            <a:off x="762000" y="4089400"/>
-            <a:ext cx="2438400" cy="1016000"/>
+            <a:off x="3505200" y="4267200"/>
+            <a:ext cx="2438400" cy="952500"/>
           </a:xfrm>
           <a:prstGeom prst="rect">
             <a:avLst/>
@@ -9314,31 +9707,47 @@
               </a:lnSpc>
             </a:pPr>
             <a:r>
-              <a:rPr sz="1200" b="0">
+              <a:rPr sz="1600" b="0">
                 <a:solidFill>
                   <a:srgbClr val="9EABB1"/>
                 </a:solidFill>
                 <a:latin typeface="Inter"/>
               </a:rPr>
-              <a:t>Gauge with the Executive Board whether this is a priority now.</a:t>
-            </a:r>
-          </a:p>
-        </p:txBody>
-      </p:sp>
-      <p:sp>
-        <p:nvSpPr>
-          <p:cNvPr id="10" name="Rounded Rectangle 9"/>
+              <a:t>On-site with instructors,</a:t>
+            </a:r>
+          </a:p>
+          <a:p>
+            <a:pPr algn="ctr">
+              <a:lnSpc>
+                <a:spcPct val="140000"/>
+              </a:lnSpc>
+            </a:pPr>
+            <a:r>
+              <a:rPr sz="1600" b="0">
+                <a:solidFill>
+                  <a:srgbClr val="9EABB1"/>
+                </a:solidFill>
+                <a:latin typeface="Inter"/>
+              </a:rPr>
+              <a:t>students, and leadership.</a:t>
+            </a:r>
+          </a:p>
+        </p:txBody>
+      </p:sp>
+      <p:sp>
+        <p:nvSpPr>
+          <p:cNvPr id="15" name="Rounded Rectangle 14"/>
           <p:cNvSpPr/>
           <p:nvPr/>
         </p:nvSpPr>
         <p:spPr>
           <a:xfrm>
-            <a:off x="4445000" y="2413000"/>
-            <a:ext cx="558800" cy="558800"/>
+            <a:off x="7112000" y="2362200"/>
+            <a:ext cx="711200" cy="711200"/>
           </a:xfrm>
           <a:prstGeom prst="roundRect">
             <a:avLst>
-              <a:gd name="adj" fmla="val 20454"/>
+              <a:gd name="adj" fmla="val 19642"/>
             </a:avLst>
           </a:prstGeom>
           <a:solidFill>
@@ -9373,22 +9782,22 @@
       </p:sp>
       <p:pic>
         <p:nvPicPr>
-          <p:cNvPr id="11" name="Picture 10" descr="icon-globe-green.png"/>
+          <p:cNvPr id="16" name="Picture 15" descr="icon-vlag-green.png"/>
           <p:cNvPicPr>
             <a:picLocks noChangeAspect="1"/>
           </p:cNvPicPr>
           <p:nvPr/>
         </p:nvPicPr>
         <p:blipFill>
-          <a:blip r:embed="rId3"/>
+          <a:blip r:embed="rId4"/>
           <a:stretch>
             <a:fillRect/>
           </a:stretch>
         </p:blipFill>
         <p:spPr>
           <a:xfrm>
-            <a:off x="4584700" y="2552700"/>
-            <a:ext cx="279400" cy="279400"/>
+            <a:off x="7289800" y="2540000"/>
+            <a:ext cx="355600" cy="355600"/>
           </a:xfrm>
           <a:prstGeom prst="rect">
             <a:avLst/>
@@ -9397,14 +9806,14 @@
       </p:pic>
       <p:sp>
         <p:nvSpPr>
-          <p:cNvPr id="12" name="TextBox 11"/>
+          <p:cNvPr id="17" name="TextBox 16"/>
           <p:cNvSpPr txBox="1"/>
           <p:nvPr/>
         </p:nvSpPr>
         <p:spPr>
           <a:xfrm>
-            <a:off x="3505200" y="1930400"/>
-            <a:ext cx="2438400" cy="279400"/>
+            <a:off x="6248400" y="2032000"/>
+            <a:ext cx="2438400" cy="228600"/>
           </a:xfrm>
           <a:prstGeom prst="rect">
             <a:avLst/>
@@ -9429,21 +9838,21 @@
                 </a:solidFill>
                 <a:latin typeface="League Spartan"/>
               </a:rPr>
-              <a:t>02</a:t>
-            </a:r>
-          </a:p>
-        </p:txBody>
-      </p:sp>
-      <p:sp>
-        <p:nvSpPr>
-          <p:cNvPr id="13" name="TextBox 12"/>
+              <a:t>03</a:t>
+            </a:r>
+          </a:p>
+        </p:txBody>
+      </p:sp>
+      <p:sp>
+        <p:nvSpPr>
+          <p:cNvPr id="18" name="TextBox 17"/>
           <p:cNvSpPr txBox="1"/>
           <p:nvPr/>
         </p:nvSpPr>
         <p:spPr>
           <a:xfrm>
-            <a:off x="3505200" y="3251200"/>
-            <a:ext cx="2438400" cy="762000"/>
+            <a:off x="6248400" y="3403600"/>
+            <a:ext cx="2438400" cy="736600"/>
           </a:xfrm>
           <a:prstGeom prst="rect">
             <a:avLst/>
@@ -9458,31 +9867,47 @@
           <a:p>
             <a:pPr algn="ctr">
               <a:lnSpc>
-                <a:spcPct val="120000"/>
-              </a:lnSpc>
-            </a:pPr>
-            <a:r>
-              <a:rPr sz="1600" b="1">
+                <a:spcPct val="118000"/>
+              </a:lnSpc>
+            </a:pPr>
+            <a:r>
+              <a:rPr sz="2200" b="1">
                 <a:solidFill>
                   <a:srgbClr val="FFFFFF"/>
                 </a:solidFill>
                 <a:latin typeface="League Spartan"/>
               </a:rPr>
-              <a:t>Validate in the U.S.</a:t>
-            </a:r>
-          </a:p>
-        </p:txBody>
-      </p:sp>
-      <p:sp>
-        <p:nvSpPr>
-          <p:cNvPr id="14" name="TextBox 13"/>
+              <a:t>Pilot the</a:t>
+            </a:r>
+          </a:p>
+          <a:p>
+            <a:pPr algn="ctr">
+              <a:lnSpc>
+                <a:spcPct val="118000"/>
+              </a:lnSpc>
+            </a:pPr>
+            <a:r>
+              <a:rPr sz="2200" b="1">
+                <a:solidFill>
+                  <a:srgbClr val="FFFFFF"/>
+                </a:solidFill>
+                <a:latin typeface="League Spartan"/>
+              </a:rPr>
+              <a:t>Start Group</a:t>
+            </a:r>
+          </a:p>
+        </p:txBody>
+      </p:sp>
+      <p:sp>
+        <p:nvSpPr>
+          <p:cNvPr id="19" name="TextBox 18"/>
           <p:cNvSpPr txBox="1"/>
           <p:nvPr/>
         </p:nvSpPr>
         <p:spPr>
           <a:xfrm>
-            <a:off x="3505200" y="4089400"/>
-            <a:ext cx="2438400" cy="1016000"/>
+            <a:off x="6248400" y="4267200"/>
+            <a:ext cx="2438400" cy="952500"/>
           </a:xfrm>
           <a:prstGeom prst="rect">
             <a:avLst/>
@@ -9501,31 +9926,47 @@
               </a:lnSpc>
             </a:pPr>
             <a:r>
-              <a:rPr sz="1200" b="0">
+              <a:rPr sz="1600" b="0">
                 <a:solidFill>
                   <a:srgbClr val="9EABB1"/>
                 </a:solidFill>
                 <a:latin typeface="Inter"/>
               </a:rPr>
-              <a:t>On-site with instructors, students, and leadership.</a:t>
-            </a:r>
-          </a:p>
-        </p:txBody>
-      </p:sp>
-      <p:sp>
-        <p:nvSpPr>
-          <p:cNvPr id="15" name="Rounded Rectangle 14"/>
+              <a:t>Launch with a</a:t>
+            </a:r>
+          </a:p>
+          <a:p>
+            <a:pPr algn="ctr">
+              <a:lnSpc>
+                <a:spcPct val="140000"/>
+              </a:lnSpc>
+            </a:pPr>
+            <a:r>
+              <a:rPr sz="1600" b="0">
+                <a:solidFill>
+                  <a:srgbClr val="9EABB1"/>
+                </a:solidFill>
+                <a:latin typeface="Inter"/>
+              </a:rPr>
+              <a:t>self-scaling license.</a:t>
+            </a:r>
+          </a:p>
+        </p:txBody>
+      </p:sp>
+      <p:sp>
+        <p:nvSpPr>
+          <p:cNvPr id="20" name="Rounded Rectangle 19"/>
           <p:cNvSpPr/>
           <p:nvPr/>
         </p:nvSpPr>
         <p:spPr>
           <a:xfrm>
-            <a:off x="7188200" y="2413000"/>
-            <a:ext cx="558800" cy="558800"/>
+            <a:off x="9855200" y="2362200"/>
+            <a:ext cx="711200" cy="711200"/>
           </a:xfrm>
           <a:prstGeom prst="roundRect">
             <a:avLst>
-              <a:gd name="adj" fmla="val 20454"/>
+              <a:gd name="adj" fmla="val 19642"/>
             </a:avLst>
           </a:prstGeom>
           <a:solidFill>
@@ -9560,194 +10001,7 @@
       </p:sp>
       <p:pic>
         <p:nvPicPr>
-          <p:cNvPr id="16" name="Picture 15" descr="icon-vlag-green.png"/>
-          <p:cNvPicPr>
-            <a:picLocks noChangeAspect="1"/>
-          </p:cNvPicPr>
-          <p:nvPr/>
-        </p:nvPicPr>
-        <p:blipFill>
-          <a:blip r:embed="rId4"/>
-          <a:stretch>
-            <a:fillRect/>
-          </a:stretch>
-        </p:blipFill>
-        <p:spPr>
-          <a:xfrm>
-            <a:off x="7327900" y="2552700"/>
-            <a:ext cx="279400" cy="279400"/>
-          </a:xfrm>
-          <a:prstGeom prst="rect">
-            <a:avLst/>
-          </a:prstGeom>
-        </p:spPr>
-      </p:pic>
-      <p:sp>
-        <p:nvSpPr>
-          <p:cNvPr id="17" name="TextBox 16"/>
-          <p:cNvSpPr txBox="1"/>
-          <p:nvPr/>
-        </p:nvSpPr>
-        <p:spPr>
-          <a:xfrm>
-            <a:off x="6248400" y="1930400"/>
-            <a:ext cx="2438400" cy="279400"/>
-          </a:xfrm>
-          <a:prstGeom prst="rect">
-            <a:avLst/>
-          </a:prstGeom>
-          <a:noFill/>
-        </p:spPr>
-        <p:txBody>
-          <a:bodyPr wrap="square" lIns="0" rIns="0" tIns="0" bIns="0">
-            <a:spAutoFit/>
-          </a:bodyPr>
-          <a:lstStyle/>
-          <a:p>
-            <a:pPr algn="ctr">
-              <a:lnSpc>
-                <a:spcPct val="100000"/>
-              </a:lnSpc>
-            </a:pPr>
-            <a:r>
-              <a:rPr sz="1200" b="0">
-                <a:solidFill>
-                  <a:srgbClr val="9EABB1"/>
-                </a:solidFill>
-                <a:latin typeface="League Spartan"/>
-              </a:rPr>
-              <a:t>03</a:t>
-            </a:r>
-          </a:p>
-        </p:txBody>
-      </p:sp>
-      <p:sp>
-        <p:nvSpPr>
-          <p:cNvPr id="18" name="TextBox 17"/>
-          <p:cNvSpPr txBox="1"/>
-          <p:nvPr/>
-        </p:nvSpPr>
-        <p:spPr>
-          <a:xfrm>
-            <a:off x="6248400" y="3251200"/>
-            <a:ext cx="2438400" cy="762000"/>
-          </a:xfrm>
-          <a:prstGeom prst="rect">
-            <a:avLst/>
-          </a:prstGeom>
-          <a:noFill/>
-        </p:spPr>
-        <p:txBody>
-          <a:bodyPr wrap="square" lIns="0" rIns="0" tIns="0" bIns="0">
-            <a:spAutoFit/>
-          </a:bodyPr>
-          <a:lstStyle/>
-          <a:p>
-            <a:pPr algn="ctr">
-              <a:lnSpc>
-                <a:spcPct val="120000"/>
-              </a:lnSpc>
-            </a:pPr>
-            <a:r>
-              <a:rPr sz="1600" b="1">
-                <a:solidFill>
-                  <a:srgbClr val="FFFFFF"/>
-                </a:solidFill>
-                <a:latin typeface="League Spartan"/>
-              </a:rPr>
-              <a:t>Pilot the Start Group</a:t>
-            </a:r>
-          </a:p>
-        </p:txBody>
-      </p:sp>
-      <p:sp>
-        <p:nvSpPr>
-          <p:cNvPr id="19" name="TextBox 18"/>
-          <p:cNvSpPr txBox="1"/>
-          <p:nvPr/>
-        </p:nvSpPr>
-        <p:spPr>
-          <a:xfrm>
-            <a:off x="6248400" y="4089400"/>
-            <a:ext cx="2438400" cy="1016000"/>
-          </a:xfrm>
-          <a:prstGeom prst="rect">
-            <a:avLst/>
-          </a:prstGeom>
-          <a:noFill/>
-        </p:spPr>
-        <p:txBody>
-          <a:bodyPr wrap="square" lIns="0" rIns="0" tIns="0" bIns="0">
-            <a:spAutoFit/>
-          </a:bodyPr>
-          <a:lstStyle/>
-          <a:p>
-            <a:pPr algn="ctr">
-              <a:lnSpc>
-                <a:spcPct val="140000"/>
-              </a:lnSpc>
-            </a:pPr>
-            <a:r>
-              <a:rPr sz="1200" b="0">
-                <a:solidFill>
-                  <a:srgbClr val="9EABB1"/>
-                </a:solidFill>
-                <a:latin typeface="Inter"/>
-              </a:rPr>
-              <a:t>Launch with a self-scaling license.</a:t>
-            </a:r>
-          </a:p>
-        </p:txBody>
-      </p:sp>
-      <p:sp>
-        <p:nvSpPr>
-          <p:cNvPr id="20" name="Rounded Rectangle 19"/>
-          <p:cNvSpPr/>
-          <p:nvPr/>
-        </p:nvSpPr>
-        <p:spPr>
-          <a:xfrm>
-            <a:off x="9931400" y="2413000"/>
-            <a:ext cx="558800" cy="558800"/>
-          </a:xfrm>
-          <a:prstGeom prst="roundRect">
-            <a:avLst>
-              <a:gd name="adj" fmla="val 20454"/>
-            </a:avLst>
-          </a:prstGeom>
-          <a:solidFill>
-            <a:srgbClr val="00E075"/>
-          </a:solidFill>
-          <a:ln>
-            <a:noFill/>
-          </a:ln>
-          <a:effectLst/>
-        </p:spPr>
-        <p:style>
-          <a:lnRef idx="1">
-            <a:schemeClr val="accent1"/>
-          </a:lnRef>
-          <a:fillRef idx="3">
-            <a:schemeClr val="accent1"/>
-          </a:fillRef>
-          <a:effectRef idx="2">
-            <a:schemeClr val="accent1"/>
-          </a:effectRef>
-          <a:fontRef idx="minor">
-            <a:schemeClr val="lt1"/>
-          </a:fontRef>
-        </p:style>
-        <p:txBody>
-          <a:bodyPr rtlCol="0" anchor="ctr"/>
-          <a:lstStyle/>
-          <a:p>
-            <a:pPr algn="ctr"/>
-          </a:p>
-        </p:txBody>
-      </p:sp>
-      <p:pic>
-        <p:nvPicPr>
-          <p:cNvPr id="21" name="Picture 20" descr="icon-kalender-navy.png"/>
+          <p:cNvPr id="21" name="Picture 20" descr="icon-kalender-green.png"/>
           <p:cNvPicPr>
             <a:picLocks noChangeAspect="1"/>
           </p:cNvPicPr>
@@ -9761,8 +10015,8 @@
         </p:blipFill>
         <p:spPr>
           <a:xfrm>
-            <a:off x="10071100" y="2552700"/>
-            <a:ext cx="279400" cy="279400"/>
+            <a:off x="10033000" y="2540000"/>
+            <a:ext cx="355600" cy="355600"/>
           </a:xfrm>
           <a:prstGeom prst="rect">
             <a:avLst/>
@@ -9777,8 +10031,8 @@
         </p:nvSpPr>
         <p:spPr>
           <a:xfrm>
-            <a:off x="8991600" y="1930400"/>
-            <a:ext cx="2438400" cy="279400"/>
+            <a:off x="8991600" y="2032000"/>
+            <a:ext cx="2438400" cy="228600"/>
           </a:xfrm>
           <a:prstGeom prst="rect">
             <a:avLst/>
@@ -9799,7 +10053,7 @@
             <a:r>
               <a:rPr sz="1200" b="0">
                 <a:solidFill>
-                  <a:srgbClr val="00E075"/>
+                  <a:srgbClr val="9EABB1"/>
                 </a:solidFill>
                 <a:latin typeface="League Spartan"/>
               </a:rPr>
@@ -9816,8 +10070,8 @@
         </p:nvSpPr>
         <p:spPr>
           <a:xfrm>
-            <a:off x="8991600" y="3251200"/>
-            <a:ext cx="2438400" cy="762000"/>
+            <a:off x="8991600" y="3403600"/>
+            <a:ext cx="2438400" cy="736600"/>
           </a:xfrm>
           <a:prstGeom prst="rect">
             <a:avLst/>
@@ -9832,11 +10086,11 @@
           <a:p>
             <a:pPr algn="ctr">
               <a:lnSpc>
-                <a:spcPct val="120000"/>
-              </a:lnSpc>
-            </a:pPr>
-            <a:r>
-              <a:rPr sz="1600" b="1">
+                <a:spcPct val="118000"/>
+              </a:lnSpc>
+            </a:pPr>
+            <a:r>
+              <a:rPr sz="2200" b="1">
                 <a:solidFill>
                   <a:srgbClr val="FFFFFF"/>
                 </a:solidFill>
@@ -9848,11 +10102,11 @@
           <a:p>
             <a:pPr algn="ctr">
               <a:lnSpc>
-                <a:spcPct val="120000"/>
-              </a:lnSpc>
-            </a:pPr>
-            <a:r>
-              <a:rPr sz="1600" b="1">
+                <a:spcPct val="118000"/>
+              </a:lnSpc>
+            </a:pPr>
+            <a:r>
+              <a:rPr sz="2200" b="1">
                 <a:solidFill>
                   <a:srgbClr val="FFFFFF"/>
                 </a:solidFill>
@@ -9871,8 +10125,8 @@
         </p:nvSpPr>
         <p:spPr>
           <a:xfrm>
-            <a:off x="8991600" y="4089400"/>
-            <a:ext cx="2438400" cy="1016000"/>
+            <a:off x="8991600" y="4267200"/>
+            <a:ext cx="2438400" cy="952500"/>
           </a:xfrm>
           <a:prstGeom prst="rect">
             <a:avLst/>
@@ -9891,13 +10145,29 @@
               </a:lnSpc>
             </a:pPr>
             <a:r>
-              <a:rPr sz="1200" b="0">
+              <a:rPr sz="1600" b="0">
                 <a:solidFill>
                   <a:srgbClr val="9EABB1"/>
                 </a:solidFill>
                 <a:latin typeface="Inter"/>
               </a:rPr>
-              <a:t>Roll out institution-wide from next academic year.</a:t>
+              <a:t>Roll out institution-wide</a:t>
+            </a:r>
+          </a:p>
+          <a:p>
+            <a:pPr algn="ctr">
+              <a:lnSpc>
+                <a:spcPct val="140000"/>
+              </a:lnSpc>
+            </a:pPr>
+            <a:r>
+              <a:rPr sz="1600" b="0">
+                <a:solidFill>
+                  <a:srgbClr val="9EABB1"/>
+                </a:solidFill>
+                <a:latin typeface="Inter"/>
+              </a:rPr>
+              <a:t>from next academic year.</a:t>
             </a:r>
           </a:p>
         </p:txBody>
@@ -13288,7 +13558,7 @@
         <p:spPr>
           <a:xfrm>
             <a:off x="6400800" y="4165600"/>
-            <a:ext cx="1270000" cy="579120"/>
+            <a:ext cx="1676400" cy="579120"/>
           </a:xfrm>
           <a:prstGeom prst="rect">
             <a:avLst/>
@@ -13326,8 +13596,8 @@
         </p:nvSpPr>
         <p:spPr>
           <a:xfrm>
-            <a:off x="7848600" y="4356100"/>
-            <a:ext cx="3581400" cy="325120"/>
+            <a:off x="8255000" y="4356100"/>
+            <a:ext cx="3175000" cy="325120"/>
           </a:xfrm>
           <a:prstGeom prst="rect">
             <a:avLst/>
@@ -13366,7 +13636,7 @@
         <p:spPr>
           <a:xfrm>
             <a:off x="6400800" y="4826000"/>
-            <a:ext cx="1270000" cy="579120"/>
+            <a:ext cx="1676400" cy="579120"/>
           </a:xfrm>
           <a:prstGeom prst="rect">
             <a:avLst/>
@@ -13404,8 +13674,8 @@
         </p:nvSpPr>
         <p:spPr>
           <a:xfrm>
-            <a:off x="7848600" y="5016500"/>
-            <a:ext cx="3581400" cy="325120"/>
+            <a:off x="8255000" y="5016500"/>
+            <a:ext cx="3175000" cy="325120"/>
           </a:xfrm>
           <a:prstGeom prst="rect">
             <a:avLst/>

--- a/projects/uti/deck/UTI-Eduface-deck.pptx
+++ b/projects/uti/deck/UTI-Eduface-deck.pptx
@@ -9244,8 +9244,8 @@
         </p:nvSpPr>
         <p:spPr>
           <a:xfrm>
-            <a:off x="1981200" y="2717800"/>
-            <a:ext cx="8229600" cy="12700"/>
+            <a:off x="1466850" y="2070100"/>
+            <a:ext cx="12700" cy="3251200"/>
           </a:xfrm>
           <a:prstGeom prst="rect">
             <a:avLst/>
@@ -9288,12 +9288,12 @@
         </p:nvSpPr>
         <p:spPr>
           <a:xfrm>
-            <a:off x="1625600" y="2362200"/>
-            <a:ext cx="711200" cy="711200"/>
+            <a:off x="1219200" y="1816100"/>
+            <a:ext cx="508000" cy="508000"/>
           </a:xfrm>
           <a:prstGeom prst="roundRect">
             <a:avLst>
-              <a:gd name="adj" fmla="val 19642"/>
+              <a:gd name="adj" fmla="val 22500"/>
             </a:avLst>
           </a:prstGeom>
           <a:solidFill>
@@ -9342,8 +9342,8 @@
         </p:blipFill>
         <p:spPr>
           <a:xfrm>
-            <a:off x="1803400" y="2540000"/>
-            <a:ext cx="355600" cy="355600"/>
+            <a:off x="1346200" y="1943100"/>
+            <a:ext cx="254000" cy="254000"/>
           </a:xfrm>
           <a:prstGeom prst="rect">
             <a:avLst/>
@@ -9358,21 +9358,21 @@
         </p:nvSpPr>
         <p:spPr>
           <a:xfrm>
-            <a:off x="762000" y="2032000"/>
-            <a:ext cx="2438400" cy="228600"/>
-          </a:xfrm>
-          <a:prstGeom prst="rect">
-            <a:avLst/>
-          </a:prstGeom>
-          <a:noFill/>
-        </p:spPr>
-        <p:txBody>
-          <a:bodyPr wrap="square" lIns="0" rIns="0" tIns="0" bIns="0">
-            <a:spAutoFit/>
-          </a:bodyPr>
-          <a:lstStyle/>
-          <a:p>
-            <a:pPr algn="ctr">
+            <a:off x="762000" y="1955800"/>
+            <a:ext cx="355600" cy="228600"/>
+          </a:xfrm>
+          <a:prstGeom prst="rect">
+            <a:avLst/>
+          </a:prstGeom>
+          <a:noFill/>
+        </p:spPr>
+        <p:txBody>
+          <a:bodyPr wrap="square" lIns="0" rIns="0" tIns="0" bIns="0">
+            <a:spAutoFit/>
+          </a:bodyPr>
+          <a:lstStyle/>
+          <a:p>
+            <a:pPr algn="l">
               <a:lnSpc>
                 <a:spcPct val="100000"/>
               </a:lnSpc>
@@ -9397,27 +9397,27 @@
         </p:nvSpPr>
         <p:spPr>
           <a:xfrm>
-            <a:off x="762000" y="3403600"/>
-            <a:ext cx="2438400" cy="736600"/>
-          </a:xfrm>
-          <a:prstGeom prst="rect">
-            <a:avLst/>
-          </a:prstGeom>
-          <a:noFill/>
-        </p:spPr>
-        <p:txBody>
-          <a:bodyPr wrap="square" lIns="0" rIns="0" tIns="0" bIns="0">
-            <a:spAutoFit/>
-          </a:bodyPr>
-          <a:lstStyle/>
-          <a:p>
-            <a:pPr algn="ctr">
-              <a:lnSpc>
-                <a:spcPct val="118000"/>
-              </a:lnSpc>
-            </a:pPr>
-            <a:r>
-              <a:rPr sz="2200" b="1">
+            <a:off x="1981200" y="1765300"/>
+            <a:ext cx="2159000" cy="528320"/>
+          </a:xfrm>
+          <a:prstGeom prst="rect">
+            <a:avLst/>
+          </a:prstGeom>
+          <a:noFill/>
+        </p:spPr>
+        <p:txBody>
+          <a:bodyPr wrap="square" lIns="0" rIns="0" tIns="0" bIns="0">
+            <a:spAutoFit/>
+          </a:bodyPr>
+          <a:lstStyle/>
+          <a:p>
+            <a:pPr algn="l">
+              <a:lnSpc>
+                <a:spcPct val="120000"/>
+              </a:lnSpc>
+            </a:pPr>
+            <a:r>
+              <a:rPr sz="1600" b="1">
                 <a:solidFill>
                   <a:srgbClr val="FFFFFF"/>
                 </a:solidFill>
@@ -9427,13 +9427,13 @@
             </a:r>
           </a:p>
           <a:p>
-            <a:pPr algn="ctr">
-              <a:lnSpc>
-                <a:spcPct val="118000"/>
-              </a:lnSpc>
-            </a:pPr>
-            <a:r>
-              <a:rPr sz="2200" b="1">
+            <a:pPr algn="l">
+              <a:lnSpc>
+                <a:spcPct val="120000"/>
+              </a:lnSpc>
+            </a:pPr>
+            <a:r>
+              <a:rPr sz="1600" b="1">
                 <a:solidFill>
                   <a:srgbClr val="FFFFFF"/>
                 </a:solidFill>
@@ -9452,23 +9452,23 @@
         </p:nvSpPr>
         <p:spPr>
           <a:xfrm>
-            <a:off x="762000" y="4267200"/>
-            <a:ext cx="2438400" cy="952500"/>
-          </a:xfrm>
-          <a:prstGeom prst="rect">
-            <a:avLst/>
-          </a:prstGeom>
-          <a:noFill/>
-        </p:spPr>
-        <p:txBody>
-          <a:bodyPr wrap="square" lIns="0" rIns="0" tIns="0" bIns="0">
-            <a:spAutoFit/>
-          </a:bodyPr>
-          <a:lstStyle/>
-          <a:p>
-            <a:pPr algn="ctr">
-              <a:lnSpc>
-                <a:spcPct val="140000"/>
+            <a:off x="4445000" y="1765300"/>
+            <a:ext cx="6985000" cy="528320"/>
+          </a:xfrm>
+          <a:prstGeom prst="rect">
+            <a:avLst/>
+          </a:prstGeom>
+          <a:noFill/>
+        </p:spPr>
+        <p:txBody>
+          <a:bodyPr wrap="square" lIns="0" rIns="0" tIns="0" bIns="0">
+            <a:spAutoFit/>
+          </a:bodyPr>
+          <a:lstStyle/>
+          <a:p>
+            <a:pPr algn="l">
+              <a:lnSpc>
+                <a:spcPct val="145000"/>
               </a:lnSpc>
             </a:pPr>
             <a:r>
@@ -9478,39 +9478,7 @@
                 </a:solidFill>
                 <a:latin typeface="Inter"/>
               </a:rPr>
-              <a:t>Gauge with the Executive</a:t>
-            </a:r>
-          </a:p>
-          <a:p>
-            <a:pPr algn="ctr">
-              <a:lnSpc>
-                <a:spcPct val="140000"/>
-              </a:lnSpc>
-            </a:pPr>
-            <a:r>
-              <a:rPr sz="1600" b="0">
-                <a:solidFill>
-                  <a:srgbClr val="9EABB1"/>
-                </a:solidFill>
-                <a:latin typeface="Inter"/>
-              </a:rPr>
-              <a:t>Board whether this is</a:t>
-            </a:r>
-          </a:p>
-          <a:p>
-            <a:pPr algn="ctr">
-              <a:lnSpc>
-                <a:spcPct val="140000"/>
-              </a:lnSpc>
-            </a:pPr>
-            <a:r>
-              <a:rPr sz="1600" b="0">
-                <a:solidFill>
-                  <a:srgbClr val="9EABB1"/>
-                </a:solidFill>
-                <a:latin typeface="Inter"/>
-              </a:rPr>
-              <a:t>a priority now.</a:t>
+              <a:t>Gauge with the Executive Board whether this is a priority now.</a:t>
             </a:r>
           </a:p>
         </p:txBody>
@@ -9523,12 +9491,12 @@
         </p:nvSpPr>
         <p:spPr>
           <a:xfrm>
-            <a:off x="4368800" y="2362200"/>
-            <a:ext cx="711200" cy="711200"/>
+            <a:off x="1219200" y="2628900"/>
+            <a:ext cx="508000" cy="508000"/>
           </a:xfrm>
           <a:prstGeom prst="roundRect">
             <a:avLst>
-              <a:gd name="adj" fmla="val 19642"/>
+              <a:gd name="adj" fmla="val 22500"/>
             </a:avLst>
           </a:prstGeom>
           <a:solidFill>
@@ -9577,8 +9545,8 @@
         </p:blipFill>
         <p:spPr>
           <a:xfrm>
-            <a:off x="4546600" y="2540000"/>
-            <a:ext cx="355600" cy="355600"/>
+            <a:off x="1346200" y="2755900"/>
+            <a:ext cx="254000" cy="254000"/>
           </a:xfrm>
           <a:prstGeom prst="rect">
             <a:avLst/>
@@ -9593,21 +9561,21 @@
         </p:nvSpPr>
         <p:spPr>
           <a:xfrm>
-            <a:off x="3505200" y="2032000"/>
-            <a:ext cx="2438400" cy="228600"/>
-          </a:xfrm>
-          <a:prstGeom prst="rect">
-            <a:avLst/>
-          </a:prstGeom>
-          <a:noFill/>
-        </p:spPr>
-        <p:txBody>
-          <a:bodyPr wrap="square" lIns="0" rIns="0" tIns="0" bIns="0">
-            <a:spAutoFit/>
-          </a:bodyPr>
-          <a:lstStyle/>
-          <a:p>
-            <a:pPr algn="ctr">
+            <a:off x="762000" y="2768600"/>
+            <a:ext cx="355600" cy="228600"/>
+          </a:xfrm>
+          <a:prstGeom prst="rect">
+            <a:avLst/>
+          </a:prstGeom>
+          <a:noFill/>
+        </p:spPr>
+        <p:txBody>
+          <a:bodyPr wrap="square" lIns="0" rIns="0" tIns="0" bIns="0">
+            <a:spAutoFit/>
+          </a:bodyPr>
+          <a:lstStyle/>
+          <a:p>
+            <a:pPr algn="l">
               <a:lnSpc>
                 <a:spcPct val="100000"/>
               </a:lnSpc>
@@ -9632,27 +9600,27 @@
         </p:nvSpPr>
         <p:spPr>
           <a:xfrm>
-            <a:off x="3505200" y="3403600"/>
-            <a:ext cx="2438400" cy="736600"/>
-          </a:xfrm>
-          <a:prstGeom prst="rect">
-            <a:avLst/>
-          </a:prstGeom>
-          <a:noFill/>
-        </p:spPr>
-        <p:txBody>
-          <a:bodyPr wrap="square" lIns="0" rIns="0" tIns="0" bIns="0">
-            <a:spAutoFit/>
-          </a:bodyPr>
-          <a:lstStyle/>
-          <a:p>
-            <a:pPr algn="ctr">
-              <a:lnSpc>
-                <a:spcPct val="118000"/>
-              </a:lnSpc>
-            </a:pPr>
-            <a:r>
-              <a:rPr sz="2200" b="1">
+            <a:off x="1981200" y="2578100"/>
+            <a:ext cx="2159000" cy="528320"/>
+          </a:xfrm>
+          <a:prstGeom prst="rect">
+            <a:avLst/>
+          </a:prstGeom>
+          <a:noFill/>
+        </p:spPr>
+        <p:txBody>
+          <a:bodyPr wrap="square" lIns="0" rIns="0" tIns="0" bIns="0">
+            <a:spAutoFit/>
+          </a:bodyPr>
+          <a:lstStyle/>
+          <a:p>
+            <a:pPr algn="l">
+              <a:lnSpc>
+                <a:spcPct val="120000"/>
+              </a:lnSpc>
+            </a:pPr>
+            <a:r>
+              <a:rPr sz="1600" b="1">
                 <a:solidFill>
                   <a:srgbClr val="FFFFFF"/>
                 </a:solidFill>
@@ -9662,13 +9630,13 @@
             </a:r>
           </a:p>
           <a:p>
-            <a:pPr algn="ctr">
-              <a:lnSpc>
-                <a:spcPct val="118000"/>
-              </a:lnSpc>
-            </a:pPr>
-            <a:r>
-              <a:rPr sz="2200" b="1">
+            <a:pPr algn="l">
+              <a:lnSpc>
+                <a:spcPct val="120000"/>
+              </a:lnSpc>
+            </a:pPr>
+            <a:r>
+              <a:rPr sz="1600" b="1">
                 <a:solidFill>
                   <a:srgbClr val="FFFFFF"/>
                 </a:solidFill>
@@ -9687,23 +9655,23 @@
         </p:nvSpPr>
         <p:spPr>
           <a:xfrm>
-            <a:off x="3505200" y="4267200"/>
-            <a:ext cx="2438400" cy="952500"/>
-          </a:xfrm>
-          <a:prstGeom prst="rect">
-            <a:avLst/>
-          </a:prstGeom>
-          <a:noFill/>
-        </p:spPr>
-        <p:txBody>
-          <a:bodyPr wrap="square" lIns="0" rIns="0" tIns="0" bIns="0">
-            <a:spAutoFit/>
-          </a:bodyPr>
-          <a:lstStyle/>
-          <a:p>
-            <a:pPr algn="ctr">
-              <a:lnSpc>
-                <a:spcPct val="140000"/>
+            <a:off x="4445000" y="2578100"/>
+            <a:ext cx="6985000" cy="528320"/>
+          </a:xfrm>
+          <a:prstGeom prst="rect">
+            <a:avLst/>
+          </a:prstGeom>
+          <a:noFill/>
+        </p:spPr>
+        <p:txBody>
+          <a:bodyPr wrap="square" lIns="0" rIns="0" tIns="0" bIns="0">
+            <a:spAutoFit/>
+          </a:bodyPr>
+          <a:lstStyle/>
+          <a:p>
+            <a:pPr algn="l">
+              <a:lnSpc>
+                <a:spcPct val="145000"/>
               </a:lnSpc>
             </a:pPr>
             <a:r>
@@ -9713,23 +9681,7 @@
                 </a:solidFill>
                 <a:latin typeface="Inter"/>
               </a:rPr>
-              <a:t>On-site with instructors,</a:t>
-            </a:r>
-          </a:p>
-          <a:p>
-            <a:pPr algn="ctr">
-              <a:lnSpc>
-                <a:spcPct val="140000"/>
-              </a:lnSpc>
-            </a:pPr>
-            <a:r>
-              <a:rPr sz="1600" b="0">
-                <a:solidFill>
-                  <a:srgbClr val="9EABB1"/>
-                </a:solidFill>
-                <a:latin typeface="Inter"/>
-              </a:rPr>
-              <a:t>students, and leadership.</a:t>
+              <a:t>On-site with instructors, students, and leadership. Legal and IT validation, approximately one month or more.</a:t>
             </a:r>
           </a:p>
         </p:txBody>
@@ -9742,12 +9694,12 @@
         </p:nvSpPr>
         <p:spPr>
           <a:xfrm>
-            <a:off x="7112000" y="2362200"/>
-            <a:ext cx="711200" cy="711200"/>
+            <a:off x="1219200" y="3441700"/>
+            <a:ext cx="508000" cy="508000"/>
           </a:xfrm>
           <a:prstGeom prst="roundRect">
             <a:avLst>
-              <a:gd name="adj" fmla="val 19642"/>
+              <a:gd name="adj" fmla="val 22500"/>
             </a:avLst>
           </a:prstGeom>
           <a:solidFill>
@@ -9796,8 +9748,8 @@
         </p:blipFill>
         <p:spPr>
           <a:xfrm>
-            <a:off x="7289800" y="2540000"/>
-            <a:ext cx="355600" cy="355600"/>
+            <a:off x="1346200" y="3568700"/>
+            <a:ext cx="254000" cy="254000"/>
           </a:xfrm>
           <a:prstGeom prst="rect">
             <a:avLst/>
@@ -9812,21 +9764,21 @@
         </p:nvSpPr>
         <p:spPr>
           <a:xfrm>
-            <a:off x="6248400" y="2032000"/>
-            <a:ext cx="2438400" cy="228600"/>
-          </a:xfrm>
-          <a:prstGeom prst="rect">
-            <a:avLst/>
-          </a:prstGeom>
-          <a:noFill/>
-        </p:spPr>
-        <p:txBody>
-          <a:bodyPr wrap="square" lIns="0" rIns="0" tIns="0" bIns="0">
-            <a:spAutoFit/>
-          </a:bodyPr>
-          <a:lstStyle/>
-          <a:p>
-            <a:pPr algn="ctr">
+            <a:off x="762000" y="3581400"/>
+            <a:ext cx="355600" cy="228600"/>
+          </a:xfrm>
+          <a:prstGeom prst="rect">
+            <a:avLst/>
+          </a:prstGeom>
+          <a:noFill/>
+        </p:spPr>
+        <p:txBody>
+          <a:bodyPr wrap="square" lIns="0" rIns="0" tIns="0" bIns="0">
+            <a:spAutoFit/>
+          </a:bodyPr>
+          <a:lstStyle/>
+          <a:p>
+            <a:pPr algn="l">
               <a:lnSpc>
                 <a:spcPct val="100000"/>
               </a:lnSpc>
@@ -9851,27 +9803,27 @@
         </p:nvSpPr>
         <p:spPr>
           <a:xfrm>
-            <a:off x="6248400" y="3403600"/>
-            <a:ext cx="2438400" cy="736600"/>
-          </a:xfrm>
-          <a:prstGeom prst="rect">
-            <a:avLst/>
-          </a:prstGeom>
-          <a:noFill/>
-        </p:spPr>
-        <p:txBody>
-          <a:bodyPr wrap="square" lIns="0" rIns="0" tIns="0" bIns="0">
-            <a:spAutoFit/>
-          </a:bodyPr>
-          <a:lstStyle/>
-          <a:p>
-            <a:pPr algn="ctr">
-              <a:lnSpc>
-                <a:spcPct val="118000"/>
-              </a:lnSpc>
-            </a:pPr>
-            <a:r>
-              <a:rPr sz="2200" b="1">
+            <a:off x="1981200" y="3390900"/>
+            <a:ext cx="2159000" cy="528320"/>
+          </a:xfrm>
+          <a:prstGeom prst="rect">
+            <a:avLst/>
+          </a:prstGeom>
+          <a:noFill/>
+        </p:spPr>
+        <p:txBody>
+          <a:bodyPr wrap="square" lIns="0" rIns="0" tIns="0" bIns="0">
+            <a:spAutoFit/>
+          </a:bodyPr>
+          <a:lstStyle/>
+          <a:p>
+            <a:pPr algn="l">
+              <a:lnSpc>
+                <a:spcPct val="120000"/>
+              </a:lnSpc>
+            </a:pPr>
+            <a:r>
+              <a:rPr sz="1600" b="1">
                 <a:solidFill>
                   <a:srgbClr val="FFFFFF"/>
                 </a:solidFill>
@@ -9881,13 +9833,13 @@
             </a:r>
           </a:p>
           <a:p>
-            <a:pPr algn="ctr">
-              <a:lnSpc>
-                <a:spcPct val="118000"/>
-              </a:lnSpc>
-            </a:pPr>
-            <a:r>
-              <a:rPr sz="2200" b="1">
+            <a:pPr algn="l">
+              <a:lnSpc>
+                <a:spcPct val="120000"/>
+              </a:lnSpc>
+            </a:pPr>
+            <a:r>
+              <a:rPr sz="1600" b="1">
                 <a:solidFill>
                   <a:srgbClr val="FFFFFF"/>
                 </a:solidFill>
@@ -9906,23 +9858,23 @@
         </p:nvSpPr>
         <p:spPr>
           <a:xfrm>
-            <a:off x="6248400" y="4267200"/>
-            <a:ext cx="2438400" cy="952500"/>
-          </a:xfrm>
-          <a:prstGeom prst="rect">
-            <a:avLst/>
-          </a:prstGeom>
-          <a:noFill/>
-        </p:spPr>
-        <p:txBody>
-          <a:bodyPr wrap="square" lIns="0" rIns="0" tIns="0" bIns="0">
-            <a:spAutoFit/>
-          </a:bodyPr>
-          <a:lstStyle/>
-          <a:p>
-            <a:pPr algn="ctr">
-              <a:lnSpc>
-                <a:spcPct val="140000"/>
+            <a:off x="4445000" y="3390900"/>
+            <a:ext cx="6985000" cy="528320"/>
+          </a:xfrm>
+          <a:prstGeom prst="rect">
+            <a:avLst/>
+          </a:prstGeom>
+          <a:noFill/>
+        </p:spPr>
+        <p:txBody>
+          <a:bodyPr wrap="square" lIns="0" rIns="0" tIns="0" bIns="0">
+            <a:spAutoFit/>
+          </a:bodyPr>
+          <a:lstStyle/>
+          <a:p>
+            <a:pPr algn="l">
+              <a:lnSpc>
+                <a:spcPct val="145000"/>
               </a:lnSpc>
             </a:pPr>
             <a:r>
@@ -9932,23 +9884,7 @@
                 </a:solidFill>
                 <a:latin typeface="Inter"/>
               </a:rPr>
-              <a:t>Launch with a</a:t>
-            </a:r>
-          </a:p>
-          <a:p>
-            <a:pPr algn="ctr">
-              <a:lnSpc>
-                <a:spcPct val="140000"/>
-              </a:lnSpc>
-            </a:pPr>
-            <a:r>
-              <a:rPr sz="1600" b="0">
-                <a:solidFill>
-                  <a:srgbClr val="9EABB1"/>
-                </a:solidFill>
-                <a:latin typeface="Inter"/>
-              </a:rPr>
-              <a:t>self-scaling license.</a:t>
+              <a:t>Launch with a self-scaling license. On-site instructor training support from the Eduface team at pilot start. Target launch December 2026.</a:t>
             </a:r>
           </a:p>
         </p:txBody>
@@ -9961,12 +9897,12 @@
         </p:nvSpPr>
         <p:spPr>
           <a:xfrm>
-            <a:off x="9855200" y="2362200"/>
-            <a:ext cx="711200" cy="711200"/>
+            <a:off x="1219200" y="4254500"/>
+            <a:ext cx="508000" cy="508000"/>
           </a:xfrm>
           <a:prstGeom prst="roundRect">
             <a:avLst>
-              <a:gd name="adj" fmla="val 19642"/>
+              <a:gd name="adj" fmla="val 22500"/>
             </a:avLst>
           </a:prstGeom>
           <a:solidFill>
@@ -10001,7 +9937,7 @@
       </p:sp>
       <p:pic>
         <p:nvPicPr>
-          <p:cNvPr id="21" name="Picture 20" descr="icon-kalender-green.png"/>
+          <p:cNvPr id="21" name="Picture 20" descr="icon-route-green.png"/>
           <p:cNvPicPr>
             <a:picLocks noChangeAspect="1"/>
           </p:cNvPicPr>
@@ -10015,8 +9951,8 @@
         </p:blipFill>
         <p:spPr>
           <a:xfrm>
-            <a:off x="10033000" y="2540000"/>
-            <a:ext cx="355600" cy="355600"/>
+            <a:off x="1346200" y="4381500"/>
+            <a:ext cx="254000" cy="254000"/>
           </a:xfrm>
           <a:prstGeom prst="rect">
             <a:avLst/>
@@ -10031,21 +9967,21 @@
         </p:nvSpPr>
         <p:spPr>
           <a:xfrm>
-            <a:off x="8991600" y="2032000"/>
-            <a:ext cx="2438400" cy="228600"/>
-          </a:xfrm>
-          <a:prstGeom prst="rect">
-            <a:avLst/>
-          </a:prstGeom>
-          <a:noFill/>
-        </p:spPr>
-        <p:txBody>
-          <a:bodyPr wrap="square" lIns="0" rIns="0" tIns="0" bIns="0">
-            <a:spAutoFit/>
-          </a:bodyPr>
-          <a:lstStyle/>
-          <a:p>
-            <a:pPr algn="ctr">
+            <a:off x="762000" y="4394200"/>
+            <a:ext cx="355600" cy="228600"/>
+          </a:xfrm>
+          <a:prstGeom prst="rect">
+            <a:avLst/>
+          </a:prstGeom>
+          <a:noFill/>
+        </p:spPr>
+        <p:txBody>
+          <a:bodyPr wrap="square" lIns="0" rIns="0" tIns="0" bIns="0">
+            <a:spAutoFit/>
+          </a:bodyPr>
+          <a:lstStyle/>
+          <a:p>
+            <a:pPr algn="l">
               <a:lnSpc>
                 <a:spcPct val="100000"/>
               </a:lnSpc>
@@ -10070,43 +10006,246 @@
         </p:nvSpPr>
         <p:spPr>
           <a:xfrm>
-            <a:off x="8991600" y="3403600"/>
-            <a:ext cx="2438400" cy="736600"/>
-          </a:xfrm>
-          <a:prstGeom prst="rect">
-            <a:avLst/>
-          </a:prstGeom>
-          <a:noFill/>
-        </p:spPr>
-        <p:txBody>
-          <a:bodyPr wrap="square" lIns="0" rIns="0" tIns="0" bIns="0">
-            <a:spAutoFit/>
-          </a:bodyPr>
-          <a:lstStyle/>
-          <a:p>
-            <a:pPr algn="ctr">
-              <a:lnSpc>
-                <a:spcPct val="118000"/>
-              </a:lnSpc>
-            </a:pPr>
-            <a:r>
-              <a:rPr sz="2200" b="1">
+            <a:off x="1981200" y="4203700"/>
+            <a:ext cx="2159000" cy="528320"/>
+          </a:xfrm>
+          <a:prstGeom prst="rect">
+            <a:avLst/>
+          </a:prstGeom>
+          <a:noFill/>
+        </p:spPr>
+        <p:txBody>
+          <a:bodyPr wrap="square" lIns="0" rIns="0" tIns="0" bIns="0">
+            <a:spAutoFit/>
+          </a:bodyPr>
+          <a:lstStyle/>
+          <a:p>
+            <a:pPr algn="l">
+              <a:lnSpc>
+                <a:spcPct val="120000"/>
+              </a:lnSpc>
+            </a:pPr>
+            <a:r>
+              <a:rPr sz="1600" b="1">
                 <a:solidFill>
                   <a:srgbClr val="FFFFFF"/>
                 </a:solidFill>
                 <a:latin typeface="League Spartan"/>
               </a:rPr>
+              <a:t>Programmatic</a:t>
+            </a:r>
+          </a:p>
+          <a:p>
+            <a:pPr algn="l">
+              <a:lnSpc>
+                <a:spcPct val="120000"/>
+              </a:lnSpc>
+            </a:pPr>
+            <a:r>
+              <a:rPr sz="1600" b="1">
+                <a:solidFill>
+                  <a:srgbClr val="FFFFFF"/>
+                </a:solidFill>
+                <a:latin typeface="League Spartan"/>
+              </a:rPr>
+              <a:t>Expansion</a:t>
+            </a:r>
+          </a:p>
+        </p:txBody>
+      </p:sp>
+      <p:sp>
+        <p:nvSpPr>
+          <p:cNvPr id="24" name="TextBox 23"/>
+          <p:cNvSpPr txBox="1"/>
+          <p:nvPr/>
+        </p:nvSpPr>
+        <p:spPr>
+          <a:xfrm>
+            <a:off x="4445000" y="4203700"/>
+            <a:ext cx="6985000" cy="528320"/>
+          </a:xfrm>
+          <a:prstGeom prst="rect">
+            <a:avLst/>
+          </a:prstGeom>
+          <a:noFill/>
+        </p:spPr>
+        <p:txBody>
+          <a:bodyPr wrap="square" lIns="0" rIns="0" tIns="0" bIns="0">
+            <a:spAutoFit/>
+          </a:bodyPr>
+          <a:lstStyle/>
+          <a:p>
+            <a:pPr algn="l">
+              <a:lnSpc>
+                <a:spcPct val="145000"/>
+              </a:lnSpc>
+            </a:pPr>
+            <a:r>
+              <a:rPr sz="1600" b="0">
+                <a:solidFill>
+                  <a:srgbClr val="9EABB1"/>
+                </a:solidFill>
+                <a:latin typeface="Inter"/>
+              </a:rPr>
+              <a:t>Roll out to additional programs following pilot success.</a:t>
+            </a:r>
+          </a:p>
+        </p:txBody>
+      </p:sp>
+      <p:sp>
+        <p:nvSpPr>
+          <p:cNvPr id="25" name="Rounded Rectangle 24"/>
+          <p:cNvSpPr/>
+          <p:nvPr/>
+        </p:nvSpPr>
+        <p:spPr>
+          <a:xfrm>
+            <a:off x="1219200" y="5067300"/>
+            <a:ext cx="508000" cy="508000"/>
+          </a:xfrm>
+          <a:prstGeom prst="roundRect">
+            <a:avLst>
+              <a:gd name="adj" fmla="val 22500"/>
+            </a:avLst>
+          </a:prstGeom>
+          <a:solidFill>
+            <a:srgbClr val="0A2C3B"/>
+          </a:solidFill>
+          <a:ln>
+            <a:noFill/>
+          </a:ln>
+          <a:effectLst/>
+        </p:spPr>
+        <p:style>
+          <a:lnRef idx="1">
+            <a:schemeClr val="accent1"/>
+          </a:lnRef>
+          <a:fillRef idx="3">
+            <a:schemeClr val="accent1"/>
+          </a:fillRef>
+          <a:effectRef idx="2">
+            <a:schemeClr val="accent1"/>
+          </a:effectRef>
+          <a:fontRef idx="minor">
+            <a:schemeClr val="lt1"/>
+          </a:fontRef>
+        </p:style>
+        <p:txBody>
+          <a:bodyPr rtlCol="0" anchor="ctr"/>
+          <a:lstStyle/>
+          <a:p>
+            <a:pPr algn="ctr"/>
+          </a:p>
+        </p:txBody>
+      </p:sp>
+      <p:pic>
+        <p:nvPicPr>
+          <p:cNvPr id="26" name="Picture 25" descr="icon-kalender-green.png"/>
+          <p:cNvPicPr>
+            <a:picLocks noChangeAspect="1"/>
+          </p:cNvPicPr>
+          <p:nvPr/>
+        </p:nvPicPr>
+        <p:blipFill>
+          <a:blip r:embed="rId6"/>
+          <a:stretch>
+            <a:fillRect/>
+          </a:stretch>
+        </p:blipFill>
+        <p:spPr>
+          <a:xfrm>
+            <a:off x="1346200" y="5194300"/>
+            <a:ext cx="254000" cy="254000"/>
+          </a:xfrm>
+          <a:prstGeom prst="rect">
+            <a:avLst/>
+          </a:prstGeom>
+        </p:spPr>
+      </p:pic>
+      <p:sp>
+        <p:nvSpPr>
+          <p:cNvPr id="27" name="TextBox 26"/>
+          <p:cNvSpPr txBox="1"/>
+          <p:nvPr/>
+        </p:nvSpPr>
+        <p:spPr>
+          <a:xfrm>
+            <a:off x="762000" y="5207000"/>
+            <a:ext cx="355600" cy="228600"/>
+          </a:xfrm>
+          <a:prstGeom prst="rect">
+            <a:avLst/>
+          </a:prstGeom>
+          <a:noFill/>
+        </p:spPr>
+        <p:txBody>
+          <a:bodyPr wrap="square" lIns="0" rIns="0" tIns="0" bIns="0">
+            <a:spAutoFit/>
+          </a:bodyPr>
+          <a:lstStyle/>
+          <a:p>
+            <a:pPr algn="l">
+              <a:lnSpc>
+                <a:spcPct val="100000"/>
+              </a:lnSpc>
+            </a:pPr>
+            <a:r>
+              <a:rPr sz="1200" b="0">
+                <a:solidFill>
+                  <a:srgbClr val="9EABB1"/>
+                </a:solidFill>
+                <a:latin typeface="League Spartan"/>
+              </a:rPr>
+              <a:t>05</a:t>
+            </a:r>
+          </a:p>
+        </p:txBody>
+      </p:sp>
+      <p:sp>
+        <p:nvSpPr>
+          <p:cNvPr id="28" name="TextBox 27"/>
+          <p:cNvSpPr txBox="1"/>
+          <p:nvPr/>
+        </p:nvSpPr>
+        <p:spPr>
+          <a:xfrm>
+            <a:off x="1981200" y="5016500"/>
+            <a:ext cx="2159000" cy="528320"/>
+          </a:xfrm>
+          <a:prstGeom prst="rect">
+            <a:avLst/>
+          </a:prstGeom>
+          <a:noFill/>
+        </p:spPr>
+        <p:txBody>
+          <a:bodyPr wrap="square" lIns="0" rIns="0" tIns="0" bIns="0">
+            <a:spAutoFit/>
+          </a:bodyPr>
+          <a:lstStyle/>
+          <a:p>
+            <a:pPr algn="l">
+              <a:lnSpc>
+                <a:spcPct val="120000"/>
+              </a:lnSpc>
+            </a:pPr>
+            <a:r>
+              <a:rPr sz="1600" b="1">
+                <a:solidFill>
+                  <a:srgbClr val="FFFFFF"/>
+                </a:solidFill>
+                <a:latin typeface="League Spartan"/>
+              </a:rPr>
               <a:t>Full Institutional</a:t>
             </a:r>
           </a:p>
           <a:p>
-            <a:pPr algn="ctr">
-              <a:lnSpc>
-                <a:spcPct val="118000"/>
-              </a:lnSpc>
-            </a:pPr>
-            <a:r>
-              <a:rPr sz="2200" b="1">
+            <a:pPr algn="l">
+              <a:lnSpc>
+                <a:spcPct val="120000"/>
+              </a:lnSpc>
+            </a:pPr>
+            <a:r>
+              <a:rPr sz="1600" b="1">
                 <a:solidFill>
                   <a:srgbClr val="FFFFFF"/>
                 </a:solidFill>
@@ -10119,29 +10258,29 @@
       </p:sp>
       <p:sp>
         <p:nvSpPr>
-          <p:cNvPr id="24" name="TextBox 23"/>
-          <p:cNvSpPr txBox="1"/>
-          <p:nvPr/>
-        </p:nvSpPr>
-        <p:spPr>
-          <a:xfrm>
-            <a:off x="8991600" y="4267200"/>
-            <a:ext cx="2438400" cy="952500"/>
-          </a:xfrm>
-          <a:prstGeom prst="rect">
-            <a:avLst/>
-          </a:prstGeom>
-          <a:noFill/>
-        </p:spPr>
-        <p:txBody>
-          <a:bodyPr wrap="square" lIns="0" rIns="0" tIns="0" bIns="0">
-            <a:spAutoFit/>
-          </a:bodyPr>
-          <a:lstStyle/>
-          <a:p>
-            <a:pPr algn="ctr">
-              <a:lnSpc>
-                <a:spcPct val="140000"/>
+          <p:cNvPr id="29" name="TextBox 28"/>
+          <p:cNvSpPr txBox="1"/>
+          <p:nvPr/>
+        </p:nvSpPr>
+        <p:spPr>
+          <a:xfrm>
+            <a:off x="4445000" y="5016500"/>
+            <a:ext cx="6985000" cy="528320"/>
+          </a:xfrm>
+          <a:prstGeom prst="rect">
+            <a:avLst/>
+          </a:prstGeom>
+          <a:noFill/>
+        </p:spPr>
+        <p:txBody>
+          <a:bodyPr wrap="square" lIns="0" rIns="0" tIns="0" bIns="0">
+            <a:spAutoFit/>
+          </a:bodyPr>
+          <a:lstStyle/>
+          <a:p>
+            <a:pPr algn="l">
+              <a:lnSpc>
+                <a:spcPct val="145000"/>
               </a:lnSpc>
             </a:pPr>
             <a:r>
@@ -10151,30 +10290,14 @@
                 </a:solidFill>
                 <a:latin typeface="Inter"/>
               </a:rPr>
-              <a:t>Roll out institution-wide</a:t>
-            </a:r>
-          </a:p>
-          <a:p>
-            <a:pPr algn="ctr">
-              <a:lnSpc>
-                <a:spcPct val="140000"/>
-              </a:lnSpc>
-            </a:pPr>
-            <a:r>
-              <a:rPr sz="1600" b="0">
-                <a:solidFill>
-                  <a:srgbClr val="9EABB1"/>
-                </a:solidFill>
-                <a:latin typeface="Inter"/>
-              </a:rPr>
-              <a:t>from next academic year.</a:t>
-            </a:r>
-          </a:p>
-        </p:txBody>
-      </p:sp>
-      <p:sp>
-        <p:nvSpPr>
-          <p:cNvPr id="25" name="Rectangle 24"/>
+              <a:t>Roll out institution-wide from next academic year.</a:t>
+            </a:r>
+          </a:p>
+        </p:txBody>
+      </p:sp>
+      <p:sp>
+        <p:nvSpPr>
+          <p:cNvPr id="30" name="Rectangle 29"/>
           <p:cNvSpPr/>
           <p:nvPr/>
         </p:nvSpPr>
@@ -10218,14 +10341,14 @@
       </p:sp>
       <p:pic>
         <p:nvPicPr>
-          <p:cNvPr id="26" name="Picture 25" descr="logo_white.png"/>
+          <p:cNvPr id="31" name="Picture 30" descr="logo_white.png"/>
           <p:cNvPicPr>
             <a:picLocks noChangeAspect="1"/>
           </p:cNvPicPr>
           <p:nvPr/>
         </p:nvPicPr>
         <p:blipFill>
-          <a:blip r:embed="rId6"/>
+          <a:blip r:embed="rId7"/>
           <a:stretch>
             <a:fillRect/>
           </a:stretch>
@@ -10242,7 +10365,7 @@
       </p:pic>
       <p:sp>
         <p:nvSpPr>
-          <p:cNvPr id="27" name="Rectangle 26"/>
+          <p:cNvPr id="32" name="Rectangle 31"/>
           <p:cNvSpPr/>
           <p:nvPr/>
         </p:nvSpPr>
@@ -10286,7 +10409,7 @@
       </p:sp>
       <p:sp>
         <p:nvSpPr>
-          <p:cNvPr id="28" name="TextBox 27"/>
+          <p:cNvPr id="33" name="TextBox 32"/>
           <p:cNvSpPr txBox="1"/>
           <p:nvPr/>
         </p:nvSpPr>
@@ -10325,7 +10448,7 @@
       </p:sp>
       <p:sp>
         <p:nvSpPr>
-          <p:cNvPr id="29" name="TextBox 28"/>
+          <p:cNvPr id="34" name="TextBox 33"/>
           <p:cNvSpPr txBox="1"/>
           <p:nvPr/>
         </p:nvSpPr>
@@ -10364,7 +10487,7 @@
       </p:sp>
       <p:sp>
         <p:nvSpPr>
-          <p:cNvPr id="30" name="TextBox 29"/>
+          <p:cNvPr id="35" name="TextBox 34"/>
           <p:cNvSpPr txBox="1"/>
           <p:nvPr/>
         </p:nvSpPr>
@@ -12697,7 +12820,7 @@
         <p:spPr>
           <a:xfrm>
             <a:off x="762000" y="3378200"/>
-            <a:ext cx="5029200" cy="963930"/>
+            <a:ext cx="4445000" cy="963930"/>
           </a:xfrm>
           <a:prstGeom prst="rect">
             <a:avLst/>
@@ -12736,7 +12859,7 @@
         <p:spPr>
           <a:xfrm>
             <a:off x="3987800" y="3790950"/>
-            <a:ext cx="1803400" cy="363220"/>
+            <a:ext cx="1219200" cy="363220"/>
           </a:xfrm>
           <a:prstGeom prst="rect">
             <a:avLst/>
@@ -12774,8 +12897,8 @@
         </p:nvSpPr>
         <p:spPr>
           <a:xfrm>
-            <a:off x="762000" y="4800600"/>
-            <a:ext cx="5029200" cy="812800"/>
+            <a:off x="762000" y="4381500"/>
+            <a:ext cx="4191000" cy="812800"/>
           </a:xfrm>
           <a:prstGeom prst="rect">
             <a:avLst/>
@@ -12813,7 +12936,7 @@
         </p:nvSpPr>
         <p:spPr>
           <a:xfrm>
-            <a:off x="6400800" y="2235200"/>
+            <a:off x="5715000" y="2235200"/>
             <a:ext cx="762000" cy="762000"/>
           </a:xfrm>
           <a:prstGeom prst="roundRect">
@@ -12867,7 +12990,7 @@
         </p:blipFill>
         <p:spPr>
           <a:xfrm>
-            <a:off x="6604000" y="2438400"/>
+            <a:off x="5918200" y="2438400"/>
             <a:ext cx="355600" cy="355600"/>
           </a:xfrm>
           <a:prstGeom prst="rect">
@@ -12883,8 +13006,8 @@
         </p:nvSpPr>
         <p:spPr>
           <a:xfrm>
-            <a:off x="6400800" y="3657600"/>
-            <a:ext cx="5029200" cy="363220"/>
+            <a:off x="5715000" y="3657600"/>
+            <a:ext cx="2540000" cy="363220"/>
           </a:xfrm>
           <a:prstGeom prst="rect">
             <a:avLst/>
@@ -12922,8 +13045,8 @@
         </p:nvSpPr>
         <p:spPr>
           <a:xfrm>
-            <a:off x="6400800" y="4800600"/>
-            <a:ext cx="5029200" cy="812800"/>
+            <a:off x="5715000" y="4381500"/>
+            <a:ext cx="2540000" cy="1016000"/>
           </a:xfrm>
           <a:prstGeom prst="rect">
             <a:avLst/>
@@ -12955,7 +13078,171 @@
       </p:sp>
       <p:sp>
         <p:nvSpPr>
-          <p:cNvPr id="13" name="Rectangle 12"/>
+          <p:cNvPr id="13" name="Rounded Rectangle 12"/>
+          <p:cNvSpPr/>
+          <p:nvPr/>
+        </p:nvSpPr>
+        <p:spPr>
+          <a:xfrm>
+            <a:off x="8763000" y="2235200"/>
+            <a:ext cx="762000" cy="762000"/>
+          </a:xfrm>
+          <a:prstGeom prst="roundRect">
+            <a:avLst>
+              <a:gd name="adj" fmla="val 16666"/>
+            </a:avLst>
+          </a:prstGeom>
+          <a:solidFill>
+            <a:srgbClr val="F3F7F8"/>
+          </a:solidFill>
+          <a:ln>
+            <a:noFill/>
+          </a:ln>
+          <a:effectLst/>
+        </p:spPr>
+        <p:style>
+          <a:lnRef idx="1">
+            <a:schemeClr val="accent1"/>
+          </a:lnRef>
+          <a:fillRef idx="3">
+            <a:schemeClr val="accent1"/>
+          </a:fillRef>
+          <a:effectRef idx="2">
+            <a:schemeClr val="accent1"/>
+          </a:effectRef>
+          <a:fontRef idx="minor">
+            <a:schemeClr val="lt1"/>
+          </a:fontRef>
+        </p:style>
+        <p:txBody>
+          <a:bodyPr rtlCol="0" anchor="ctr"/>
+          <a:lstStyle/>
+          <a:p>
+            <a:pPr algn="ctr"/>
+          </a:p>
+        </p:txBody>
+      </p:sp>
+      <p:pic>
+        <p:nvPicPr>
+          <p:cNvPr id="14" name="Picture 13" descr="icon-mensen-navy.png"/>
+          <p:cNvPicPr>
+            <a:picLocks noChangeAspect="1"/>
+          </p:cNvPicPr>
+          <p:nvPr/>
+        </p:nvPicPr>
+        <p:blipFill>
+          <a:blip r:embed="rId4"/>
+          <a:stretch>
+            <a:fillRect/>
+          </a:stretch>
+        </p:blipFill>
+        <p:spPr>
+          <a:xfrm>
+            <a:off x="8966200" y="2438400"/>
+            <a:ext cx="355600" cy="355600"/>
+          </a:xfrm>
+          <a:prstGeom prst="rect">
+            <a:avLst/>
+          </a:prstGeom>
+        </p:spPr>
+      </p:pic>
+      <p:sp>
+        <p:nvSpPr>
+          <p:cNvPr id="15" name="TextBox 14"/>
+          <p:cNvSpPr txBox="1"/>
+          <p:nvPr/>
+        </p:nvSpPr>
+        <p:spPr>
+          <a:xfrm>
+            <a:off x="8763000" y="3657600"/>
+            <a:ext cx="2667000" cy="726440"/>
+          </a:xfrm>
+          <a:prstGeom prst="rect">
+            <a:avLst/>
+          </a:prstGeom>
+          <a:noFill/>
+        </p:spPr>
+        <p:txBody>
+          <a:bodyPr wrap="square" lIns="0" rIns="0" tIns="0" bIns="0">
+            <a:spAutoFit/>
+          </a:bodyPr>
+          <a:lstStyle/>
+          <a:p>
+            <a:pPr algn="l">
+              <a:lnSpc>
+                <a:spcPct val="115000"/>
+              </a:lnSpc>
+            </a:pPr>
+            <a:r>
+              <a:rPr sz="2200" b="1">
+                <a:solidFill>
+                  <a:srgbClr val="002333"/>
+                </a:solidFill>
+                <a:latin typeface="League Spartan"/>
+              </a:rPr>
+              <a:t>No Time</a:t>
+            </a:r>
+          </a:p>
+          <a:p>
+            <a:pPr algn="l">
+              <a:lnSpc>
+                <a:spcPct val="115000"/>
+              </a:lnSpc>
+            </a:pPr>
+            <a:r>
+              <a:rPr sz="2200" b="1">
+                <a:solidFill>
+                  <a:srgbClr val="002333"/>
+                </a:solidFill>
+                <a:latin typeface="League Spartan"/>
+              </a:rPr>
+              <a:t>for Tutoring</a:t>
+            </a:r>
+          </a:p>
+        </p:txBody>
+      </p:sp>
+      <p:sp>
+        <p:nvSpPr>
+          <p:cNvPr id="16" name="TextBox 15"/>
+          <p:cNvSpPr txBox="1"/>
+          <p:nvPr/>
+        </p:nvSpPr>
+        <p:spPr>
+          <a:xfrm>
+            <a:off x="8763000" y="4381500"/>
+            <a:ext cx="2667000" cy="1219200"/>
+          </a:xfrm>
+          <a:prstGeom prst="rect">
+            <a:avLst/>
+          </a:prstGeom>
+          <a:noFill/>
+        </p:spPr>
+        <p:txBody>
+          <a:bodyPr wrap="square" lIns="0" rIns="0" tIns="0" bIns="0">
+            <a:spAutoFit/>
+          </a:bodyPr>
+          <a:lstStyle/>
+          <a:p>
+            <a:pPr algn="l">
+              <a:lnSpc>
+                <a:spcPct val="145000"/>
+              </a:lnSpc>
+            </a:pPr>
+            <a:r>
+              <a:rPr sz="1600" b="0">
+                <a:solidFill>
+                  <a:srgbClr val="2C4A57"/>
+                </a:solidFill>
+                <a:latin typeface="Inter"/>
+              </a:rPr>
+              <a:t>Instructors are too caught up in grading to provide the tutoring and remedial support students increasingly need.</a:t>
+            </a:r>
+          </a:p>
+        </p:txBody>
+      </p:sp>
+      <p:sp>
+        <p:nvSpPr>
+          <p:cNvPr id="17" name="Rectangle 16"/>
           <p:cNvSpPr/>
           <p:nvPr/>
         </p:nvSpPr>
@@ -12999,14 +13286,14 @@
       </p:sp>
       <p:pic>
         <p:nvPicPr>
-          <p:cNvPr id="14" name="Picture 13" descr="logo_navy.png"/>
+          <p:cNvPr id="18" name="Picture 17" descr="logo_navy.png"/>
           <p:cNvPicPr>
             <a:picLocks noChangeAspect="1"/>
           </p:cNvPicPr>
           <p:nvPr/>
         </p:nvPicPr>
         <p:blipFill>
-          <a:blip r:embed="rId4"/>
+          <a:blip r:embed="rId5"/>
           <a:stretch>
             <a:fillRect/>
           </a:stretch>
@@ -13023,7 +13310,7 @@
       </p:pic>
       <p:sp>
         <p:nvSpPr>
-          <p:cNvPr id="15" name="Rectangle 14"/>
+          <p:cNvPr id="19" name="Rectangle 18"/>
           <p:cNvSpPr/>
           <p:nvPr/>
         </p:nvSpPr>
@@ -13067,7 +13354,7 @@
       </p:sp>
       <p:sp>
         <p:nvSpPr>
-          <p:cNvPr id="16" name="TextBox 15"/>
+          <p:cNvPr id="20" name="TextBox 19"/>
           <p:cNvSpPr txBox="1"/>
           <p:nvPr/>
         </p:nvSpPr>
@@ -13106,7 +13393,7 @@
       </p:sp>
       <p:sp>
         <p:nvSpPr>
-          <p:cNvPr id="17" name="TextBox 16"/>
+          <p:cNvPr id="21" name="TextBox 20"/>
           <p:cNvSpPr txBox="1"/>
           <p:nvPr/>
         </p:nvSpPr>
@@ -13558,7 +13845,7 @@
         <p:spPr>
           <a:xfrm>
             <a:off x="6400800" y="4165600"/>
-            <a:ext cx="1676400" cy="579120"/>
+            <a:ext cx="457200" cy="579120"/>
           </a:xfrm>
           <a:prstGeom prst="rect">
             <a:avLst/>
@@ -13583,7 +13870,7 @@
                 </a:solidFill>
                 <a:latin typeface="League Spartan"/>
               </a:rPr>
-              <a:t>12–16</a:t>
+              <a:t>2</a:t>
             </a:r>
           </a:p>
         </p:txBody>
@@ -13596,8 +13883,8 @@
         </p:nvSpPr>
         <p:spPr>
           <a:xfrm>
-            <a:off x="8255000" y="4356100"/>
-            <a:ext cx="3175000" cy="325120"/>
+            <a:off x="7035800" y="4356100"/>
+            <a:ext cx="4394200" cy="325120"/>
           </a:xfrm>
           <a:prstGeom prst="rect">
             <a:avLst/>
@@ -13622,92 +13909,14 @@
                 </a:solidFill>
                 <a:latin typeface="Inter"/>
               </a:rPr>
-              <a:t>new campuses</a:t>
-            </a:r>
-          </a:p>
-        </p:txBody>
-      </p:sp>
-      <p:sp>
-        <p:nvSpPr>
-          <p:cNvPr id="13" name="TextBox 12"/>
-          <p:cNvSpPr txBox="1"/>
-          <p:nvPr/>
-        </p:nvSpPr>
-        <p:spPr>
-          <a:xfrm>
-            <a:off x="6400800" y="4826000"/>
-            <a:ext cx="1676400" cy="579120"/>
-          </a:xfrm>
-          <a:prstGeom prst="rect">
-            <a:avLst/>
-          </a:prstGeom>
-          <a:noFill/>
-        </p:spPr>
-        <p:txBody>
-          <a:bodyPr wrap="square" lIns="0" rIns="0" tIns="0" bIns="0">
-            <a:spAutoFit/>
-          </a:bodyPr>
-          <a:lstStyle/>
-          <a:p>
-            <a:pPr algn="l">
-              <a:lnSpc>
-                <a:spcPct val="100000"/>
-              </a:lnSpc>
-            </a:pPr>
-            <a:r>
-              <a:rPr sz="3800" b="1">
-                <a:solidFill>
-                  <a:srgbClr val="FFFFFF"/>
-                </a:solidFill>
-                <a:latin typeface="League Spartan"/>
-              </a:rPr>
-              <a:t>50–70</a:t>
-            </a:r>
-          </a:p>
-        </p:txBody>
-      </p:sp>
-      <p:sp>
-        <p:nvSpPr>
-          <p:cNvPr id="14" name="TextBox 13"/>
-          <p:cNvSpPr txBox="1"/>
-          <p:nvPr/>
-        </p:nvSpPr>
-        <p:spPr>
-          <a:xfrm>
-            <a:off x="8255000" y="5016500"/>
-            <a:ext cx="3175000" cy="325120"/>
-          </a:xfrm>
-          <a:prstGeom prst="rect">
-            <a:avLst/>
-          </a:prstGeom>
-          <a:noFill/>
-        </p:spPr>
-        <p:txBody>
-          <a:bodyPr wrap="square" lIns="0" rIns="0" tIns="0" bIns="0">
-            <a:spAutoFit/>
-          </a:bodyPr>
-          <a:lstStyle/>
-          <a:p>
-            <a:pPr algn="l">
-              <a:lnSpc>
-                <a:spcPct val="120000"/>
-              </a:lnSpc>
-            </a:pPr>
-            <a:r>
-              <a:rPr sz="1600" b="0">
-                <a:solidFill>
-                  <a:srgbClr val="9EABB1"/>
-                </a:solidFill>
-                <a:latin typeface="Inter"/>
-              </a:rPr>
-              <a:t>new programs</a:t>
-            </a:r>
-          </a:p>
-        </p:txBody>
-      </p:sp>
-      <p:sp>
-        <p:nvSpPr>
-          <p:cNvPr id="15" name="Rectangle 14"/>
+              <a:t>new campuses per year</a:t>
+            </a:r>
+          </a:p>
+        </p:txBody>
+      </p:sp>
+      <p:sp>
+        <p:nvSpPr>
+          <p:cNvPr id="13" name="Rectangle 12"/>
           <p:cNvSpPr/>
           <p:nvPr/>
         </p:nvSpPr>
@@ -13751,7 +13960,7 @@
       </p:sp>
       <p:pic>
         <p:nvPicPr>
-          <p:cNvPr id="16" name="Picture 15" descr="logo_white.png"/>
+          <p:cNvPr id="14" name="Picture 13" descr="logo_white.png"/>
           <p:cNvPicPr>
             <a:picLocks noChangeAspect="1"/>
           </p:cNvPicPr>
@@ -13775,7 +13984,7 @@
       </p:pic>
       <p:sp>
         <p:nvSpPr>
-          <p:cNvPr id="17" name="Rectangle 16"/>
+          <p:cNvPr id="15" name="Rectangle 14"/>
           <p:cNvSpPr/>
           <p:nvPr/>
         </p:nvSpPr>
@@ -13819,7 +14028,7 @@
       </p:sp>
       <p:sp>
         <p:nvSpPr>
-          <p:cNvPr id="18" name="TextBox 17"/>
+          <p:cNvPr id="16" name="TextBox 15"/>
           <p:cNvSpPr txBox="1"/>
           <p:nvPr/>
         </p:nvSpPr>
@@ -13858,7 +14067,7 @@
       </p:sp>
       <p:sp>
         <p:nvSpPr>
-          <p:cNvPr id="19" name="TextBox 18"/>
+          <p:cNvPr id="17" name="TextBox 16"/>
           <p:cNvSpPr txBox="1"/>
           <p:nvPr/>
         </p:nvSpPr>
@@ -13890,14 +14099,14 @@
                 </a:solidFill>
                 <a:latin typeface="Inter"/>
               </a:rPr>
-              <a:t>North Star Phase II, by FY2029.</a:t>
-            </a:r>
-          </a:p>
-        </p:txBody>
-      </p:sp>
-      <p:sp>
-        <p:nvSpPr>
-          <p:cNvPr id="20" name="TextBox 19"/>
+              <a:t>North Star strategy target.</a:t>
+            </a:r>
+          </a:p>
+        </p:txBody>
+      </p:sp>
+      <p:sp>
+        <p:nvSpPr>
+          <p:cNvPr id="18" name="TextBox 17"/>
           <p:cNvSpPr txBox="1"/>
           <p:nvPr/>
         </p:nvSpPr>
@@ -14846,7 +15055,7 @@
         </p:nvSpPr>
         <p:spPr>
           <a:xfrm>
-            <a:off x="762000" y="2400300"/>
+            <a:off x="762000" y="1905000"/>
             <a:ext cx="838200" cy="838200"/>
           </a:xfrm>
           <a:prstGeom prst="roundRect">
@@ -14900,7 +15109,7 @@
         </p:blipFill>
         <p:spPr>
           <a:xfrm>
-            <a:off x="977900" y="2616200"/>
+            <a:off x="977900" y="2120900"/>
             <a:ext cx="406400" cy="406400"/>
           </a:xfrm>
           <a:prstGeom prst="rect">
@@ -14916,7 +15125,7 @@
         </p:nvSpPr>
         <p:spPr>
           <a:xfrm>
-            <a:off x="762000" y="3530600"/>
+            <a:off x="762000" y="3035300"/>
             <a:ext cx="3352800" cy="949960"/>
           </a:xfrm>
           <a:prstGeom prst="rect">
@@ -14971,7 +15180,7 @@
         </p:nvSpPr>
         <p:spPr>
           <a:xfrm>
-            <a:off x="762000" y="4622800"/>
+            <a:off x="762000" y="4127500"/>
             <a:ext cx="3149600" cy="650240"/>
           </a:xfrm>
           <a:prstGeom prst="rect">
@@ -15010,7 +15219,7 @@
         </p:nvSpPr>
         <p:spPr>
           <a:xfrm>
-            <a:off x="4419600" y="2400300"/>
+            <a:off x="4419600" y="1905000"/>
             <a:ext cx="838200" cy="838200"/>
           </a:xfrm>
           <a:prstGeom prst="roundRect">
@@ -15064,7 +15273,7 @@
         </p:blipFill>
         <p:spPr>
           <a:xfrm>
-            <a:off x="4635500" y="2616200"/>
+            <a:off x="4635500" y="2120900"/>
             <a:ext cx="406400" cy="406400"/>
           </a:xfrm>
           <a:prstGeom prst="rect">
@@ -15080,7 +15289,7 @@
         </p:nvSpPr>
         <p:spPr>
           <a:xfrm>
-            <a:off x="4419600" y="3530600"/>
+            <a:off x="4419600" y="3035300"/>
             <a:ext cx="3352800" cy="949960"/>
           </a:xfrm>
           <a:prstGeom prst="rect">
@@ -15135,7 +15344,7 @@
         </p:nvSpPr>
         <p:spPr>
           <a:xfrm>
-            <a:off x="4419600" y="4622800"/>
+            <a:off x="4419600" y="4127500"/>
             <a:ext cx="3149600" cy="650240"/>
           </a:xfrm>
           <a:prstGeom prst="rect">
@@ -15161,7 +15370,7 @@
                 </a:solidFill>
                 <a:latin typeface="Inter"/>
               </a:rPr>
-              <a:t>Supports instructor retention.</a:t>
+              <a:t>Supports instructor retention. Instructor overtime is one of the largest variable cost items for education directors, so reduced grading time directly protects budget.</a:t>
             </a:r>
           </a:p>
         </p:txBody>
@@ -15174,7 +15383,7 @@
         </p:nvSpPr>
         <p:spPr>
           <a:xfrm>
-            <a:off x="8077200" y="2400300"/>
+            <a:off x="8077200" y="1905000"/>
             <a:ext cx="838200" cy="838200"/>
           </a:xfrm>
           <a:prstGeom prst="roundRect">
@@ -15228,7 +15437,7 @@
         </p:blipFill>
         <p:spPr>
           <a:xfrm>
-            <a:off x="8293100" y="2616200"/>
+            <a:off x="8293100" y="2120900"/>
             <a:ext cx="406400" cy="406400"/>
           </a:xfrm>
           <a:prstGeom prst="rect">
@@ -15244,7 +15453,7 @@
         </p:nvSpPr>
         <p:spPr>
           <a:xfrm>
-            <a:off x="8077200" y="3530600"/>
+            <a:off x="8077200" y="3035300"/>
             <a:ext cx="3352800" cy="949960"/>
           </a:xfrm>
           <a:prstGeom prst="rect">
@@ -15299,7 +15508,7 @@
         </p:nvSpPr>
         <p:spPr>
           <a:xfrm>
-            <a:off x="8077200" y="4622800"/>
+            <a:off x="8077200" y="4127500"/>
             <a:ext cx="3149600" cy="650240"/>
           </a:xfrm>
           <a:prstGeom prst="rect">
@@ -15325,7 +15534,7 @@
                 </a:solidFill>
                 <a:latin typeface="Inter"/>
               </a:rPr>
-              <a:t>New campuses and programs, without headcount growing 1:1.</a:t>
+              <a:t>New campuses and programs, without headcount growing 1:1. Higher course completion rates increase revenue.</a:t>
             </a:r>
           </a:p>
         </p:txBody>

--- a/projects/uti/deck/UTI-Eduface-deck.pptx
+++ b/projects/uti/deck/UTI-Eduface-deck.pptx
@@ -3257,7 +3257,7 @@
         <p:spPr>
           <a:xfrm>
             <a:off x="762000" y="5842000"/>
-            <a:ext cx="1066800" cy="254000"/>
+            <a:ext cx="934528" cy="254000"/>
           </a:xfrm>
           <a:prstGeom prst="rect">
             <a:avLst/>
@@ -3272,7 +3272,7 @@
         </p:nvSpPr>
         <p:spPr>
           <a:xfrm>
-            <a:off x="2082800" y="5829300"/>
+            <a:off x="1968500" y="5829300"/>
             <a:ext cx="6350" cy="279400"/>
           </a:xfrm>
           <a:prstGeom prst="rect">
@@ -3310,43 +3310,74 @@
       </p:sp>
       <p:sp>
         <p:nvSpPr>
-          <p:cNvPr id="7" name="TextBox 6"/>
-          <p:cNvSpPr txBox="1"/>
-          <p:nvPr/>
-        </p:nvSpPr>
-        <p:spPr>
-          <a:xfrm>
-            <a:off x="2336800" y="5892800"/>
-            <a:ext cx="3302000" cy="254000"/>
-          </a:xfrm>
-          <a:prstGeom prst="rect">
-            <a:avLst/>
-          </a:prstGeom>
-          <a:noFill/>
-        </p:spPr>
-        <p:txBody>
-          <a:bodyPr wrap="square" lIns="0" rIns="0" tIns="0" bIns="0">
-            <a:spAutoFit/>
-          </a:bodyPr>
-          <a:lstStyle/>
-          <a:p>
-            <a:pPr algn="l">
-              <a:lnSpc>
-                <a:spcPct val="120000"/>
-              </a:lnSpc>
-            </a:pPr>
-            <a:r>
-              <a:rPr sz="1200" b="0">
-                <a:solidFill>
-                  <a:srgbClr val="9EABB1"/>
-                </a:solidFill>
-                <a:latin typeface="Inter"/>
-              </a:rPr>
-              <a:t>Universal Technical Institute</a:t>
-            </a:r>
-          </a:p>
-        </p:txBody>
-      </p:sp>
+          <p:cNvPr id="7" name="Rounded Rectangle 6"/>
+          <p:cNvSpPr/>
+          <p:nvPr/>
+        </p:nvSpPr>
+        <p:spPr>
+          <a:xfrm>
+            <a:off x="2133600" y="5702300"/>
+            <a:ext cx="952046" cy="533400"/>
+          </a:xfrm>
+          <a:prstGeom prst="roundRect">
+            <a:avLst>
+              <a:gd name="adj" fmla="val 11904"/>
+            </a:avLst>
+          </a:prstGeom>
+          <a:solidFill>
+            <a:srgbClr val="FFFFFF"/>
+          </a:solidFill>
+          <a:ln>
+            <a:noFill/>
+          </a:ln>
+          <a:effectLst/>
+        </p:spPr>
+        <p:style>
+          <a:lnRef idx="1">
+            <a:schemeClr val="accent1"/>
+          </a:lnRef>
+          <a:fillRef idx="3">
+            <a:schemeClr val="accent1"/>
+          </a:fillRef>
+          <a:effectRef idx="2">
+            <a:schemeClr val="accent1"/>
+          </a:effectRef>
+          <a:fontRef idx="minor">
+            <a:schemeClr val="lt1"/>
+          </a:fontRef>
+        </p:style>
+        <p:txBody>
+          <a:bodyPr rtlCol="0" anchor="ctr"/>
+          <a:lstStyle/>
+          <a:p>
+            <a:pPr algn="ctr"/>
+          </a:p>
+        </p:txBody>
+      </p:sp>
+      <p:pic>
+        <p:nvPicPr>
+          <p:cNvPr id="8" name="Picture 7" descr="uti-logo.png"/>
+          <p:cNvPicPr>
+            <a:picLocks noChangeAspect="1"/>
+          </p:cNvPicPr>
+          <p:nvPr/>
+        </p:nvPicPr>
+        <p:blipFill>
+          <a:blip r:embed="rId3"/>
+          <a:stretch>
+            <a:fillRect/>
+          </a:stretch>
+        </p:blipFill>
+        <p:spPr>
+          <a:xfrm>
+            <a:off x="2222500" y="5791200"/>
+            <a:ext cx="774246" cy="355600"/>
+          </a:xfrm>
+          <a:prstGeom prst="rect">
+            <a:avLst/>
+          </a:prstGeom>
+        </p:spPr>
+      </p:pic>
     </p:spTree>
   </p:cSld>
   <p:clrMapOvr>
@@ -4232,7 +4263,7 @@
         <p:spPr>
           <a:xfrm>
             <a:off x="762000" y="6324600"/>
-            <a:ext cx="1066800" cy="254000"/>
+            <a:ext cx="934528" cy="254000"/>
           </a:xfrm>
           <a:prstGeom prst="rect">
             <a:avLst/>
@@ -4247,7 +4278,7 @@
         </p:nvSpPr>
         <p:spPr>
           <a:xfrm>
-            <a:off x="2082800" y="6311900"/>
+            <a:off x="1968500" y="6311900"/>
             <a:ext cx="6350" cy="279400"/>
           </a:xfrm>
           <a:prstGeom prst="rect">
@@ -4285,46 +4316,77 @@
       </p:sp>
       <p:sp>
         <p:nvSpPr>
-          <p:cNvPr id="25" name="TextBox 24"/>
-          <p:cNvSpPr txBox="1"/>
-          <p:nvPr/>
-        </p:nvSpPr>
-        <p:spPr>
-          <a:xfrm>
-            <a:off x="2336800" y="6375400"/>
-            <a:ext cx="3302000" cy="254000"/>
-          </a:xfrm>
-          <a:prstGeom prst="rect">
-            <a:avLst/>
-          </a:prstGeom>
-          <a:noFill/>
-        </p:spPr>
-        <p:txBody>
-          <a:bodyPr wrap="square" lIns="0" rIns="0" tIns="0" bIns="0">
-            <a:spAutoFit/>
-          </a:bodyPr>
-          <a:lstStyle/>
-          <a:p>
-            <a:pPr algn="l">
-              <a:lnSpc>
-                <a:spcPct val="120000"/>
-              </a:lnSpc>
-            </a:pPr>
-            <a:r>
-              <a:rPr sz="1200" b="0">
-                <a:solidFill>
-                  <a:srgbClr val="9EABB1"/>
-                </a:solidFill>
-                <a:latin typeface="Inter"/>
-              </a:rPr>
-              <a:t>Universal Technical Institute</a:t>
-            </a:r>
-          </a:p>
-        </p:txBody>
-      </p:sp>
-      <p:sp>
-        <p:nvSpPr>
-          <p:cNvPr id="26" name="TextBox 25"/>
+          <p:cNvPr id="25" name="Rounded Rectangle 24"/>
+          <p:cNvSpPr/>
+          <p:nvPr/>
+        </p:nvSpPr>
+        <p:spPr>
+          <a:xfrm>
+            <a:off x="2133600" y="6184900"/>
+            <a:ext cx="952046" cy="533400"/>
+          </a:xfrm>
+          <a:prstGeom prst="roundRect">
+            <a:avLst>
+              <a:gd name="adj" fmla="val 11904"/>
+            </a:avLst>
+          </a:prstGeom>
+          <a:solidFill>
+            <a:srgbClr val="FFFFFF"/>
+          </a:solidFill>
+          <a:ln>
+            <a:noFill/>
+          </a:ln>
+          <a:effectLst/>
+        </p:spPr>
+        <p:style>
+          <a:lnRef idx="1">
+            <a:schemeClr val="accent1"/>
+          </a:lnRef>
+          <a:fillRef idx="3">
+            <a:schemeClr val="accent1"/>
+          </a:fillRef>
+          <a:effectRef idx="2">
+            <a:schemeClr val="accent1"/>
+          </a:effectRef>
+          <a:fontRef idx="minor">
+            <a:schemeClr val="lt1"/>
+          </a:fontRef>
+        </p:style>
+        <p:txBody>
+          <a:bodyPr rtlCol="0" anchor="ctr"/>
+          <a:lstStyle/>
+          <a:p>
+            <a:pPr algn="ctr"/>
+          </a:p>
+        </p:txBody>
+      </p:sp>
+      <p:pic>
+        <p:nvPicPr>
+          <p:cNvPr id="26" name="Picture 25" descr="uti-logo.png"/>
+          <p:cNvPicPr>
+            <a:picLocks noChangeAspect="1"/>
+          </p:cNvPicPr>
+          <p:nvPr/>
+        </p:nvPicPr>
+        <p:blipFill>
+          <a:blip r:embed="rId7"/>
+          <a:stretch>
+            <a:fillRect/>
+          </a:stretch>
+        </p:blipFill>
+        <p:spPr>
+          <a:xfrm>
+            <a:off x="2222500" y="6273800"/>
+            <a:ext cx="774246" cy="355600"/>
+          </a:xfrm>
+          <a:prstGeom prst="rect">
+            <a:avLst/>
+          </a:prstGeom>
+        </p:spPr>
+      </p:pic>
+      <p:sp>
+        <p:nvSpPr>
+          <p:cNvPr id="27" name="TextBox 26"/>
           <p:cNvSpPr txBox="1"/>
           <p:nvPr/>
         </p:nvSpPr>
@@ -5230,7 +5292,7 @@
         <p:spPr>
           <a:xfrm>
             <a:off x="762000" y="6324600"/>
-            <a:ext cx="1066800" cy="254000"/>
+            <a:ext cx="934528" cy="254000"/>
           </a:xfrm>
           <a:prstGeom prst="rect">
             <a:avLst/>
@@ -5245,7 +5307,7 @@
         </p:nvSpPr>
         <p:spPr>
           <a:xfrm>
-            <a:off x="2082800" y="6311900"/>
+            <a:off x="1968500" y="6311900"/>
             <a:ext cx="6350" cy="279400"/>
           </a:xfrm>
           <a:prstGeom prst="rect">
@@ -5283,46 +5345,77 @@
       </p:sp>
       <p:sp>
         <p:nvSpPr>
-          <p:cNvPr id="25" name="TextBox 24"/>
-          <p:cNvSpPr txBox="1"/>
-          <p:nvPr/>
-        </p:nvSpPr>
-        <p:spPr>
-          <a:xfrm>
-            <a:off x="2336800" y="6375400"/>
-            <a:ext cx="3302000" cy="254000"/>
-          </a:xfrm>
-          <a:prstGeom prst="rect">
-            <a:avLst/>
-          </a:prstGeom>
-          <a:noFill/>
-        </p:spPr>
-        <p:txBody>
-          <a:bodyPr wrap="square" lIns="0" rIns="0" tIns="0" bIns="0">
-            <a:spAutoFit/>
-          </a:bodyPr>
-          <a:lstStyle/>
-          <a:p>
-            <a:pPr algn="l">
-              <a:lnSpc>
-                <a:spcPct val="120000"/>
-              </a:lnSpc>
-            </a:pPr>
-            <a:r>
-              <a:rPr sz="1200" b="0">
-                <a:solidFill>
-                  <a:srgbClr val="9EABB1"/>
-                </a:solidFill>
-                <a:latin typeface="Inter"/>
-              </a:rPr>
-              <a:t>Universal Technical Institute</a:t>
-            </a:r>
-          </a:p>
-        </p:txBody>
-      </p:sp>
-      <p:sp>
-        <p:nvSpPr>
-          <p:cNvPr id="26" name="TextBox 25"/>
+          <p:cNvPr id="25" name="Rounded Rectangle 24"/>
+          <p:cNvSpPr/>
+          <p:nvPr/>
+        </p:nvSpPr>
+        <p:spPr>
+          <a:xfrm>
+            <a:off x="2133600" y="6184900"/>
+            <a:ext cx="952046" cy="533400"/>
+          </a:xfrm>
+          <a:prstGeom prst="roundRect">
+            <a:avLst>
+              <a:gd name="adj" fmla="val 11904"/>
+            </a:avLst>
+          </a:prstGeom>
+          <a:solidFill>
+            <a:srgbClr val="FFFFFF"/>
+          </a:solidFill>
+          <a:ln>
+            <a:noFill/>
+          </a:ln>
+          <a:effectLst/>
+        </p:spPr>
+        <p:style>
+          <a:lnRef idx="1">
+            <a:schemeClr val="accent1"/>
+          </a:lnRef>
+          <a:fillRef idx="3">
+            <a:schemeClr val="accent1"/>
+          </a:fillRef>
+          <a:effectRef idx="2">
+            <a:schemeClr val="accent1"/>
+          </a:effectRef>
+          <a:fontRef idx="minor">
+            <a:schemeClr val="lt1"/>
+          </a:fontRef>
+        </p:style>
+        <p:txBody>
+          <a:bodyPr rtlCol="0" anchor="ctr"/>
+          <a:lstStyle/>
+          <a:p>
+            <a:pPr algn="ctr"/>
+          </a:p>
+        </p:txBody>
+      </p:sp>
+      <p:pic>
+        <p:nvPicPr>
+          <p:cNvPr id="26" name="Picture 25" descr="uti-logo.png"/>
+          <p:cNvPicPr>
+            <a:picLocks noChangeAspect="1"/>
+          </p:cNvPicPr>
+          <p:nvPr/>
+        </p:nvPicPr>
+        <p:blipFill>
+          <a:blip r:embed="rId7"/>
+          <a:stretch>
+            <a:fillRect/>
+          </a:stretch>
+        </p:blipFill>
+        <p:spPr>
+          <a:xfrm>
+            <a:off x="2222500" y="6273800"/>
+            <a:ext cx="774246" cy="355600"/>
+          </a:xfrm>
+          <a:prstGeom prst="rect">
+            <a:avLst/>
+          </a:prstGeom>
+        </p:spPr>
+      </p:pic>
+      <p:sp>
+        <p:nvSpPr>
+          <p:cNvPr id="27" name="TextBox 26"/>
           <p:cNvSpPr txBox="1"/>
           <p:nvPr/>
         </p:nvSpPr>
@@ -6244,7 +6337,7 @@
         <p:spPr>
           <a:xfrm>
             <a:off x="762000" y="6324600"/>
-            <a:ext cx="1066800" cy="254000"/>
+            <a:ext cx="934528" cy="254000"/>
           </a:xfrm>
           <a:prstGeom prst="rect">
             <a:avLst/>
@@ -6259,7 +6352,7 @@
         </p:nvSpPr>
         <p:spPr>
           <a:xfrm>
-            <a:off x="2082800" y="6311900"/>
+            <a:off x="1968500" y="6311900"/>
             <a:ext cx="6350" cy="279400"/>
           </a:xfrm>
           <a:prstGeom prst="rect">
@@ -6297,14 +6390,84 @@
       </p:sp>
       <p:sp>
         <p:nvSpPr>
-          <p:cNvPr id="25" name="TextBox 24"/>
+          <p:cNvPr id="25" name="Rounded Rectangle 24"/>
+          <p:cNvSpPr/>
+          <p:nvPr/>
+        </p:nvSpPr>
+        <p:spPr>
+          <a:xfrm>
+            <a:off x="2133600" y="6184900"/>
+            <a:ext cx="952046" cy="533400"/>
+          </a:xfrm>
+          <a:prstGeom prst="roundRect">
+            <a:avLst>
+              <a:gd name="adj" fmla="val 11904"/>
+            </a:avLst>
+          </a:prstGeom>
+          <a:solidFill>
+            <a:srgbClr val="FFFFFF"/>
+          </a:solidFill>
+          <a:ln>
+            <a:noFill/>
+          </a:ln>
+          <a:effectLst/>
+        </p:spPr>
+        <p:style>
+          <a:lnRef idx="1">
+            <a:schemeClr val="accent1"/>
+          </a:lnRef>
+          <a:fillRef idx="3">
+            <a:schemeClr val="accent1"/>
+          </a:fillRef>
+          <a:effectRef idx="2">
+            <a:schemeClr val="accent1"/>
+          </a:effectRef>
+          <a:fontRef idx="minor">
+            <a:schemeClr val="lt1"/>
+          </a:fontRef>
+        </p:style>
+        <p:txBody>
+          <a:bodyPr rtlCol="0" anchor="ctr"/>
+          <a:lstStyle/>
+          <a:p>
+            <a:pPr algn="ctr"/>
+          </a:p>
+        </p:txBody>
+      </p:sp>
+      <p:pic>
+        <p:nvPicPr>
+          <p:cNvPr id="26" name="Picture 25" descr="uti-logo.png"/>
+          <p:cNvPicPr>
+            <a:picLocks noChangeAspect="1"/>
+          </p:cNvPicPr>
+          <p:nvPr/>
+        </p:nvPicPr>
+        <p:blipFill>
+          <a:blip r:embed="rId7"/>
+          <a:stretch>
+            <a:fillRect/>
+          </a:stretch>
+        </p:blipFill>
+        <p:spPr>
+          <a:xfrm>
+            <a:off x="2222500" y="6273800"/>
+            <a:ext cx="774246" cy="355600"/>
+          </a:xfrm>
+          <a:prstGeom prst="rect">
+            <a:avLst/>
+          </a:prstGeom>
+        </p:spPr>
+      </p:pic>
+      <p:sp>
+        <p:nvSpPr>
+          <p:cNvPr id="27" name="TextBox 26"/>
           <p:cNvSpPr txBox="1"/>
           <p:nvPr/>
         </p:nvSpPr>
         <p:spPr>
           <a:xfrm>
-            <a:off x="2336800" y="6375400"/>
-            <a:ext cx="3302000" cy="254000"/>
+            <a:off x="5715000" y="6375400"/>
+            <a:ext cx="5080000" cy="243840"/>
           </a:xfrm>
           <a:prstGeom prst="rect">
             <a:avLst/>
@@ -6317,9 +6480,9 @@
           </a:bodyPr>
           <a:lstStyle/>
           <a:p>
-            <a:pPr algn="l">
-              <a:lnSpc>
-                <a:spcPct val="120000"/>
+            <a:pPr algn="r">
+              <a:lnSpc>
+                <a:spcPct val="135000"/>
               </a:lnSpc>
             </a:pPr>
             <a:r>
@@ -6329,53 +6492,14 @@
                 </a:solidFill>
                 <a:latin typeface="Inter"/>
               </a:rPr>
-              <a:t>Universal Technical Institute</a:t>
-            </a:r>
-          </a:p>
-        </p:txBody>
-      </p:sp>
-      <p:sp>
-        <p:nvSpPr>
-          <p:cNvPr id="26" name="TextBox 25"/>
-          <p:cNvSpPr txBox="1"/>
-          <p:nvPr/>
-        </p:nvSpPr>
-        <p:spPr>
-          <a:xfrm>
-            <a:off x="5715000" y="6375400"/>
-            <a:ext cx="5080000" cy="243840"/>
-          </a:xfrm>
-          <a:prstGeom prst="rect">
-            <a:avLst/>
-          </a:prstGeom>
-          <a:noFill/>
-        </p:spPr>
-        <p:txBody>
-          <a:bodyPr wrap="square" lIns="0" rIns="0" tIns="0" bIns="0">
-            <a:spAutoFit/>
-          </a:bodyPr>
-          <a:lstStyle/>
-          <a:p>
-            <a:pPr algn="r">
-              <a:lnSpc>
-                <a:spcPct val="135000"/>
-              </a:lnSpc>
-            </a:pPr>
-            <a:r>
-              <a:rPr sz="1200" b="0">
-                <a:solidFill>
-                  <a:srgbClr val="9EABB1"/>
-                </a:solidFill>
-                <a:latin typeface="Inter"/>
-              </a:rPr>
-              <a:t>Blackboard integration is a precondition.</a:t>
-            </a:r>
-          </a:p>
-        </p:txBody>
-      </p:sp>
-      <p:sp>
-        <p:nvSpPr>
-          <p:cNvPr id="27" name="TextBox 26"/>
+              <a:t>Blackboard and Canvas integration is a precondition.</a:t>
+            </a:r>
+          </a:p>
+        </p:txBody>
+      </p:sp>
+      <p:sp>
+        <p:nvSpPr>
+          <p:cNvPr id="28" name="TextBox 27"/>
           <p:cNvSpPr txBox="1"/>
           <p:nvPr/>
         </p:nvSpPr>
@@ -6561,7 +6685,7 @@
         <p:spPr>
           <a:xfrm>
             <a:off x="3556000" y="1943100"/>
-            <a:ext cx="6350000" cy="558800"/>
+            <a:ext cx="6096000" cy="558800"/>
           </a:xfrm>
           <a:prstGeom prst="rect">
             <a:avLst/>
@@ -6604,8 +6728,8 @@
         </p:nvSpPr>
         <p:spPr>
           <a:xfrm>
-            <a:off x="6731000" y="1943100"/>
-            <a:ext cx="3175000" cy="558800"/>
+            <a:off x="6604000" y="1943100"/>
+            <a:ext cx="3048000" cy="558800"/>
           </a:xfrm>
           <a:prstGeom prst="rect">
             <a:avLst/>
@@ -6648,8 +6772,8 @@
         </p:nvSpPr>
         <p:spPr>
           <a:xfrm>
-            <a:off x="10160000" y="2070100"/>
-            <a:ext cx="1651000" cy="355600"/>
+            <a:off x="9906000" y="2070100"/>
+            <a:ext cx="1524000" cy="355600"/>
           </a:xfrm>
           <a:prstGeom prst="rect">
             <a:avLst/>
@@ -6727,7 +6851,7 @@
         <p:spPr>
           <a:xfrm>
             <a:off x="3556000" y="2755900"/>
-            <a:ext cx="6350000" cy="558800"/>
+            <a:ext cx="6096000" cy="558800"/>
           </a:xfrm>
           <a:prstGeom prst="rect">
             <a:avLst/>
@@ -6770,8 +6894,8 @@
         </p:nvSpPr>
         <p:spPr>
           <a:xfrm>
-            <a:off x="3873500" y="2755900"/>
-            <a:ext cx="740833" cy="558800"/>
+            <a:off x="3860800" y="2755900"/>
+            <a:ext cx="711200" cy="558800"/>
           </a:xfrm>
           <a:prstGeom prst="rect">
             <a:avLst/>
@@ -6814,8 +6938,8 @@
         </p:nvSpPr>
         <p:spPr>
           <a:xfrm>
-            <a:off x="10160000" y="2882900"/>
-            <a:ext cx="1651000" cy="355600"/>
+            <a:off x="9906000" y="2882900"/>
+            <a:ext cx="1524000" cy="355600"/>
           </a:xfrm>
           <a:prstGeom prst="rect">
             <a:avLst/>
@@ -6936,7 +7060,7 @@
         </p:nvSpPr>
         <p:spPr>
           <a:xfrm>
-            <a:off x="8636000" y="3416300"/>
+            <a:off x="8382000" y="3416300"/>
             <a:ext cx="1270000" cy="228600"/>
           </a:xfrm>
           <a:prstGeom prst="rect">
@@ -6976,7 +7100,7 @@
         <p:spPr>
           <a:xfrm>
             <a:off x="3556000" y="3416300"/>
-            <a:ext cx="6350000" cy="228600"/>
+            <a:ext cx="6096000" cy="228600"/>
           </a:xfrm>
           <a:prstGeom prst="rect">
             <a:avLst/>
@@ -7677,7 +7801,7 @@
         <p:spPr>
           <a:xfrm>
             <a:off x="762000" y="6324600"/>
-            <a:ext cx="1066800" cy="254000"/>
+            <a:ext cx="937957" cy="254000"/>
           </a:xfrm>
           <a:prstGeom prst="rect">
             <a:avLst/>
@@ -7692,7 +7816,7 @@
         </p:nvSpPr>
         <p:spPr>
           <a:xfrm>
-            <a:off x="2082800" y="6311900"/>
+            <a:off x="1968500" y="6311900"/>
             <a:ext cx="6350" cy="279400"/>
           </a:xfrm>
           <a:prstGeom prst="rect">
@@ -7728,45 +7852,30 @@
           </a:p>
         </p:txBody>
       </p:sp>
-      <p:sp>
-        <p:nvSpPr>
-          <p:cNvPr id="34" name="TextBox 33"/>
-          <p:cNvSpPr txBox="1"/>
-          <p:nvPr/>
-        </p:nvSpPr>
-        <p:spPr>
-          <a:xfrm>
-            <a:off x="2336800" y="6375400"/>
-            <a:ext cx="3302000" cy="254000"/>
-          </a:xfrm>
-          <a:prstGeom prst="rect">
-            <a:avLst/>
-          </a:prstGeom>
-          <a:noFill/>
-        </p:spPr>
-        <p:txBody>
-          <a:bodyPr wrap="square" lIns="0" rIns="0" tIns="0" bIns="0">
-            <a:spAutoFit/>
-          </a:bodyPr>
-          <a:lstStyle/>
-          <a:p>
-            <a:pPr algn="l">
-              <a:lnSpc>
-                <a:spcPct val="120000"/>
-              </a:lnSpc>
-            </a:pPr>
-            <a:r>
-              <a:rPr sz="1200" b="0">
-                <a:solidFill>
-                  <a:srgbClr val="5B7480"/>
-                </a:solidFill>
-                <a:latin typeface="Inter"/>
-              </a:rPr>
-              <a:t>Universal Technical Institute</a:t>
-            </a:r>
-          </a:p>
-        </p:txBody>
-      </p:sp>
+      <p:pic>
+        <p:nvPicPr>
+          <p:cNvPr id="34" name="Picture 33" descr="uti-logo.png"/>
+          <p:cNvPicPr>
+            <a:picLocks noChangeAspect="1"/>
+          </p:cNvPicPr>
+          <p:nvPr/>
+        </p:nvPicPr>
+        <p:blipFill>
+          <a:blip r:embed="rId6"/>
+          <a:stretch>
+            <a:fillRect/>
+          </a:stretch>
+        </p:blipFill>
+        <p:spPr>
+          <a:xfrm>
+            <a:off x="2222500" y="6273800"/>
+            <a:ext cx="774246" cy="355600"/>
+          </a:xfrm>
+          <a:prstGeom prst="rect">
+            <a:avLst/>
+          </a:prstGeom>
+        </p:spPr>
+      </p:pic>
       <p:sp>
         <p:nvSpPr>
           <p:cNvPr id="35" name="TextBox 34"/>
@@ -9006,7 +9115,7 @@
         <p:spPr>
           <a:xfrm>
             <a:off x="762000" y="6324600"/>
-            <a:ext cx="1066800" cy="254000"/>
+            <a:ext cx="937957" cy="254000"/>
           </a:xfrm>
           <a:prstGeom prst="rect">
             <a:avLst/>
@@ -9021,7 +9130,7 @@
         </p:nvSpPr>
         <p:spPr>
           <a:xfrm>
-            <a:off x="2082800" y="6311900"/>
+            <a:off x="1968500" y="6311900"/>
             <a:ext cx="6350" cy="279400"/>
           </a:xfrm>
           <a:prstGeom prst="rect">
@@ -9057,45 +9166,30 @@
           </a:p>
         </p:txBody>
       </p:sp>
-      <p:sp>
-        <p:nvSpPr>
-          <p:cNvPr id="33" name="TextBox 32"/>
-          <p:cNvSpPr txBox="1"/>
-          <p:nvPr/>
-        </p:nvSpPr>
-        <p:spPr>
-          <a:xfrm>
-            <a:off x="2336800" y="6375400"/>
-            <a:ext cx="3302000" cy="254000"/>
-          </a:xfrm>
-          <a:prstGeom prst="rect">
-            <a:avLst/>
-          </a:prstGeom>
-          <a:noFill/>
-        </p:spPr>
-        <p:txBody>
-          <a:bodyPr wrap="square" lIns="0" rIns="0" tIns="0" bIns="0">
-            <a:spAutoFit/>
-          </a:bodyPr>
-          <a:lstStyle/>
-          <a:p>
-            <a:pPr algn="l">
-              <a:lnSpc>
-                <a:spcPct val="120000"/>
-              </a:lnSpc>
-            </a:pPr>
-            <a:r>
-              <a:rPr sz="1200" b="0">
-                <a:solidFill>
-                  <a:srgbClr val="5B7480"/>
-                </a:solidFill>
-                <a:latin typeface="Inter"/>
-              </a:rPr>
-              <a:t>Universal Technical Institute</a:t>
-            </a:r>
-          </a:p>
-        </p:txBody>
-      </p:sp>
+      <p:pic>
+        <p:nvPicPr>
+          <p:cNvPr id="33" name="Picture 32" descr="uti-logo.png"/>
+          <p:cNvPicPr>
+            <a:picLocks noChangeAspect="1"/>
+          </p:cNvPicPr>
+          <p:nvPr/>
+        </p:nvPicPr>
+        <p:blipFill>
+          <a:blip r:embed="rId8"/>
+          <a:stretch>
+            <a:fillRect/>
+          </a:stretch>
+        </p:blipFill>
+        <p:spPr>
+          <a:xfrm>
+            <a:off x="2222500" y="6273800"/>
+            <a:ext cx="774246" cy="355600"/>
+          </a:xfrm>
+          <a:prstGeom prst="rect">
+            <a:avLst/>
+          </a:prstGeom>
+        </p:spPr>
+      </p:pic>
       <p:sp>
         <p:nvSpPr>
           <p:cNvPr id="34" name="TextBox 33"/>
@@ -10356,7 +10450,7 @@
         <p:spPr>
           <a:xfrm>
             <a:off x="762000" y="6324600"/>
-            <a:ext cx="1066800" cy="254000"/>
+            <a:ext cx="934528" cy="254000"/>
           </a:xfrm>
           <a:prstGeom prst="rect">
             <a:avLst/>
@@ -10371,7 +10465,7 @@
         </p:nvSpPr>
         <p:spPr>
           <a:xfrm>
-            <a:off x="2082800" y="6311900"/>
+            <a:off x="1968500" y="6311900"/>
             <a:ext cx="6350" cy="279400"/>
           </a:xfrm>
           <a:prstGeom prst="rect">
@@ -10409,14 +10503,84 @@
       </p:sp>
       <p:sp>
         <p:nvSpPr>
-          <p:cNvPr id="33" name="TextBox 32"/>
+          <p:cNvPr id="33" name="Rounded Rectangle 32"/>
+          <p:cNvSpPr/>
+          <p:nvPr/>
+        </p:nvSpPr>
+        <p:spPr>
+          <a:xfrm>
+            <a:off x="2133600" y="6184900"/>
+            <a:ext cx="952046" cy="533400"/>
+          </a:xfrm>
+          <a:prstGeom prst="roundRect">
+            <a:avLst>
+              <a:gd name="adj" fmla="val 11904"/>
+            </a:avLst>
+          </a:prstGeom>
+          <a:solidFill>
+            <a:srgbClr val="FFFFFF"/>
+          </a:solidFill>
+          <a:ln>
+            <a:noFill/>
+          </a:ln>
+          <a:effectLst/>
+        </p:spPr>
+        <p:style>
+          <a:lnRef idx="1">
+            <a:schemeClr val="accent1"/>
+          </a:lnRef>
+          <a:fillRef idx="3">
+            <a:schemeClr val="accent1"/>
+          </a:fillRef>
+          <a:effectRef idx="2">
+            <a:schemeClr val="accent1"/>
+          </a:effectRef>
+          <a:fontRef idx="minor">
+            <a:schemeClr val="lt1"/>
+          </a:fontRef>
+        </p:style>
+        <p:txBody>
+          <a:bodyPr rtlCol="0" anchor="ctr"/>
+          <a:lstStyle/>
+          <a:p>
+            <a:pPr algn="ctr"/>
+          </a:p>
+        </p:txBody>
+      </p:sp>
+      <p:pic>
+        <p:nvPicPr>
+          <p:cNvPr id="34" name="Picture 33" descr="uti-logo.png"/>
+          <p:cNvPicPr>
+            <a:picLocks noChangeAspect="1"/>
+          </p:cNvPicPr>
+          <p:nvPr/>
+        </p:nvPicPr>
+        <p:blipFill>
+          <a:blip r:embed="rId8"/>
+          <a:stretch>
+            <a:fillRect/>
+          </a:stretch>
+        </p:blipFill>
+        <p:spPr>
+          <a:xfrm>
+            <a:off x="2222500" y="6273800"/>
+            <a:ext cx="774246" cy="355600"/>
+          </a:xfrm>
+          <a:prstGeom prst="rect">
+            <a:avLst/>
+          </a:prstGeom>
+        </p:spPr>
+      </p:pic>
+      <p:sp>
+        <p:nvSpPr>
+          <p:cNvPr id="35" name="TextBox 34"/>
           <p:cNvSpPr txBox="1"/>
           <p:nvPr/>
         </p:nvSpPr>
         <p:spPr>
           <a:xfrm>
-            <a:off x="2336800" y="6375400"/>
-            <a:ext cx="3302000" cy="254000"/>
+            <a:off x="5715000" y="6375400"/>
+            <a:ext cx="5080000" cy="243840"/>
           </a:xfrm>
           <a:prstGeom prst="rect">
             <a:avLst/>
@@ -10429,9 +10593,9 @@
           </a:bodyPr>
           <a:lstStyle/>
           <a:p>
-            <a:pPr algn="l">
-              <a:lnSpc>
-                <a:spcPct val="120000"/>
+            <a:pPr algn="r">
+              <a:lnSpc>
+                <a:spcPct val="135000"/>
               </a:lnSpc>
             </a:pPr>
             <a:r>
@@ -10441,45 +10605,6 @@
                 </a:solidFill>
                 <a:latin typeface="Inter"/>
               </a:rPr>
-              <a:t>Universal Technical Institute</a:t>
-            </a:r>
-          </a:p>
-        </p:txBody>
-      </p:sp>
-      <p:sp>
-        <p:nvSpPr>
-          <p:cNvPr id="34" name="TextBox 33"/>
-          <p:cNvSpPr txBox="1"/>
-          <p:nvPr/>
-        </p:nvSpPr>
-        <p:spPr>
-          <a:xfrm>
-            <a:off x="5715000" y="6375400"/>
-            <a:ext cx="5080000" cy="243840"/>
-          </a:xfrm>
-          <a:prstGeom prst="rect">
-            <a:avLst/>
-          </a:prstGeom>
-          <a:noFill/>
-        </p:spPr>
-        <p:txBody>
-          <a:bodyPr wrap="square" lIns="0" rIns="0" tIns="0" bIns="0">
-            <a:spAutoFit/>
-          </a:bodyPr>
-          <a:lstStyle/>
-          <a:p>
-            <a:pPr algn="r">
-              <a:lnSpc>
-                <a:spcPct val="135000"/>
-              </a:lnSpc>
-            </a:pPr>
-            <a:r>
-              <a:rPr sz="1200" b="0">
-                <a:solidFill>
-                  <a:srgbClr val="9EABB1"/>
-                </a:solidFill>
-                <a:latin typeface="Inter"/>
-              </a:rPr>
               <a:t>Concept, for discussion.</a:t>
             </a:r>
           </a:p>
@@ -10487,7 +10612,7 @@
       </p:sp>
       <p:sp>
         <p:nvSpPr>
-          <p:cNvPr id="35" name="TextBox 34"/>
+          <p:cNvPr id="36" name="TextBox 35"/>
           <p:cNvSpPr txBox="1"/>
           <p:nvPr/>
         </p:nvSpPr>
@@ -10620,7 +10745,7 @@
                 </a:solidFill>
                 <a:latin typeface="League Spartan"/>
               </a:rPr>
-              <a:t>Today's Agenda</a:t>
+              <a:t>Agenda</a:t>
             </a:r>
           </a:p>
         </p:txBody>
@@ -11696,7 +11821,7 @@
         <p:spPr>
           <a:xfrm>
             <a:off x="762000" y="6324600"/>
-            <a:ext cx="1066800" cy="254000"/>
+            <a:ext cx="937957" cy="254000"/>
           </a:xfrm>
           <a:prstGeom prst="rect">
             <a:avLst/>
@@ -11711,7 +11836,7 @@
         </p:nvSpPr>
         <p:spPr>
           <a:xfrm>
-            <a:off x="2082800" y="6311900"/>
+            <a:off x="1968500" y="6311900"/>
             <a:ext cx="6350" cy="279400"/>
           </a:xfrm>
           <a:prstGeom prst="rect">
@@ -11747,45 +11872,30 @@
           </a:p>
         </p:txBody>
       </p:sp>
-      <p:sp>
-        <p:nvSpPr>
-          <p:cNvPr id="32" name="TextBox 31"/>
-          <p:cNvSpPr txBox="1"/>
-          <p:nvPr/>
-        </p:nvSpPr>
-        <p:spPr>
-          <a:xfrm>
-            <a:off x="2336800" y="6375400"/>
-            <a:ext cx="3302000" cy="254000"/>
-          </a:xfrm>
-          <a:prstGeom prst="rect">
-            <a:avLst/>
-          </a:prstGeom>
-          <a:noFill/>
-        </p:spPr>
-        <p:txBody>
-          <a:bodyPr wrap="square" lIns="0" rIns="0" tIns="0" bIns="0">
-            <a:spAutoFit/>
-          </a:bodyPr>
-          <a:lstStyle/>
-          <a:p>
-            <a:pPr algn="l">
-              <a:lnSpc>
-                <a:spcPct val="120000"/>
-              </a:lnSpc>
-            </a:pPr>
-            <a:r>
-              <a:rPr sz="1200" b="0">
-                <a:solidFill>
-                  <a:srgbClr val="5B7480"/>
-                </a:solidFill>
-                <a:latin typeface="Inter"/>
-              </a:rPr>
-              <a:t>Universal Technical Institute</a:t>
-            </a:r>
-          </a:p>
-        </p:txBody>
-      </p:sp>
+      <p:pic>
+        <p:nvPicPr>
+          <p:cNvPr id="32" name="Picture 31" descr="uti-logo.png"/>
+          <p:cNvPicPr>
+            <a:picLocks noChangeAspect="1"/>
+          </p:cNvPicPr>
+          <p:nvPr/>
+        </p:nvPicPr>
+        <p:blipFill>
+          <a:blip r:embed="rId3"/>
+          <a:stretch>
+            <a:fillRect/>
+          </a:stretch>
+        </p:blipFill>
+        <p:spPr>
+          <a:xfrm>
+            <a:off x="2222500" y="6273800"/>
+            <a:ext cx="774246" cy="355600"/>
+          </a:xfrm>
+          <a:prstGeom prst="rect">
+            <a:avLst/>
+          </a:prstGeom>
+        </p:spPr>
+      </p:pic>
       <p:sp>
         <p:nvSpPr>
           <p:cNvPr id="33" name="TextBox 32"/>
@@ -12495,7 +12605,7 @@
         <p:spPr>
           <a:xfrm>
             <a:off x="762000" y="6324600"/>
-            <a:ext cx="1066800" cy="254000"/>
+            <a:ext cx="937957" cy="254000"/>
           </a:xfrm>
           <a:prstGeom prst="rect">
             <a:avLst/>
@@ -12510,7 +12620,7 @@
         </p:nvSpPr>
         <p:spPr>
           <a:xfrm>
-            <a:off x="2082800" y="6311900"/>
+            <a:off x="1968500" y="6311900"/>
             <a:ext cx="6350" cy="279400"/>
           </a:xfrm>
           <a:prstGeom prst="rect">
@@ -12546,45 +12656,30 @@
           </a:p>
         </p:txBody>
       </p:sp>
-      <p:sp>
-        <p:nvSpPr>
-          <p:cNvPr id="19" name="TextBox 18"/>
-          <p:cNvSpPr txBox="1"/>
-          <p:nvPr/>
-        </p:nvSpPr>
-        <p:spPr>
-          <a:xfrm>
-            <a:off x="2336800" y="6375400"/>
-            <a:ext cx="3302000" cy="254000"/>
-          </a:xfrm>
-          <a:prstGeom prst="rect">
-            <a:avLst/>
-          </a:prstGeom>
-          <a:noFill/>
-        </p:spPr>
-        <p:txBody>
-          <a:bodyPr wrap="square" lIns="0" rIns="0" tIns="0" bIns="0">
-            <a:spAutoFit/>
-          </a:bodyPr>
-          <a:lstStyle/>
-          <a:p>
-            <a:pPr algn="l">
-              <a:lnSpc>
-                <a:spcPct val="120000"/>
-              </a:lnSpc>
-            </a:pPr>
-            <a:r>
-              <a:rPr sz="1200" b="0">
-                <a:solidFill>
-                  <a:srgbClr val="5B7480"/>
-                </a:solidFill>
-                <a:latin typeface="Inter"/>
-              </a:rPr>
-              <a:t>Universal Technical Institute</a:t>
-            </a:r>
-          </a:p>
-        </p:txBody>
-      </p:sp>
+      <p:pic>
+        <p:nvPicPr>
+          <p:cNvPr id="19" name="Picture 18" descr="uti-logo.png"/>
+          <p:cNvPicPr>
+            <a:picLocks noChangeAspect="1"/>
+          </p:cNvPicPr>
+          <p:nvPr/>
+        </p:nvPicPr>
+        <p:blipFill>
+          <a:blip r:embed="rId6"/>
+          <a:stretch>
+            <a:fillRect/>
+          </a:stretch>
+        </p:blipFill>
+        <p:spPr>
+          <a:xfrm>
+            <a:off x="2222500" y="6273800"/>
+            <a:ext cx="774246" cy="355600"/>
+          </a:xfrm>
+          <a:prstGeom prst="rect">
+            <a:avLst/>
+          </a:prstGeom>
+        </p:spPr>
+      </p:pic>
       <p:sp>
         <p:nvSpPr>
           <p:cNvPr id="20" name="TextBox 19"/>
@@ -12845,7 +12940,7 @@
                 </a:solidFill>
                 <a:latin typeface="League Spartan"/>
               </a:rPr>
-              <a:t>2–4 hrs</a:t>
+              <a:t>2 – 4 hrs</a:t>
             </a:r>
           </a:p>
         </p:txBody>
@@ -12858,7 +12953,7 @@
         </p:nvSpPr>
         <p:spPr>
           <a:xfrm>
-            <a:off x="3987800" y="3790950"/>
+            <a:off x="4318000" y="3790950"/>
             <a:ext cx="1219200" cy="363220"/>
           </a:xfrm>
           <a:prstGeom prst="rect">
@@ -13301,7 +13396,7 @@
         <p:spPr>
           <a:xfrm>
             <a:off x="762000" y="6324600"/>
-            <a:ext cx="1066800" cy="254000"/>
+            <a:ext cx="937957" cy="254000"/>
           </a:xfrm>
           <a:prstGeom prst="rect">
             <a:avLst/>
@@ -13316,7 +13411,7 @@
         </p:nvSpPr>
         <p:spPr>
           <a:xfrm>
-            <a:off x="2082800" y="6311900"/>
+            <a:off x="1968500" y="6311900"/>
             <a:ext cx="6350" cy="279400"/>
           </a:xfrm>
           <a:prstGeom prst="rect">
@@ -13352,45 +13447,30 @@
           </a:p>
         </p:txBody>
       </p:sp>
-      <p:sp>
-        <p:nvSpPr>
-          <p:cNvPr id="20" name="TextBox 19"/>
-          <p:cNvSpPr txBox="1"/>
-          <p:nvPr/>
-        </p:nvSpPr>
-        <p:spPr>
-          <a:xfrm>
-            <a:off x="2336800" y="6375400"/>
-            <a:ext cx="3302000" cy="254000"/>
-          </a:xfrm>
-          <a:prstGeom prst="rect">
-            <a:avLst/>
-          </a:prstGeom>
-          <a:noFill/>
-        </p:spPr>
-        <p:txBody>
-          <a:bodyPr wrap="square" lIns="0" rIns="0" tIns="0" bIns="0">
-            <a:spAutoFit/>
-          </a:bodyPr>
-          <a:lstStyle/>
-          <a:p>
-            <a:pPr algn="l">
-              <a:lnSpc>
-                <a:spcPct val="120000"/>
-              </a:lnSpc>
-            </a:pPr>
-            <a:r>
-              <a:rPr sz="1200" b="0">
-                <a:solidFill>
-                  <a:srgbClr val="5B7480"/>
-                </a:solidFill>
-                <a:latin typeface="Inter"/>
-              </a:rPr>
-              <a:t>Universal Technical Institute</a:t>
-            </a:r>
-          </a:p>
-        </p:txBody>
-      </p:sp>
+      <p:pic>
+        <p:nvPicPr>
+          <p:cNvPr id="20" name="Picture 19" descr="uti-logo.png"/>
+          <p:cNvPicPr>
+            <a:picLocks noChangeAspect="1"/>
+          </p:cNvPicPr>
+          <p:nvPr/>
+        </p:nvPicPr>
+        <p:blipFill>
+          <a:blip r:embed="rId6"/>
+          <a:stretch>
+            <a:fillRect/>
+          </a:stretch>
+        </p:blipFill>
+        <p:spPr>
+          <a:xfrm>
+            <a:off x="2222500" y="6273800"/>
+            <a:ext cx="774246" cy="355600"/>
+          </a:xfrm>
+          <a:prstGeom prst="rect">
+            <a:avLst/>
+          </a:prstGeom>
+        </p:spPr>
+      </p:pic>
       <p:sp>
         <p:nvSpPr>
           <p:cNvPr id="21" name="TextBox 20"/>
@@ -13975,7 +14055,7 @@
         <p:spPr>
           <a:xfrm>
             <a:off x="762000" y="6324600"/>
-            <a:ext cx="1066800" cy="254000"/>
+            <a:ext cx="934528" cy="254000"/>
           </a:xfrm>
           <a:prstGeom prst="rect">
             <a:avLst/>
@@ -13990,7 +14070,7 @@
         </p:nvSpPr>
         <p:spPr>
           <a:xfrm>
-            <a:off x="2082800" y="6311900"/>
+            <a:off x="1968500" y="6311900"/>
             <a:ext cx="6350" cy="279400"/>
           </a:xfrm>
           <a:prstGeom prst="rect">
@@ -14028,14 +14108,84 @@
       </p:sp>
       <p:sp>
         <p:nvSpPr>
-          <p:cNvPr id="16" name="TextBox 15"/>
+          <p:cNvPr id="16" name="Rounded Rectangle 15"/>
+          <p:cNvSpPr/>
+          <p:nvPr/>
+        </p:nvSpPr>
+        <p:spPr>
+          <a:xfrm>
+            <a:off x="2133600" y="6184900"/>
+            <a:ext cx="952046" cy="533400"/>
+          </a:xfrm>
+          <a:prstGeom prst="roundRect">
+            <a:avLst>
+              <a:gd name="adj" fmla="val 11904"/>
+            </a:avLst>
+          </a:prstGeom>
+          <a:solidFill>
+            <a:srgbClr val="FFFFFF"/>
+          </a:solidFill>
+          <a:ln>
+            <a:noFill/>
+          </a:ln>
+          <a:effectLst/>
+        </p:spPr>
+        <p:style>
+          <a:lnRef idx="1">
+            <a:schemeClr val="accent1"/>
+          </a:lnRef>
+          <a:fillRef idx="3">
+            <a:schemeClr val="accent1"/>
+          </a:fillRef>
+          <a:effectRef idx="2">
+            <a:schemeClr val="accent1"/>
+          </a:effectRef>
+          <a:fontRef idx="minor">
+            <a:schemeClr val="lt1"/>
+          </a:fontRef>
+        </p:style>
+        <p:txBody>
+          <a:bodyPr rtlCol="0" anchor="ctr"/>
+          <a:lstStyle/>
+          <a:p>
+            <a:pPr algn="ctr"/>
+          </a:p>
+        </p:txBody>
+      </p:sp>
+      <p:pic>
+        <p:nvPicPr>
+          <p:cNvPr id="17" name="Picture 16" descr="uti-logo.png"/>
+          <p:cNvPicPr>
+            <a:picLocks noChangeAspect="1"/>
+          </p:cNvPicPr>
+          <p:nvPr/>
+        </p:nvPicPr>
+        <p:blipFill>
+          <a:blip r:embed="rId5"/>
+          <a:stretch>
+            <a:fillRect/>
+          </a:stretch>
+        </p:blipFill>
+        <p:spPr>
+          <a:xfrm>
+            <a:off x="2222500" y="6273800"/>
+            <a:ext cx="774246" cy="355600"/>
+          </a:xfrm>
+          <a:prstGeom prst="rect">
+            <a:avLst/>
+          </a:prstGeom>
+        </p:spPr>
+      </p:pic>
+      <p:sp>
+        <p:nvSpPr>
+          <p:cNvPr id="18" name="TextBox 17"/>
           <p:cNvSpPr txBox="1"/>
           <p:nvPr/>
         </p:nvSpPr>
         <p:spPr>
           <a:xfrm>
-            <a:off x="2336800" y="6375400"/>
-            <a:ext cx="3302000" cy="254000"/>
+            <a:off x="5715000" y="6375400"/>
+            <a:ext cx="5080000" cy="243840"/>
           </a:xfrm>
           <a:prstGeom prst="rect">
             <a:avLst/>
@@ -14048,9 +14198,9 @@
           </a:bodyPr>
           <a:lstStyle/>
           <a:p>
-            <a:pPr algn="l">
-              <a:lnSpc>
-                <a:spcPct val="120000"/>
+            <a:pPr algn="r">
+              <a:lnSpc>
+                <a:spcPct val="135000"/>
               </a:lnSpc>
             </a:pPr>
             <a:r>
@@ -14060,45 +14210,6 @@
                 </a:solidFill>
                 <a:latin typeface="Inter"/>
               </a:rPr>
-              <a:t>Universal Technical Institute</a:t>
-            </a:r>
-          </a:p>
-        </p:txBody>
-      </p:sp>
-      <p:sp>
-        <p:nvSpPr>
-          <p:cNvPr id="17" name="TextBox 16"/>
-          <p:cNvSpPr txBox="1"/>
-          <p:nvPr/>
-        </p:nvSpPr>
-        <p:spPr>
-          <a:xfrm>
-            <a:off x="5715000" y="6375400"/>
-            <a:ext cx="5080000" cy="243840"/>
-          </a:xfrm>
-          <a:prstGeom prst="rect">
-            <a:avLst/>
-          </a:prstGeom>
-          <a:noFill/>
-        </p:spPr>
-        <p:txBody>
-          <a:bodyPr wrap="square" lIns="0" rIns="0" tIns="0" bIns="0">
-            <a:spAutoFit/>
-          </a:bodyPr>
-          <a:lstStyle/>
-          <a:p>
-            <a:pPr algn="r">
-              <a:lnSpc>
-                <a:spcPct val="135000"/>
-              </a:lnSpc>
-            </a:pPr>
-            <a:r>
-              <a:rPr sz="1200" b="0">
-                <a:solidFill>
-                  <a:srgbClr val="9EABB1"/>
-                </a:solidFill>
-                <a:latin typeface="Inter"/>
-              </a:rPr>
               <a:t>North Star strategy target.</a:t>
             </a:r>
           </a:p>
@@ -14106,7 +14217,7 @@
       </p:sp>
       <p:sp>
         <p:nvSpPr>
-          <p:cNvPr id="18" name="TextBox 17"/>
+          <p:cNvPr id="19" name="TextBox 18"/>
           <p:cNvSpPr txBox="1"/>
           <p:nvPr/>
         </p:nvSpPr>
@@ -14773,7 +14884,7 @@
         <p:spPr>
           <a:xfrm>
             <a:off x="762000" y="6324600"/>
-            <a:ext cx="1066800" cy="254000"/>
+            <a:ext cx="937957" cy="254000"/>
           </a:xfrm>
           <a:prstGeom prst="rect">
             <a:avLst/>
@@ -14788,7 +14899,7 @@
         </p:nvSpPr>
         <p:spPr>
           <a:xfrm>
-            <a:off x="2082800" y="6311900"/>
+            <a:off x="1968500" y="6311900"/>
             <a:ext cx="6350" cy="279400"/>
           </a:xfrm>
           <a:prstGeom prst="rect">
@@ -14824,45 +14935,30 @@
           </a:p>
         </p:txBody>
       </p:sp>
-      <p:sp>
-        <p:nvSpPr>
-          <p:cNvPr id="18" name="TextBox 17"/>
-          <p:cNvSpPr txBox="1"/>
-          <p:nvPr/>
-        </p:nvSpPr>
-        <p:spPr>
-          <a:xfrm>
-            <a:off x="2336800" y="6375400"/>
-            <a:ext cx="3302000" cy="254000"/>
-          </a:xfrm>
-          <a:prstGeom prst="rect">
-            <a:avLst/>
-          </a:prstGeom>
-          <a:noFill/>
-        </p:spPr>
-        <p:txBody>
-          <a:bodyPr wrap="square" lIns="0" rIns="0" tIns="0" bIns="0">
-            <a:spAutoFit/>
-          </a:bodyPr>
-          <a:lstStyle/>
-          <a:p>
-            <a:pPr algn="l">
-              <a:lnSpc>
-                <a:spcPct val="120000"/>
-              </a:lnSpc>
-            </a:pPr>
-            <a:r>
-              <a:rPr sz="1200" b="0">
-                <a:solidFill>
-                  <a:srgbClr val="5B7480"/>
-                </a:solidFill>
-                <a:latin typeface="Inter"/>
-              </a:rPr>
-              <a:t>Universal Technical Institute</a:t>
-            </a:r>
-          </a:p>
-        </p:txBody>
-      </p:sp>
+      <p:pic>
+        <p:nvPicPr>
+          <p:cNvPr id="18" name="Picture 17" descr="uti-logo.png"/>
+          <p:cNvPicPr>
+            <a:picLocks noChangeAspect="1"/>
+          </p:cNvPicPr>
+          <p:nvPr/>
+        </p:nvPicPr>
+        <p:blipFill>
+          <a:blip r:embed="rId5"/>
+          <a:stretch>
+            <a:fillRect/>
+          </a:stretch>
+        </p:blipFill>
+        <p:spPr>
+          <a:xfrm>
+            <a:off x="2222500" y="6273800"/>
+            <a:ext cx="774246" cy="355600"/>
+          </a:xfrm>
+          <a:prstGeom prst="rect">
+            <a:avLst/>
+          </a:prstGeom>
+        </p:spPr>
+      </p:pic>
       <p:sp>
         <p:nvSpPr>
           <p:cNvPr id="19" name="TextBox 18"/>
@@ -15600,7 +15696,7 @@
         <p:spPr>
           <a:xfrm>
             <a:off x="762000" y="6324600"/>
-            <a:ext cx="1066800" cy="254000"/>
+            <a:ext cx="937957" cy="254000"/>
           </a:xfrm>
           <a:prstGeom prst="rect">
             <a:avLst/>
@@ -15615,7 +15711,7 @@
         </p:nvSpPr>
         <p:spPr>
           <a:xfrm>
-            <a:off x="2082800" y="6311900"/>
+            <a:off x="1968500" y="6311900"/>
             <a:ext cx="6350" cy="279400"/>
           </a:xfrm>
           <a:prstGeom prst="rect">
@@ -15651,45 +15747,30 @@
           </a:p>
         </p:txBody>
       </p:sp>
-      <p:sp>
-        <p:nvSpPr>
-          <p:cNvPr id="20" name="TextBox 19"/>
-          <p:cNvSpPr txBox="1"/>
-          <p:nvPr/>
-        </p:nvSpPr>
-        <p:spPr>
-          <a:xfrm>
-            <a:off x="2336800" y="6375400"/>
-            <a:ext cx="3302000" cy="254000"/>
-          </a:xfrm>
-          <a:prstGeom prst="rect">
-            <a:avLst/>
-          </a:prstGeom>
-          <a:noFill/>
-        </p:spPr>
-        <p:txBody>
-          <a:bodyPr wrap="square" lIns="0" rIns="0" tIns="0" bIns="0">
-            <a:spAutoFit/>
-          </a:bodyPr>
-          <a:lstStyle/>
-          <a:p>
-            <a:pPr algn="l">
-              <a:lnSpc>
-                <a:spcPct val="120000"/>
-              </a:lnSpc>
-            </a:pPr>
-            <a:r>
-              <a:rPr sz="1200" b="0">
-                <a:solidFill>
-                  <a:srgbClr val="5B7480"/>
-                </a:solidFill>
-                <a:latin typeface="Inter"/>
-              </a:rPr>
-              <a:t>Universal Technical Institute</a:t>
-            </a:r>
-          </a:p>
-        </p:txBody>
-      </p:sp>
+      <p:pic>
+        <p:nvPicPr>
+          <p:cNvPr id="20" name="Picture 19" descr="uti-logo.png"/>
+          <p:cNvPicPr>
+            <a:picLocks noChangeAspect="1"/>
+          </p:cNvPicPr>
+          <p:nvPr/>
+        </p:nvPicPr>
+        <p:blipFill>
+          <a:blip r:embed="rId6"/>
+          <a:stretch>
+            <a:fillRect/>
+          </a:stretch>
+        </p:blipFill>
+        <p:spPr>
+          <a:xfrm>
+            <a:off x="2222500" y="6273800"/>
+            <a:ext cx="774246" cy="355600"/>
+          </a:xfrm>
+          <a:prstGeom prst="rect">
+            <a:avLst/>
+          </a:prstGeom>
+        </p:spPr>
+      </p:pic>
       <p:sp>
         <p:nvSpPr>
           <p:cNvPr id="21" name="TextBox 20"/>
@@ -16708,7 +16789,7 @@
         <p:spPr>
           <a:xfrm>
             <a:off x="762000" y="6324600"/>
-            <a:ext cx="1066800" cy="254000"/>
+            <a:ext cx="937957" cy="254000"/>
           </a:xfrm>
           <a:prstGeom prst="rect">
             <a:avLst/>
@@ -16723,7 +16804,7 @@
         </p:nvSpPr>
         <p:spPr>
           <a:xfrm>
-            <a:off x="2082800" y="6311900"/>
+            <a:off x="1968500" y="6311900"/>
             <a:ext cx="6350" cy="279400"/>
           </a:xfrm>
           <a:prstGeom prst="rect">
@@ -16759,45 +16840,30 @@
           </a:p>
         </p:txBody>
       </p:sp>
-      <p:sp>
-        <p:nvSpPr>
-          <p:cNvPr id="26" name="TextBox 25"/>
-          <p:cNvSpPr txBox="1"/>
-          <p:nvPr/>
-        </p:nvSpPr>
-        <p:spPr>
-          <a:xfrm>
-            <a:off x="2336800" y="6375400"/>
-            <a:ext cx="3302000" cy="254000"/>
-          </a:xfrm>
-          <a:prstGeom prst="rect">
-            <a:avLst/>
-          </a:prstGeom>
-          <a:noFill/>
-        </p:spPr>
-        <p:txBody>
-          <a:bodyPr wrap="square" lIns="0" rIns="0" tIns="0" bIns="0">
-            <a:spAutoFit/>
-          </a:bodyPr>
-          <a:lstStyle/>
-          <a:p>
-            <a:pPr algn="l">
-              <a:lnSpc>
-                <a:spcPct val="120000"/>
-              </a:lnSpc>
-            </a:pPr>
-            <a:r>
-              <a:rPr sz="1200" b="0">
-                <a:solidFill>
-                  <a:srgbClr val="5B7480"/>
-                </a:solidFill>
-                <a:latin typeface="Inter"/>
-              </a:rPr>
-              <a:t>Universal Technical Institute</a:t>
-            </a:r>
-          </a:p>
-        </p:txBody>
-      </p:sp>
+      <p:pic>
+        <p:nvPicPr>
+          <p:cNvPr id="26" name="Picture 25" descr="uti-logo.png"/>
+          <p:cNvPicPr>
+            <a:picLocks noChangeAspect="1"/>
+          </p:cNvPicPr>
+          <p:nvPr/>
+        </p:nvPicPr>
+        <p:blipFill>
+          <a:blip r:embed="rId7"/>
+          <a:stretch>
+            <a:fillRect/>
+          </a:stretch>
+        </p:blipFill>
+        <p:spPr>
+          <a:xfrm>
+            <a:off x="2222500" y="6273800"/>
+            <a:ext cx="774246" cy="355600"/>
+          </a:xfrm>
+          <a:prstGeom prst="rect">
+            <a:avLst/>
+          </a:prstGeom>
+        </p:spPr>
+      </p:pic>
       <p:sp>
         <p:nvSpPr>
           <p:cNvPr id="27" name="TextBox 26"/>
@@ -17706,7 +17772,7 @@
         <p:spPr>
           <a:xfrm>
             <a:off x="762000" y="6324600"/>
-            <a:ext cx="1066800" cy="254000"/>
+            <a:ext cx="934528" cy="254000"/>
           </a:xfrm>
           <a:prstGeom prst="rect">
             <a:avLst/>
@@ -17721,7 +17787,7 @@
         </p:nvSpPr>
         <p:spPr>
           <a:xfrm>
-            <a:off x="2082800" y="6311900"/>
+            <a:off x="1968500" y="6311900"/>
             <a:ext cx="6350" cy="279400"/>
           </a:xfrm>
           <a:prstGeom prst="rect">
@@ -17759,46 +17825,77 @@
       </p:sp>
       <p:sp>
         <p:nvSpPr>
-          <p:cNvPr id="25" name="TextBox 24"/>
-          <p:cNvSpPr txBox="1"/>
-          <p:nvPr/>
-        </p:nvSpPr>
-        <p:spPr>
-          <a:xfrm>
-            <a:off x="2336800" y="6375400"/>
-            <a:ext cx="3302000" cy="254000"/>
-          </a:xfrm>
-          <a:prstGeom prst="rect">
-            <a:avLst/>
-          </a:prstGeom>
-          <a:noFill/>
-        </p:spPr>
-        <p:txBody>
-          <a:bodyPr wrap="square" lIns="0" rIns="0" tIns="0" bIns="0">
-            <a:spAutoFit/>
-          </a:bodyPr>
-          <a:lstStyle/>
-          <a:p>
-            <a:pPr algn="l">
-              <a:lnSpc>
-                <a:spcPct val="120000"/>
-              </a:lnSpc>
-            </a:pPr>
-            <a:r>
-              <a:rPr sz="1200" b="0">
-                <a:solidFill>
-                  <a:srgbClr val="9EABB1"/>
-                </a:solidFill>
-                <a:latin typeface="Inter"/>
-              </a:rPr>
-              <a:t>Universal Technical Institute</a:t>
-            </a:r>
-          </a:p>
-        </p:txBody>
-      </p:sp>
-      <p:sp>
-        <p:nvSpPr>
-          <p:cNvPr id="26" name="TextBox 25"/>
+          <p:cNvPr id="25" name="Rounded Rectangle 24"/>
+          <p:cNvSpPr/>
+          <p:nvPr/>
+        </p:nvSpPr>
+        <p:spPr>
+          <a:xfrm>
+            <a:off x="2133600" y="6184900"/>
+            <a:ext cx="952046" cy="533400"/>
+          </a:xfrm>
+          <a:prstGeom prst="roundRect">
+            <a:avLst>
+              <a:gd name="adj" fmla="val 11904"/>
+            </a:avLst>
+          </a:prstGeom>
+          <a:solidFill>
+            <a:srgbClr val="FFFFFF"/>
+          </a:solidFill>
+          <a:ln>
+            <a:noFill/>
+          </a:ln>
+          <a:effectLst/>
+        </p:spPr>
+        <p:style>
+          <a:lnRef idx="1">
+            <a:schemeClr val="accent1"/>
+          </a:lnRef>
+          <a:fillRef idx="3">
+            <a:schemeClr val="accent1"/>
+          </a:fillRef>
+          <a:effectRef idx="2">
+            <a:schemeClr val="accent1"/>
+          </a:effectRef>
+          <a:fontRef idx="minor">
+            <a:schemeClr val="lt1"/>
+          </a:fontRef>
+        </p:style>
+        <p:txBody>
+          <a:bodyPr rtlCol="0" anchor="ctr"/>
+          <a:lstStyle/>
+          <a:p>
+            <a:pPr algn="ctr"/>
+          </a:p>
+        </p:txBody>
+      </p:sp>
+      <p:pic>
+        <p:nvPicPr>
+          <p:cNvPr id="26" name="Picture 25" descr="uti-logo.png"/>
+          <p:cNvPicPr>
+            <a:picLocks noChangeAspect="1"/>
+          </p:cNvPicPr>
+          <p:nvPr/>
+        </p:nvPicPr>
+        <p:blipFill>
+          <a:blip r:embed="rId7"/>
+          <a:stretch>
+            <a:fillRect/>
+          </a:stretch>
+        </p:blipFill>
+        <p:spPr>
+          <a:xfrm>
+            <a:off x="2222500" y="6273800"/>
+            <a:ext cx="774246" cy="355600"/>
+          </a:xfrm>
+          <a:prstGeom prst="rect">
+            <a:avLst/>
+          </a:prstGeom>
+        </p:spPr>
+      </p:pic>
+      <p:sp>
+        <p:nvSpPr>
+          <p:cNvPr id="27" name="TextBox 26"/>
           <p:cNvSpPr txBox="1"/>
           <p:nvPr/>
         </p:nvSpPr>

--- a/projects/uti/deck/UTI-Eduface-deck.pptx
+++ b/projects/uti/deck/UTI-Eduface-deck.pptx
@@ -20,6 +20,7 @@
     <p:sldId id="268" r:id="rId19"/>
     <p:sldId id="269" r:id="rId20"/>
     <p:sldId id="270" r:id="rId21"/>
+    <p:sldId id="271" r:id="rId22"/>
   </p:sldIdLst>
   <p:sldSz cx="12192000" cy="6858000" type="screen4x3"/>
   <p:notesSz cx="6858000" cy="9144000"/>
@@ -6569,7 +6570,7 @@
             <a:avLst/>
           </a:prstGeom>
           <a:solidFill>
-            <a:srgbClr val="FFFFFF"/>
+            <a:srgbClr val="002333"/>
           </a:solidFill>
           <a:ln>
             <a:noFill/>
@@ -6606,8 +6607,8 @@
         </p:nvSpPr>
         <p:spPr>
           <a:xfrm>
-            <a:off x="762000" y="558800"/>
-            <a:ext cx="10668000" cy="1061720"/>
+            <a:off x="762000" y="3175000"/>
+            <a:ext cx="10668000" cy="1173480"/>
           </a:xfrm>
           <a:prstGeom prst="rect">
             <a:avLst/>
@@ -6622,76 +6623,37 @@
           <a:p>
             <a:pPr algn="l">
               <a:lnSpc>
-                <a:spcPct val="104000"/>
-              </a:lnSpc>
-            </a:pPr>
-            <a:r>
-              <a:rPr sz="3800" b="1">
-                <a:solidFill>
-                  <a:srgbClr val="002333"/>
+                <a:spcPct val="98000"/>
+              </a:lnSpc>
+            </a:pPr>
+            <a:r>
+              <a:rPr sz="6600" b="1">
+                <a:solidFill>
+                  <a:srgbClr val="FFFFFF"/>
                 </a:solidFill>
                 <a:latin typeface="League Spartan"/>
               </a:rPr>
-              <a:t>Marking Time Drops 6–10x at Bath Spa University</a:t>
-            </a:r>
-          </a:p>
-        </p:txBody>
-      </p:sp>
-      <p:sp>
-        <p:nvSpPr>
-          <p:cNvPr id="4" name="TextBox 3"/>
-          <p:cNvSpPr txBox="1"/>
-          <p:nvPr/>
-        </p:nvSpPr>
-        <p:spPr>
-          <a:xfrm>
-            <a:off x="762000" y="2095500"/>
-            <a:ext cx="2540000" cy="304800"/>
-          </a:xfrm>
-          <a:prstGeom prst="rect">
-            <a:avLst/>
-          </a:prstGeom>
-          <a:noFill/>
-        </p:spPr>
-        <p:txBody>
-          <a:bodyPr wrap="square" lIns="0" rIns="0" tIns="0" bIns="0">
-            <a:spAutoFit/>
-          </a:bodyPr>
-          <a:lstStyle/>
-          <a:p>
-            <a:pPr algn="r">
-              <a:lnSpc>
-                <a:spcPct val="120000"/>
-              </a:lnSpc>
-            </a:pPr>
-            <a:r>
-              <a:rPr sz="1600" b="0">
-                <a:solidFill>
-                  <a:srgbClr val="2C4A57"/>
-                </a:solidFill>
-                <a:latin typeface="Inter"/>
-              </a:rPr>
-              <a:t>Traditional marking</a:t>
-            </a:r>
-          </a:p>
-        </p:txBody>
-      </p:sp>
-      <p:sp>
-        <p:nvSpPr>
-          <p:cNvPr id="5" name="Rectangle 4"/>
+              <a:t>Demo</a:t>
+            </a:r>
+          </a:p>
+        </p:txBody>
+      </p:sp>
+      <p:sp>
+        <p:nvSpPr>
+          <p:cNvPr id="4" name="Rectangle 3"/>
           <p:cNvSpPr/>
           <p:nvPr/>
         </p:nvSpPr>
         <p:spPr>
           <a:xfrm>
-            <a:off x="3556000" y="1943100"/>
-            <a:ext cx="6096000" cy="558800"/>
+            <a:off x="762000" y="6045200"/>
+            <a:ext cx="10668000" cy="6350"/>
           </a:xfrm>
           <a:prstGeom prst="rect">
             <a:avLst/>
           </a:prstGeom>
           <a:solidFill>
-            <a:srgbClr val="F3F7F8"/>
+            <a:srgbClr val="1F3D4B"/>
           </a:solidFill>
           <a:ln>
             <a:noFill/>
@@ -6720,6 +6682,30 @@
           </a:p>
         </p:txBody>
       </p:sp>
+      <p:pic>
+        <p:nvPicPr>
+          <p:cNvPr id="5" name="Picture 4" descr="logo_white.png"/>
+          <p:cNvPicPr>
+            <a:picLocks noChangeAspect="1"/>
+          </p:cNvPicPr>
+          <p:nvPr/>
+        </p:nvPicPr>
+        <p:blipFill>
+          <a:blip r:embed="rId2"/>
+          <a:stretch>
+            <a:fillRect/>
+          </a:stretch>
+        </p:blipFill>
+        <p:spPr>
+          <a:xfrm>
+            <a:off x="762000" y="6324600"/>
+            <a:ext cx="934528" cy="254000"/>
+          </a:xfrm>
+          <a:prstGeom prst="rect">
+            <a:avLst/>
+          </a:prstGeom>
+        </p:spPr>
+      </p:pic>
       <p:sp>
         <p:nvSpPr>
           <p:cNvPr id="6" name="Rectangle 5"/>
@@ -6728,14 +6714,14 @@
         </p:nvSpPr>
         <p:spPr>
           <a:xfrm>
-            <a:off x="6604000" y="1943100"/>
-            <a:ext cx="3048000" cy="558800"/>
+            <a:off x="1968500" y="6311900"/>
+            <a:ext cx="6350" cy="279400"/>
           </a:xfrm>
           <a:prstGeom prst="rect">
             <a:avLst/>
           </a:prstGeom>
           <a:solidFill>
-            <a:srgbClr val="CDD9DE"/>
+            <a:srgbClr val="1F3D4B"/>
           </a:solidFill>
           <a:ln>
             <a:noFill/>
@@ -6766,430 +6752,18 @@
       </p:sp>
       <p:sp>
         <p:nvSpPr>
-          <p:cNvPr id="7" name="TextBox 6"/>
-          <p:cNvSpPr txBox="1"/>
-          <p:nvPr/>
-        </p:nvSpPr>
-        <p:spPr>
-          <a:xfrm>
-            <a:off x="9906000" y="2070100"/>
-            <a:ext cx="1524000" cy="355600"/>
-          </a:xfrm>
-          <a:prstGeom prst="rect">
-            <a:avLst/>
-          </a:prstGeom>
-          <a:noFill/>
-        </p:spPr>
-        <p:txBody>
-          <a:bodyPr wrap="square" lIns="0" rIns="0" tIns="0" bIns="0">
-            <a:spAutoFit/>
-          </a:bodyPr>
-          <a:lstStyle/>
-          <a:p>
-            <a:pPr algn="l">
-              <a:lnSpc>
-                <a:spcPct val="100000"/>
-              </a:lnSpc>
-            </a:pPr>
-            <a:r>
-              <a:rPr sz="2200" b="1">
-                <a:solidFill>
-                  <a:srgbClr val="002333"/>
-                </a:solidFill>
-                <a:latin typeface="League Spartan"/>
-              </a:rPr>
-              <a:t>15–30 min</a:t>
-            </a:r>
-          </a:p>
-        </p:txBody>
-      </p:sp>
-      <p:sp>
-        <p:nvSpPr>
-          <p:cNvPr id="8" name="TextBox 7"/>
-          <p:cNvSpPr txBox="1"/>
-          <p:nvPr/>
-        </p:nvSpPr>
-        <p:spPr>
-          <a:xfrm>
-            <a:off x="762000" y="2908300"/>
-            <a:ext cx="2540000" cy="304800"/>
-          </a:xfrm>
-          <a:prstGeom prst="rect">
-            <a:avLst/>
-          </a:prstGeom>
-          <a:noFill/>
-        </p:spPr>
-        <p:txBody>
-          <a:bodyPr wrap="square" lIns="0" rIns="0" tIns="0" bIns="0">
-            <a:spAutoFit/>
-          </a:bodyPr>
-          <a:lstStyle/>
-          <a:p>
-            <a:pPr algn="r">
-              <a:lnSpc>
-                <a:spcPct val="120000"/>
-              </a:lnSpc>
-            </a:pPr>
-            <a:r>
-              <a:rPr sz="1600" b="0">
-                <a:solidFill>
-                  <a:srgbClr val="002333"/>
-                </a:solidFill>
-                <a:latin typeface="Inter"/>
-              </a:rPr>
-              <a:t>With Eduface</a:t>
-            </a:r>
-          </a:p>
-        </p:txBody>
-      </p:sp>
-      <p:sp>
-        <p:nvSpPr>
-          <p:cNvPr id="9" name="Rectangle 8"/>
+          <p:cNvPr id="7" name="Rounded Rectangle 6"/>
           <p:cNvSpPr/>
           <p:nvPr/>
         </p:nvSpPr>
         <p:spPr>
           <a:xfrm>
-            <a:off x="3556000" y="2755900"/>
-            <a:ext cx="6096000" cy="558800"/>
-          </a:xfrm>
-          <a:prstGeom prst="rect">
-            <a:avLst/>
-          </a:prstGeom>
-          <a:solidFill>
-            <a:srgbClr val="F3F7F8"/>
-          </a:solidFill>
-          <a:ln>
-            <a:noFill/>
-          </a:ln>
-          <a:effectLst/>
-        </p:spPr>
-        <p:style>
-          <a:lnRef idx="1">
-            <a:schemeClr val="accent1"/>
-          </a:lnRef>
-          <a:fillRef idx="3">
-            <a:schemeClr val="accent1"/>
-          </a:fillRef>
-          <a:effectRef idx="2">
-            <a:schemeClr val="accent1"/>
-          </a:effectRef>
-          <a:fontRef idx="minor">
-            <a:schemeClr val="lt1"/>
-          </a:fontRef>
-        </p:style>
-        <p:txBody>
-          <a:bodyPr rtlCol="0" anchor="ctr"/>
-          <a:lstStyle/>
-          <a:p>
-            <a:pPr algn="ctr"/>
-          </a:p>
-        </p:txBody>
-      </p:sp>
-      <p:sp>
-        <p:nvSpPr>
-          <p:cNvPr id="10" name="Rectangle 9"/>
-          <p:cNvSpPr/>
-          <p:nvPr/>
-        </p:nvSpPr>
-        <p:spPr>
-          <a:xfrm>
-            <a:off x="3860800" y="2755900"/>
-            <a:ext cx="711200" cy="558800"/>
-          </a:xfrm>
-          <a:prstGeom prst="rect">
-            <a:avLst/>
-          </a:prstGeom>
-          <a:solidFill>
-            <a:srgbClr val="00E075"/>
-          </a:solidFill>
-          <a:ln>
-            <a:noFill/>
-          </a:ln>
-          <a:effectLst/>
-        </p:spPr>
-        <p:style>
-          <a:lnRef idx="1">
-            <a:schemeClr val="accent1"/>
-          </a:lnRef>
-          <a:fillRef idx="3">
-            <a:schemeClr val="accent1"/>
-          </a:fillRef>
-          <a:effectRef idx="2">
-            <a:schemeClr val="accent1"/>
-          </a:effectRef>
-          <a:fontRef idx="minor">
-            <a:schemeClr val="lt1"/>
-          </a:fontRef>
-        </p:style>
-        <p:txBody>
-          <a:bodyPr rtlCol="0" anchor="ctr"/>
-          <a:lstStyle/>
-          <a:p>
-            <a:pPr algn="ctr"/>
-          </a:p>
-        </p:txBody>
-      </p:sp>
-      <p:sp>
-        <p:nvSpPr>
-          <p:cNvPr id="11" name="TextBox 10"/>
-          <p:cNvSpPr txBox="1"/>
-          <p:nvPr/>
-        </p:nvSpPr>
-        <p:spPr>
-          <a:xfrm>
-            <a:off x="9906000" y="2882900"/>
-            <a:ext cx="1524000" cy="355600"/>
-          </a:xfrm>
-          <a:prstGeom prst="rect">
-            <a:avLst/>
-          </a:prstGeom>
-          <a:noFill/>
-        </p:spPr>
-        <p:txBody>
-          <a:bodyPr wrap="square" lIns="0" rIns="0" tIns="0" bIns="0">
-            <a:spAutoFit/>
-          </a:bodyPr>
-          <a:lstStyle/>
-          <a:p>
-            <a:pPr algn="l">
-              <a:lnSpc>
-                <a:spcPct val="100000"/>
-              </a:lnSpc>
-            </a:pPr>
-            <a:r>
-              <a:rPr sz="2200" b="1">
-                <a:solidFill>
-                  <a:srgbClr val="002333"/>
-                </a:solidFill>
-                <a:latin typeface="League Spartan"/>
-              </a:rPr>
-              <a:t>1.5–5 min</a:t>
-            </a:r>
-          </a:p>
-        </p:txBody>
-      </p:sp>
-      <p:sp>
-        <p:nvSpPr>
-          <p:cNvPr id="12" name="Rectangle 11"/>
-          <p:cNvSpPr/>
-          <p:nvPr/>
-        </p:nvSpPr>
-        <p:spPr>
-          <a:xfrm>
-            <a:off x="3556000" y="1943100"/>
-            <a:ext cx="6350" cy="1371600"/>
-          </a:xfrm>
-          <a:prstGeom prst="rect">
-            <a:avLst/>
-          </a:prstGeom>
-          <a:solidFill>
-            <a:srgbClr val="CDD9DE"/>
-          </a:solidFill>
-          <a:ln>
-            <a:noFill/>
-          </a:ln>
-          <a:effectLst/>
-        </p:spPr>
-        <p:style>
-          <a:lnRef idx="1">
-            <a:schemeClr val="accent1"/>
-          </a:lnRef>
-          <a:fillRef idx="3">
-            <a:schemeClr val="accent1"/>
-          </a:fillRef>
-          <a:effectRef idx="2">
-            <a:schemeClr val="accent1"/>
-          </a:effectRef>
-          <a:fontRef idx="minor">
-            <a:schemeClr val="lt1"/>
-          </a:fontRef>
-        </p:style>
-        <p:txBody>
-          <a:bodyPr rtlCol="0" anchor="ctr"/>
-          <a:lstStyle/>
-          <a:p>
-            <a:pPr algn="ctr"/>
-          </a:p>
-        </p:txBody>
-      </p:sp>
-      <p:sp>
-        <p:nvSpPr>
-          <p:cNvPr id="13" name="TextBox 12"/>
-          <p:cNvSpPr txBox="1"/>
-          <p:nvPr/>
-        </p:nvSpPr>
-        <p:spPr>
-          <a:xfrm>
-            <a:off x="3302000" y="3416300"/>
-            <a:ext cx="508000" cy="228600"/>
-          </a:xfrm>
-          <a:prstGeom prst="rect">
-            <a:avLst/>
-          </a:prstGeom>
-          <a:noFill/>
-        </p:spPr>
-        <p:txBody>
-          <a:bodyPr wrap="square" lIns="0" rIns="0" tIns="0" bIns="0">
-            <a:spAutoFit/>
-          </a:bodyPr>
-          <a:lstStyle/>
-          <a:p>
-            <a:pPr algn="r">
-              <a:lnSpc>
-                <a:spcPct val="120000"/>
-              </a:lnSpc>
-            </a:pPr>
-            <a:r>
-              <a:rPr sz="1200" b="0">
-                <a:solidFill>
-                  <a:srgbClr val="5B7480"/>
-                </a:solidFill>
-                <a:latin typeface="Inter"/>
-              </a:rPr>
-              <a:t>0</a:t>
-            </a:r>
-          </a:p>
-        </p:txBody>
-      </p:sp>
-      <p:sp>
-        <p:nvSpPr>
-          <p:cNvPr id="14" name="TextBox 13"/>
-          <p:cNvSpPr txBox="1"/>
-          <p:nvPr/>
-        </p:nvSpPr>
-        <p:spPr>
-          <a:xfrm>
-            <a:off x="8382000" y="3416300"/>
-            <a:ext cx="1270000" cy="228600"/>
-          </a:xfrm>
-          <a:prstGeom prst="rect">
-            <a:avLst/>
-          </a:prstGeom>
-          <a:noFill/>
-        </p:spPr>
-        <p:txBody>
-          <a:bodyPr wrap="square" lIns="0" rIns="0" tIns="0" bIns="0">
-            <a:spAutoFit/>
-          </a:bodyPr>
-          <a:lstStyle/>
-          <a:p>
-            <a:pPr algn="r">
-              <a:lnSpc>
-                <a:spcPct val="120000"/>
-              </a:lnSpc>
-            </a:pPr>
-            <a:r>
-              <a:rPr sz="1200" b="0">
-                <a:solidFill>
-                  <a:srgbClr val="5B7480"/>
-                </a:solidFill>
-                <a:latin typeface="Inter"/>
-              </a:rPr>
-              <a:t>30</a:t>
-            </a:r>
-          </a:p>
-        </p:txBody>
-      </p:sp>
-      <p:sp>
-        <p:nvSpPr>
-          <p:cNvPr id="15" name="TextBox 14"/>
-          <p:cNvSpPr txBox="1"/>
-          <p:nvPr/>
-        </p:nvSpPr>
-        <p:spPr>
-          <a:xfrm>
-            <a:off x="3556000" y="3416300"/>
-            <a:ext cx="6096000" cy="228600"/>
-          </a:xfrm>
-          <a:prstGeom prst="rect">
-            <a:avLst/>
-          </a:prstGeom>
-          <a:noFill/>
-        </p:spPr>
-        <p:txBody>
-          <a:bodyPr wrap="square" lIns="0" rIns="0" tIns="0" bIns="0">
-            <a:spAutoFit/>
-          </a:bodyPr>
-          <a:lstStyle/>
-          <a:p>
-            <a:pPr algn="ctr">
-              <a:lnSpc>
-                <a:spcPct val="120000"/>
-              </a:lnSpc>
-            </a:pPr>
-            <a:r>
-              <a:rPr sz="1200" b="0">
-                <a:solidFill>
-                  <a:srgbClr val="5B7480"/>
-                </a:solidFill>
-                <a:latin typeface="Inter"/>
-              </a:rPr>
-              <a:t>minutes per submission</a:t>
-            </a:r>
-          </a:p>
-        </p:txBody>
-      </p:sp>
-      <p:sp>
-        <p:nvSpPr>
-          <p:cNvPr id="16" name="Rounded Rectangle 15"/>
-          <p:cNvSpPr/>
-          <p:nvPr/>
-        </p:nvSpPr>
-        <p:spPr>
-          <a:xfrm>
-            <a:off x="762000" y="4191000"/>
-            <a:ext cx="10668000" cy="1447800"/>
+            <a:off x="2133600" y="6184900"/>
+            <a:ext cx="952046" cy="533400"/>
           </a:xfrm>
           <a:prstGeom prst="roundRect">
             <a:avLst>
-              <a:gd name="adj" fmla="val 8771"/>
-            </a:avLst>
-          </a:prstGeom>
-          <a:solidFill>
-            <a:srgbClr val="F3F7F8"/>
-          </a:solidFill>
-          <a:ln>
-            <a:noFill/>
-          </a:ln>
-          <a:effectLst/>
-        </p:spPr>
-        <p:style>
-          <a:lnRef idx="1">
-            <a:schemeClr val="accent1"/>
-          </a:lnRef>
-          <a:fillRef idx="3">
-            <a:schemeClr val="accent1"/>
-          </a:fillRef>
-          <a:effectRef idx="2">
-            <a:schemeClr val="accent1"/>
-          </a:effectRef>
-          <a:fontRef idx="minor">
-            <a:schemeClr val="lt1"/>
-          </a:fontRef>
-        </p:style>
-        <p:txBody>
-          <a:bodyPr rtlCol="0" anchor="ctr"/>
-          <a:lstStyle/>
-          <a:p>
-            <a:pPr algn="ctr"/>
-          </a:p>
-        </p:txBody>
-      </p:sp>
-      <p:sp>
-        <p:nvSpPr>
-          <p:cNvPr id="17" name="Rounded Rectangle 16"/>
-          <p:cNvSpPr/>
-          <p:nvPr/>
-        </p:nvSpPr>
-        <p:spPr>
-          <a:xfrm>
-            <a:off x="914400" y="4521200"/>
-            <a:ext cx="609600" cy="609600"/>
-          </a:xfrm>
-          <a:prstGeom prst="roundRect">
-            <a:avLst>
-              <a:gd name="adj" fmla="val 16666"/>
+              <a:gd name="adj" fmla="val 11904"/>
             </a:avLst>
           </a:prstGeom>
           <a:solidFill>
@@ -7224,199 +6798,7 @@
       </p:sp>
       <p:pic>
         <p:nvPicPr>
-          <p:cNvPr id="18" name="Picture 17" descr="icon-doel-greendeep.png"/>
-          <p:cNvPicPr>
-            <a:picLocks noChangeAspect="1"/>
-          </p:cNvPicPr>
-          <p:nvPr/>
-        </p:nvPicPr>
-        <p:blipFill>
-          <a:blip r:embed="rId2"/>
-          <a:stretch>
-            <a:fillRect/>
-          </a:stretch>
-        </p:blipFill>
-        <p:spPr>
-          <a:xfrm>
-            <a:off x="1066800" y="4673600"/>
-            <a:ext cx="304800" cy="304800"/>
-          </a:xfrm>
-          <a:prstGeom prst="rect">
-            <a:avLst/>
-          </a:prstGeom>
-        </p:spPr>
-      </p:pic>
-      <p:sp>
-        <p:nvSpPr>
-          <p:cNvPr id="19" name="TextBox 18"/>
-          <p:cNvSpPr txBox="1"/>
-          <p:nvPr/>
-        </p:nvSpPr>
-        <p:spPr>
-          <a:xfrm>
-            <a:off x="1676400" y="4483100"/>
-            <a:ext cx="2438400" cy="406400"/>
-          </a:xfrm>
-          <a:prstGeom prst="rect">
-            <a:avLst/>
-          </a:prstGeom>
-          <a:noFill/>
-        </p:spPr>
-        <p:txBody>
-          <a:bodyPr wrap="square" lIns="0" rIns="0" tIns="0" bIns="0">
-            <a:spAutoFit/>
-          </a:bodyPr>
-          <a:lstStyle/>
-          <a:p>
-            <a:pPr algn="l">
-              <a:lnSpc>
-                <a:spcPct val="100000"/>
-              </a:lnSpc>
-            </a:pPr>
-            <a:r>
-              <a:rPr sz="2200" b="1">
-                <a:solidFill>
-                  <a:srgbClr val="002333"/>
-                </a:solidFill>
-                <a:latin typeface="League Spartan"/>
-              </a:rPr>
-              <a:t>~94%</a:t>
-            </a:r>
-          </a:p>
-        </p:txBody>
-      </p:sp>
-      <p:sp>
-        <p:nvSpPr>
-          <p:cNvPr id="20" name="TextBox 19"/>
-          <p:cNvSpPr txBox="1"/>
-          <p:nvPr/>
-        </p:nvSpPr>
-        <p:spPr>
-          <a:xfrm>
-            <a:off x="1676400" y="4902200"/>
-            <a:ext cx="2438400" cy="571500"/>
-          </a:xfrm>
-          <a:prstGeom prst="rect">
-            <a:avLst/>
-          </a:prstGeom>
-          <a:noFill/>
-        </p:spPr>
-        <p:txBody>
-          <a:bodyPr wrap="square" lIns="0" rIns="0" tIns="0" bIns="0">
-            <a:spAutoFit/>
-          </a:bodyPr>
-          <a:lstStyle/>
-          <a:p>
-            <a:pPr algn="l">
-              <a:lnSpc>
-                <a:spcPct val="135000"/>
-              </a:lnSpc>
-            </a:pPr>
-            <a:r>
-              <a:rPr sz="1200" b="0">
-                <a:solidFill>
-                  <a:srgbClr val="5B7480"/>
-                </a:solidFill>
-                <a:latin typeface="Inter"/>
-              </a:rPr>
-              <a:t>AI grading accuracy</a:t>
-            </a:r>
-          </a:p>
-        </p:txBody>
-      </p:sp>
-      <p:sp>
-        <p:nvSpPr>
-          <p:cNvPr id="21" name="Rectangle 20"/>
-          <p:cNvSpPr/>
-          <p:nvPr/>
-        </p:nvSpPr>
-        <p:spPr>
-          <a:xfrm>
-            <a:off x="4267200" y="4445000"/>
-            <a:ext cx="6350" cy="939800"/>
-          </a:xfrm>
-          <a:prstGeom prst="rect">
-            <a:avLst/>
-          </a:prstGeom>
-          <a:solidFill>
-            <a:srgbClr val="CDD9DE"/>
-          </a:solidFill>
-          <a:ln>
-            <a:noFill/>
-          </a:ln>
-          <a:effectLst/>
-        </p:spPr>
-        <p:style>
-          <a:lnRef idx="1">
-            <a:schemeClr val="accent1"/>
-          </a:lnRef>
-          <a:fillRef idx="3">
-            <a:schemeClr val="accent1"/>
-          </a:fillRef>
-          <a:effectRef idx="2">
-            <a:schemeClr val="accent1"/>
-          </a:effectRef>
-          <a:fontRef idx="minor">
-            <a:schemeClr val="lt1"/>
-          </a:fontRef>
-        </p:style>
-        <p:txBody>
-          <a:bodyPr rtlCol="0" anchor="ctr"/>
-          <a:lstStyle/>
-          <a:p>
-            <a:pPr algn="ctr"/>
-          </a:p>
-        </p:txBody>
-      </p:sp>
-      <p:sp>
-        <p:nvSpPr>
-          <p:cNvPr id="22" name="Rounded Rectangle 21"/>
-          <p:cNvSpPr/>
-          <p:nvPr/>
-        </p:nvSpPr>
-        <p:spPr>
-          <a:xfrm>
-            <a:off x="4572000" y="4521200"/>
-            <a:ext cx="609600" cy="609600"/>
-          </a:xfrm>
-          <a:prstGeom prst="roundRect">
-            <a:avLst>
-              <a:gd name="adj" fmla="val 16666"/>
-            </a:avLst>
-          </a:prstGeom>
-          <a:solidFill>
-            <a:srgbClr val="FFFFFF"/>
-          </a:solidFill>
-          <a:ln>
-            <a:noFill/>
-          </a:ln>
-          <a:effectLst/>
-        </p:spPr>
-        <p:style>
-          <a:lnRef idx="1">
-            <a:schemeClr val="accent1"/>
-          </a:lnRef>
-          <a:fillRef idx="3">
-            <a:schemeClr val="accent1"/>
-          </a:fillRef>
-          <a:effectRef idx="2">
-            <a:schemeClr val="accent1"/>
-          </a:effectRef>
-          <a:fontRef idx="minor">
-            <a:schemeClr val="lt1"/>
-          </a:fontRef>
-        </p:style>
-        <p:txBody>
-          <a:bodyPr rtlCol="0" anchor="ctr"/>
-          <a:lstStyle/>
-          <a:p>
-            <a:pPr algn="ctr"/>
-          </a:p>
-        </p:txBody>
-      </p:sp>
-      <p:pic>
-        <p:nvPicPr>
-          <p:cNvPr id="23" name="Picture 22" descr="icon-bestand-greendeep.png"/>
+          <p:cNvPr id="8" name="Picture 7" descr="uti-logo.png"/>
           <p:cNvPicPr>
             <a:picLocks noChangeAspect="1"/>
           </p:cNvPicPr>
@@ -7430,8 +6812,8 @@
         </p:blipFill>
         <p:spPr>
           <a:xfrm>
-            <a:off x="4724400" y="4673600"/>
-            <a:ext cx="304800" cy="304800"/>
+            <a:off x="2222500" y="6273800"/>
+            <a:ext cx="774246" cy="355600"/>
           </a:xfrm>
           <a:prstGeom prst="rect">
             <a:avLst/>
@@ -7440,14 +6822,14 @@
       </p:pic>
       <p:sp>
         <p:nvSpPr>
-          <p:cNvPr id="24" name="TextBox 23"/>
+          <p:cNvPr id="9" name="TextBox 8"/>
           <p:cNvSpPr txBox="1"/>
           <p:nvPr/>
         </p:nvSpPr>
         <p:spPr>
           <a:xfrm>
-            <a:off x="5334000" y="4483100"/>
-            <a:ext cx="2438400" cy="406400"/>
+            <a:off x="10922000" y="6375400"/>
+            <a:ext cx="508000" cy="228600"/>
           </a:xfrm>
           <a:prstGeom prst="rect">
             <a:avLst/>
@@ -7460,492 +6842,15 @@
           </a:bodyPr>
           <a:lstStyle/>
           <a:p>
-            <a:pPr algn="l">
-              <a:lnSpc>
-                <a:spcPct val="100000"/>
-              </a:lnSpc>
-            </a:pPr>
-            <a:r>
-              <a:rPr sz="2200" b="1">
-                <a:solidFill>
-                  <a:srgbClr val="002333"/>
-                </a:solidFill>
-                <a:latin typeface="League Spartan"/>
-              </a:rPr>
-              <a:t>2,300+</a:t>
-            </a:r>
-          </a:p>
-        </p:txBody>
-      </p:sp>
-      <p:sp>
-        <p:nvSpPr>
-          <p:cNvPr id="25" name="TextBox 24"/>
-          <p:cNvSpPr txBox="1"/>
-          <p:nvPr/>
-        </p:nvSpPr>
-        <p:spPr>
-          <a:xfrm>
-            <a:off x="5334000" y="4902200"/>
-            <a:ext cx="2438400" cy="571500"/>
-          </a:xfrm>
-          <a:prstGeom prst="rect">
-            <a:avLst/>
-          </a:prstGeom>
-          <a:noFill/>
-        </p:spPr>
-        <p:txBody>
-          <a:bodyPr wrap="square" lIns="0" rIns="0" tIns="0" bIns="0">
-            <a:spAutoFit/>
-          </a:bodyPr>
-          <a:lstStyle/>
-          <a:p>
-            <a:pPr algn="l">
-              <a:lnSpc>
-                <a:spcPct val="135000"/>
+            <a:pPr algn="r">
+              <a:lnSpc>
+                <a:spcPct val="115000"/>
               </a:lnSpc>
             </a:pPr>
             <a:r>
               <a:rPr sz="1200" b="0">
                 <a:solidFill>
-                  <a:srgbClr val="5B7480"/>
-                </a:solidFill>
-                <a:latin typeface="Inter"/>
-              </a:rPr>
-              <a:t>feedback items across</a:t>
-            </a:r>
-          </a:p>
-          <a:p>
-            <a:pPr algn="l">
-              <a:lnSpc>
-                <a:spcPct val="135000"/>
-              </a:lnSpc>
-            </a:pPr>
-            <a:r>
-              <a:rPr sz="1200" b="0">
-                <a:solidFill>
-                  <a:srgbClr val="5B7480"/>
-                </a:solidFill>
-                <a:latin typeface="Inter"/>
-              </a:rPr>
-              <a:t>435 submissions</a:t>
-            </a:r>
-          </a:p>
-        </p:txBody>
-      </p:sp>
-      <p:sp>
-        <p:nvSpPr>
-          <p:cNvPr id="26" name="Rectangle 25"/>
-          <p:cNvSpPr/>
-          <p:nvPr/>
-        </p:nvSpPr>
-        <p:spPr>
-          <a:xfrm>
-            <a:off x="7924800" y="4445000"/>
-            <a:ext cx="6350" cy="939800"/>
-          </a:xfrm>
-          <a:prstGeom prst="rect">
-            <a:avLst/>
-          </a:prstGeom>
-          <a:solidFill>
-            <a:srgbClr val="CDD9DE"/>
-          </a:solidFill>
-          <a:ln>
-            <a:noFill/>
-          </a:ln>
-          <a:effectLst/>
-        </p:spPr>
-        <p:style>
-          <a:lnRef idx="1">
-            <a:schemeClr val="accent1"/>
-          </a:lnRef>
-          <a:fillRef idx="3">
-            <a:schemeClr val="accent1"/>
-          </a:fillRef>
-          <a:effectRef idx="2">
-            <a:schemeClr val="accent1"/>
-          </a:effectRef>
-          <a:fontRef idx="minor">
-            <a:schemeClr val="lt1"/>
-          </a:fontRef>
-        </p:style>
-        <p:txBody>
-          <a:bodyPr rtlCol="0" anchor="ctr"/>
-          <a:lstStyle/>
-          <a:p>
-            <a:pPr algn="ctr"/>
-          </a:p>
-        </p:txBody>
-      </p:sp>
-      <p:sp>
-        <p:nvSpPr>
-          <p:cNvPr id="27" name="Rounded Rectangle 26"/>
-          <p:cNvSpPr/>
-          <p:nvPr/>
-        </p:nvSpPr>
-        <p:spPr>
-          <a:xfrm>
-            <a:off x="8229600" y="4521200"/>
-            <a:ext cx="609600" cy="609600"/>
-          </a:xfrm>
-          <a:prstGeom prst="roundRect">
-            <a:avLst>
-              <a:gd name="adj" fmla="val 16666"/>
-            </a:avLst>
-          </a:prstGeom>
-          <a:solidFill>
-            <a:srgbClr val="FFFFFF"/>
-          </a:solidFill>
-          <a:ln>
-            <a:noFill/>
-          </a:ln>
-          <a:effectLst/>
-        </p:spPr>
-        <p:style>
-          <a:lnRef idx="1">
-            <a:schemeClr val="accent1"/>
-          </a:lnRef>
-          <a:fillRef idx="3">
-            <a:schemeClr val="accent1"/>
-          </a:fillRef>
-          <a:effectRef idx="2">
-            <a:schemeClr val="accent1"/>
-          </a:effectRef>
-          <a:fontRef idx="minor">
-            <a:schemeClr val="lt1"/>
-          </a:fontRef>
-        </p:style>
-        <p:txBody>
-          <a:bodyPr rtlCol="0" anchor="ctr"/>
-          <a:lstStyle/>
-          <a:p>
-            <a:pPr algn="ctr"/>
-          </a:p>
-        </p:txBody>
-      </p:sp>
-      <p:pic>
-        <p:nvPicPr>
-          <p:cNvPr id="28" name="Picture 27" descr="icon-klok-greendeep.png"/>
-          <p:cNvPicPr>
-            <a:picLocks noChangeAspect="1"/>
-          </p:cNvPicPr>
-          <p:nvPr/>
-        </p:nvPicPr>
-        <p:blipFill>
-          <a:blip r:embed="rId4"/>
-          <a:stretch>
-            <a:fillRect/>
-          </a:stretch>
-        </p:blipFill>
-        <p:spPr>
-          <a:xfrm>
-            <a:off x="8382000" y="4673600"/>
-            <a:ext cx="304800" cy="304800"/>
-          </a:xfrm>
-          <a:prstGeom prst="rect">
-            <a:avLst/>
-          </a:prstGeom>
-        </p:spPr>
-      </p:pic>
-      <p:sp>
-        <p:nvSpPr>
-          <p:cNvPr id="29" name="TextBox 28"/>
-          <p:cNvSpPr txBox="1"/>
-          <p:nvPr/>
-        </p:nvSpPr>
-        <p:spPr>
-          <a:xfrm>
-            <a:off x="8991600" y="4483100"/>
-            <a:ext cx="2438400" cy="406400"/>
-          </a:xfrm>
-          <a:prstGeom prst="rect">
-            <a:avLst/>
-          </a:prstGeom>
-          <a:noFill/>
-        </p:spPr>
-        <p:txBody>
-          <a:bodyPr wrap="square" lIns="0" rIns="0" tIns="0" bIns="0">
-            <a:spAutoFit/>
-          </a:bodyPr>
-          <a:lstStyle/>
-          <a:p>
-            <a:pPr algn="l">
-              <a:lnSpc>
-                <a:spcPct val="100000"/>
-              </a:lnSpc>
-            </a:pPr>
-            <a:r>
-              <a:rPr sz="2200" b="1">
-                <a:solidFill>
-                  <a:srgbClr val="002333"/>
-                </a:solidFill>
-                <a:latin typeface="League Spartan"/>
-              </a:rPr>
-              <a:t>15–20 hrs</a:t>
-            </a:r>
-          </a:p>
-        </p:txBody>
-      </p:sp>
-      <p:sp>
-        <p:nvSpPr>
-          <p:cNvPr id="30" name="TextBox 29"/>
-          <p:cNvSpPr txBox="1"/>
-          <p:nvPr/>
-        </p:nvSpPr>
-        <p:spPr>
-          <a:xfrm>
-            <a:off x="8991600" y="4902200"/>
-            <a:ext cx="2438400" cy="571500"/>
-          </a:xfrm>
-          <a:prstGeom prst="rect">
-            <a:avLst/>
-          </a:prstGeom>
-          <a:noFill/>
-        </p:spPr>
-        <p:txBody>
-          <a:bodyPr wrap="square" lIns="0" rIns="0" tIns="0" bIns="0">
-            <a:spAutoFit/>
-          </a:bodyPr>
-          <a:lstStyle/>
-          <a:p>
-            <a:pPr algn="l">
-              <a:lnSpc>
-                <a:spcPct val="135000"/>
-              </a:lnSpc>
-            </a:pPr>
-            <a:r>
-              <a:rPr sz="1200" b="0">
-                <a:solidFill>
-                  <a:srgbClr val="5B7480"/>
-                </a:solidFill>
-                <a:latin typeface="Inter"/>
-              </a:rPr>
-              <a:t>saved per 60-student cohort,</a:t>
-            </a:r>
-          </a:p>
-          <a:p>
-            <a:pPr algn="l">
-              <a:lnSpc>
-                <a:spcPct val="135000"/>
-              </a:lnSpc>
-            </a:pPr>
-            <a:r>
-              <a:rPr sz="1200" b="0">
-                <a:solidFill>
-                  <a:srgbClr val="5B7480"/>
-                </a:solidFill>
-                <a:latin typeface="Inter"/>
-              </a:rPr>
-              <a:t>every cycle</a:t>
-            </a:r>
-          </a:p>
-        </p:txBody>
-      </p:sp>
-      <p:sp>
-        <p:nvSpPr>
-          <p:cNvPr id="31" name="Rectangle 30"/>
-          <p:cNvSpPr/>
-          <p:nvPr/>
-        </p:nvSpPr>
-        <p:spPr>
-          <a:xfrm>
-            <a:off x="762000" y="6045200"/>
-            <a:ext cx="10668000" cy="6350"/>
-          </a:xfrm>
-          <a:prstGeom prst="rect">
-            <a:avLst/>
-          </a:prstGeom>
-          <a:solidFill>
-            <a:srgbClr val="E7EEF0"/>
-          </a:solidFill>
-          <a:ln>
-            <a:noFill/>
-          </a:ln>
-          <a:effectLst/>
-        </p:spPr>
-        <p:style>
-          <a:lnRef idx="1">
-            <a:schemeClr val="accent1"/>
-          </a:lnRef>
-          <a:fillRef idx="3">
-            <a:schemeClr val="accent1"/>
-          </a:fillRef>
-          <a:effectRef idx="2">
-            <a:schemeClr val="accent1"/>
-          </a:effectRef>
-          <a:fontRef idx="minor">
-            <a:schemeClr val="lt1"/>
-          </a:fontRef>
-        </p:style>
-        <p:txBody>
-          <a:bodyPr rtlCol="0" anchor="ctr"/>
-          <a:lstStyle/>
-          <a:p>
-            <a:pPr algn="ctr"/>
-          </a:p>
-        </p:txBody>
-      </p:sp>
-      <p:pic>
-        <p:nvPicPr>
-          <p:cNvPr id="32" name="Picture 31" descr="logo_navy.png"/>
-          <p:cNvPicPr>
-            <a:picLocks noChangeAspect="1"/>
-          </p:cNvPicPr>
-          <p:nvPr/>
-        </p:nvPicPr>
-        <p:blipFill>
-          <a:blip r:embed="rId5"/>
-          <a:stretch>
-            <a:fillRect/>
-          </a:stretch>
-        </p:blipFill>
-        <p:spPr>
-          <a:xfrm>
-            <a:off x="762000" y="6324600"/>
-            <a:ext cx="937957" cy="254000"/>
-          </a:xfrm>
-          <a:prstGeom prst="rect">
-            <a:avLst/>
-          </a:prstGeom>
-        </p:spPr>
-      </p:pic>
-      <p:sp>
-        <p:nvSpPr>
-          <p:cNvPr id="33" name="Rectangle 32"/>
-          <p:cNvSpPr/>
-          <p:nvPr/>
-        </p:nvSpPr>
-        <p:spPr>
-          <a:xfrm>
-            <a:off x="1968500" y="6311900"/>
-            <a:ext cx="6350" cy="279400"/>
-          </a:xfrm>
-          <a:prstGeom prst="rect">
-            <a:avLst/>
-          </a:prstGeom>
-          <a:solidFill>
-            <a:srgbClr val="CDD9DE"/>
-          </a:solidFill>
-          <a:ln>
-            <a:noFill/>
-          </a:ln>
-          <a:effectLst/>
-        </p:spPr>
-        <p:style>
-          <a:lnRef idx="1">
-            <a:schemeClr val="accent1"/>
-          </a:lnRef>
-          <a:fillRef idx="3">
-            <a:schemeClr val="accent1"/>
-          </a:fillRef>
-          <a:effectRef idx="2">
-            <a:schemeClr val="accent1"/>
-          </a:effectRef>
-          <a:fontRef idx="minor">
-            <a:schemeClr val="lt1"/>
-          </a:fontRef>
-        </p:style>
-        <p:txBody>
-          <a:bodyPr rtlCol="0" anchor="ctr"/>
-          <a:lstStyle/>
-          <a:p>
-            <a:pPr algn="ctr"/>
-          </a:p>
-        </p:txBody>
-      </p:sp>
-      <p:pic>
-        <p:nvPicPr>
-          <p:cNvPr id="34" name="Picture 33" descr="uti-logo.png"/>
-          <p:cNvPicPr>
-            <a:picLocks noChangeAspect="1"/>
-          </p:cNvPicPr>
-          <p:nvPr/>
-        </p:nvPicPr>
-        <p:blipFill>
-          <a:blip r:embed="rId6"/>
-          <a:stretch>
-            <a:fillRect/>
-          </a:stretch>
-        </p:blipFill>
-        <p:spPr>
-          <a:xfrm>
-            <a:off x="2222500" y="6273800"/>
-            <a:ext cx="774246" cy="355600"/>
-          </a:xfrm>
-          <a:prstGeom prst="rect">
-            <a:avLst/>
-          </a:prstGeom>
-        </p:spPr>
-      </p:pic>
-      <p:sp>
-        <p:nvSpPr>
-          <p:cNvPr id="35" name="TextBox 34"/>
-          <p:cNvSpPr txBox="1"/>
-          <p:nvPr/>
-        </p:nvSpPr>
-        <p:spPr>
-          <a:xfrm>
-            <a:off x="5715000" y="6375400"/>
-            <a:ext cx="5080000" cy="243840"/>
-          </a:xfrm>
-          <a:prstGeom prst="rect">
-            <a:avLst/>
-          </a:prstGeom>
-          <a:noFill/>
-        </p:spPr>
-        <p:txBody>
-          <a:bodyPr wrap="square" lIns="0" rIns="0" tIns="0" bIns="0">
-            <a:spAutoFit/>
-          </a:bodyPr>
-          <a:lstStyle/>
-          <a:p>
-            <a:pPr algn="r">
-              <a:lnSpc>
-                <a:spcPct val="135000"/>
-              </a:lnSpc>
-            </a:pPr>
-            <a:r>
-              <a:rPr sz="1200" b="0">
-                <a:solidFill>
-                  <a:srgbClr val="5B7480"/>
-                </a:solidFill>
-                <a:latin typeface="Inter"/>
-              </a:rPr>
-              <a:t>Source: Bath Spa University · Eduface pilot data.</a:t>
-            </a:r>
-          </a:p>
-        </p:txBody>
-      </p:sp>
-      <p:sp>
-        <p:nvSpPr>
-          <p:cNvPr id="36" name="TextBox 35"/>
-          <p:cNvSpPr txBox="1"/>
-          <p:nvPr/>
-        </p:nvSpPr>
-        <p:spPr>
-          <a:xfrm>
-            <a:off x="10922000" y="6375400"/>
-            <a:ext cx="508000" cy="228600"/>
-          </a:xfrm>
-          <a:prstGeom prst="rect">
-            <a:avLst/>
-          </a:prstGeom>
-          <a:noFill/>
-        </p:spPr>
-        <p:txBody>
-          <a:bodyPr wrap="square" lIns="0" rIns="0" tIns="0" bIns="0">
-            <a:spAutoFit/>
-          </a:bodyPr>
-          <a:lstStyle/>
-          <a:p>
-            <a:pPr algn="r">
-              <a:lnSpc>
-                <a:spcPct val="115000"/>
-              </a:lnSpc>
-            </a:pPr>
-            <a:r>
-              <a:rPr sz="1200" b="0">
-                <a:solidFill>
-                  <a:srgbClr val="5B7480"/>
+                  <a:srgbClr val="9EABB1"/>
                 </a:solidFill>
                 <a:latin typeface="Inter"/>
               </a:rPr>
@@ -8025,7 +6930,7 @@
         <p:spPr>
           <a:xfrm>
             <a:off x="762000" y="558800"/>
-            <a:ext cx="10668000" cy="627380"/>
+            <a:ext cx="10668000" cy="1061720"/>
           </a:xfrm>
           <a:prstGeom prst="rect">
             <a:avLst/>
@@ -8050,7 +6955,7 @@
                 </a:solidFill>
                 <a:latin typeface="League Spartan"/>
               </a:rPr>
-              <a:t>Institution-wide feedback, priced per student</a:t>
+              <a:t>Marking Time Drops 6–10x at Bath Spa University</a:t>
             </a:r>
           </a:p>
         </p:txBody>
@@ -8063,8 +6968,8 @@
         </p:nvSpPr>
         <p:spPr>
           <a:xfrm>
-            <a:off x="762000" y="1270000"/>
-            <a:ext cx="10668000" cy="304800"/>
+            <a:off x="762000" y="2095500"/>
+            <a:ext cx="2540000" cy="304800"/>
           </a:xfrm>
           <a:prstGeom prst="rect">
             <a:avLst/>
@@ -8077,41 +6982,39 @@
           </a:bodyPr>
           <a:lstStyle/>
           <a:p>
-            <a:pPr algn="l">
-              <a:lnSpc>
-                <a:spcPct val="130000"/>
+            <a:pPr algn="r">
+              <a:lnSpc>
+                <a:spcPct val="120000"/>
               </a:lnSpc>
             </a:pPr>
             <a:r>
               <a:rPr sz="1600" b="0">
                 <a:solidFill>
-                  <a:srgbClr val="5B7480"/>
+                  <a:srgbClr val="2C4A57"/>
                 </a:solidFill>
                 <a:latin typeface="Inter"/>
               </a:rPr>
-              <a:t>Delivered by Eduface, mapped to what UTI needs.</a:t>
-            </a:r>
-          </a:p>
-        </p:txBody>
-      </p:sp>
-      <p:sp>
-        <p:nvSpPr>
-          <p:cNvPr id="5" name="Rounded Rectangle 4"/>
+              <a:t>Traditional marking</a:t>
+            </a:r>
+          </a:p>
+        </p:txBody>
+      </p:sp>
+      <p:sp>
+        <p:nvSpPr>
+          <p:cNvPr id="5" name="Rectangle 4"/>
           <p:cNvSpPr/>
           <p:nvPr/>
         </p:nvSpPr>
         <p:spPr>
           <a:xfrm>
-            <a:off x="762000" y="1905000"/>
-            <a:ext cx="10668000" cy="2260600"/>
-          </a:xfrm>
-          <a:prstGeom prst="roundRect">
-            <a:avLst>
-              <a:gd name="adj" fmla="val 6741"/>
-            </a:avLst>
+            <a:off x="3556000" y="1943100"/>
+            <a:ext cx="6096000" cy="558800"/>
+          </a:xfrm>
+          <a:prstGeom prst="rect">
+            <a:avLst/>
           </a:prstGeom>
           <a:solidFill>
-            <a:srgbClr val="002333"/>
+            <a:srgbClr val="F3F7F8"/>
           </a:solidFill>
           <a:ln>
             <a:noFill/>
@@ -8142,153 +7045,20 @@
       </p:sp>
       <p:sp>
         <p:nvSpPr>
-          <p:cNvPr id="6" name="TextBox 5"/>
-          <p:cNvSpPr txBox="1"/>
-          <p:nvPr/>
-        </p:nvSpPr>
-        <p:spPr>
-          <a:xfrm>
-            <a:off x="1219200" y="2362200"/>
-            <a:ext cx="1905000" cy="1333500"/>
-          </a:xfrm>
-          <a:prstGeom prst="rect">
-            <a:avLst/>
-          </a:prstGeom>
-          <a:noFill/>
-        </p:spPr>
-        <p:txBody>
-          <a:bodyPr wrap="square" lIns="0" rIns="0" tIns="0" bIns="0">
-            <a:spAutoFit/>
-          </a:bodyPr>
-          <a:lstStyle/>
-          <a:p>
-            <a:pPr algn="l">
-              <a:lnSpc>
-                <a:spcPct val="90000"/>
-              </a:lnSpc>
-            </a:pPr>
-            <a:r>
-              <a:rPr sz="9000" b="1">
-                <a:solidFill>
-                  <a:srgbClr val="FFFFFF"/>
-                </a:solidFill>
-                <a:latin typeface="League Spartan"/>
-              </a:rPr>
-              <a:t>$3</a:t>
-            </a:r>
-          </a:p>
-        </p:txBody>
-      </p:sp>
-      <p:sp>
-        <p:nvSpPr>
-          <p:cNvPr id="7" name="TextBox 6"/>
-          <p:cNvSpPr txBox="1"/>
-          <p:nvPr/>
-        </p:nvSpPr>
-        <p:spPr>
-          <a:xfrm>
-            <a:off x="2717800" y="2540000"/>
-            <a:ext cx="2667000" cy="711200"/>
-          </a:xfrm>
-          <a:prstGeom prst="rect">
-            <a:avLst/>
-          </a:prstGeom>
-          <a:noFill/>
-        </p:spPr>
-        <p:txBody>
-          <a:bodyPr wrap="square" lIns="0" rIns="0" tIns="0" bIns="0">
-            <a:spAutoFit/>
-          </a:bodyPr>
-          <a:lstStyle/>
-          <a:p>
-            <a:pPr algn="l">
-              <a:lnSpc>
-                <a:spcPct val="115000"/>
-              </a:lnSpc>
-            </a:pPr>
-            <a:r>
-              <a:rPr sz="2200" b="1">
-                <a:solidFill>
-                  <a:srgbClr val="FFFFFF"/>
-                </a:solidFill>
-                <a:latin typeface="League Spartan"/>
-              </a:rPr>
-              <a:t>per student,</a:t>
-            </a:r>
-          </a:p>
-          <a:p>
-            <a:pPr algn="l">
-              <a:lnSpc>
-                <a:spcPct val="115000"/>
-              </a:lnSpc>
-            </a:pPr>
-            <a:r>
-              <a:rPr sz="2200" b="1">
-                <a:solidFill>
-                  <a:srgbClr val="FFFFFF"/>
-                </a:solidFill>
-                <a:latin typeface="League Spartan"/>
-              </a:rPr>
-              <a:t>per month</a:t>
-            </a:r>
-          </a:p>
-        </p:txBody>
-      </p:sp>
-      <p:sp>
-        <p:nvSpPr>
-          <p:cNvPr id="8" name="TextBox 7"/>
-          <p:cNvSpPr txBox="1"/>
-          <p:nvPr/>
-        </p:nvSpPr>
-        <p:spPr>
-          <a:xfrm>
-            <a:off x="1219200" y="3429000"/>
-            <a:ext cx="3302000" cy="279400"/>
-          </a:xfrm>
-          <a:prstGeom prst="rect">
-            <a:avLst/>
-          </a:prstGeom>
-          <a:noFill/>
-        </p:spPr>
-        <p:txBody>
-          <a:bodyPr wrap="square" lIns="0" rIns="0" tIns="0" bIns="0">
-            <a:spAutoFit/>
-          </a:bodyPr>
-          <a:lstStyle/>
-          <a:p>
-            <a:pPr algn="l">
-              <a:lnSpc>
-                <a:spcPct val="120000"/>
-              </a:lnSpc>
-            </a:pPr>
-            <a:r>
-              <a:rPr sz="1600" b="0">
-                <a:solidFill>
-                  <a:srgbClr val="9EABB1"/>
-                </a:solidFill>
-                <a:latin typeface="Inter"/>
-              </a:rPr>
-              <a:t>billed annually</a:t>
-            </a:r>
-          </a:p>
-        </p:txBody>
-      </p:sp>
-      <p:sp>
-        <p:nvSpPr>
-          <p:cNvPr id="9" name="Rectangle 8"/>
+          <p:cNvPr id="6" name="Rectangle 5"/>
           <p:cNvSpPr/>
           <p:nvPr/>
         </p:nvSpPr>
         <p:spPr>
           <a:xfrm>
-            <a:off x="5715000" y="2159000"/>
-            <a:ext cx="6350" cy="1752600"/>
+            <a:off x="6604000" y="1943100"/>
+            <a:ext cx="3048000" cy="558800"/>
           </a:xfrm>
           <a:prstGeom prst="rect">
             <a:avLst/>
           </a:prstGeom>
           <a:solidFill>
-            <a:srgbClr val="1F3D4B"/>
+            <a:srgbClr val="CDD9DE"/>
           </a:solidFill>
           <a:ln>
             <a:noFill/>
@@ -8319,22 +7089,98 @@
       </p:sp>
       <p:sp>
         <p:nvSpPr>
-          <p:cNvPr id="10" name="Rounded Rectangle 9"/>
+          <p:cNvPr id="7" name="TextBox 6"/>
+          <p:cNvSpPr txBox="1"/>
+          <p:nvPr/>
+        </p:nvSpPr>
+        <p:spPr>
+          <a:xfrm>
+            <a:off x="9906000" y="2070100"/>
+            <a:ext cx="1524000" cy="355600"/>
+          </a:xfrm>
+          <a:prstGeom prst="rect">
+            <a:avLst/>
+          </a:prstGeom>
+          <a:noFill/>
+        </p:spPr>
+        <p:txBody>
+          <a:bodyPr wrap="square" lIns="0" rIns="0" tIns="0" bIns="0">
+            <a:spAutoFit/>
+          </a:bodyPr>
+          <a:lstStyle/>
+          <a:p>
+            <a:pPr algn="l">
+              <a:lnSpc>
+                <a:spcPct val="100000"/>
+              </a:lnSpc>
+            </a:pPr>
+            <a:r>
+              <a:rPr sz="2200" b="1">
+                <a:solidFill>
+                  <a:srgbClr val="002333"/>
+                </a:solidFill>
+                <a:latin typeface="League Spartan"/>
+              </a:rPr>
+              <a:t>15–30 min</a:t>
+            </a:r>
+          </a:p>
+        </p:txBody>
+      </p:sp>
+      <p:sp>
+        <p:nvSpPr>
+          <p:cNvPr id="8" name="TextBox 7"/>
+          <p:cNvSpPr txBox="1"/>
+          <p:nvPr/>
+        </p:nvSpPr>
+        <p:spPr>
+          <a:xfrm>
+            <a:off x="762000" y="2908300"/>
+            <a:ext cx="2540000" cy="304800"/>
+          </a:xfrm>
+          <a:prstGeom prst="rect">
+            <a:avLst/>
+          </a:prstGeom>
+          <a:noFill/>
+        </p:spPr>
+        <p:txBody>
+          <a:bodyPr wrap="square" lIns="0" rIns="0" tIns="0" bIns="0">
+            <a:spAutoFit/>
+          </a:bodyPr>
+          <a:lstStyle/>
+          <a:p>
+            <a:pPr algn="r">
+              <a:lnSpc>
+                <a:spcPct val="120000"/>
+              </a:lnSpc>
+            </a:pPr>
+            <a:r>
+              <a:rPr sz="1600" b="0">
+                <a:solidFill>
+                  <a:srgbClr val="002333"/>
+                </a:solidFill>
+                <a:latin typeface="Inter"/>
+              </a:rPr>
+              <a:t>With Eduface</a:t>
+            </a:r>
+          </a:p>
+        </p:txBody>
+      </p:sp>
+      <p:sp>
+        <p:nvSpPr>
+          <p:cNvPr id="9" name="Rectangle 8"/>
           <p:cNvSpPr/>
           <p:nvPr/>
         </p:nvSpPr>
         <p:spPr>
           <a:xfrm>
-            <a:off x="6121400" y="2552700"/>
-            <a:ext cx="355600" cy="355600"/>
-          </a:xfrm>
-          <a:prstGeom prst="roundRect">
-            <a:avLst>
-              <a:gd name="adj" fmla="val 25000"/>
-            </a:avLst>
+            <a:off x="3556000" y="2755900"/>
+            <a:ext cx="6096000" cy="558800"/>
+          </a:xfrm>
+          <a:prstGeom prst="rect">
+            <a:avLst/>
           </a:prstGeom>
           <a:solidFill>
-            <a:srgbClr val="0A2C3B"/>
+            <a:srgbClr val="F3F7F8"/>
           </a:solidFill>
           <a:ln>
             <a:noFill/>
@@ -8363,9 +7209,345 @@
           </a:p>
         </p:txBody>
       </p:sp>
+      <p:sp>
+        <p:nvSpPr>
+          <p:cNvPr id="10" name="Rectangle 9"/>
+          <p:cNvSpPr/>
+          <p:nvPr/>
+        </p:nvSpPr>
+        <p:spPr>
+          <a:xfrm>
+            <a:off x="3860800" y="2755900"/>
+            <a:ext cx="711200" cy="558800"/>
+          </a:xfrm>
+          <a:prstGeom prst="rect">
+            <a:avLst/>
+          </a:prstGeom>
+          <a:solidFill>
+            <a:srgbClr val="00E075"/>
+          </a:solidFill>
+          <a:ln>
+            <a:noFill/>
+          </a:ln>
+          <a:effectLst/>
+        </p:spPr>
+        <p:style>
+          <a:lnRef idx="1">
+            <a:schemeClr val="accent1"/>
+          </a:lnRef>
+          <a:fillRef idx="3">
+            <a:schemeClr val="accent1"/>
+          </a:fillRef>
+          <a:effectRef idx="2">
+            <a:schemeClr val="accent1"/>
+          </a:effectRef>
+          <a:fontRef idx="minor">
+            <a:schemeClr val="lt1"/>
+          </a:fontRef>
+        </p:style>
+        <p:txBody>
+          <a:bodyPr rtlCol="0" anchor="ctr"/>
+          <a:lstStyle/>
+          <a:p>
+            <a:pPr algn="ctr"/>
+          </a:p>
+        </p:txBody>
+      </p:sp>
+      <p:sp>
+        <p:nvSpPr>
+          <p:cNvPr id="11" name="TextBox 10"/>
+          <p:cNvSpPr txBox="1"/>
+          <p:nvPr/>
+        </p:nvSpPr>
+        <p:spPr>
+          <a:xfrm>
+            <a:off x="9906000" y="2882900"/>
+            <a:ext cx="1524000" cy="355600"/>
+          </a:xfrm>
+          <a:prstGeom prst="rect">
+            <a:avLst/>
+          </a:prstGeom>
+          <a:noFill/>
+        </p:spPr>
+        <p:txBody>
+          <a:bodyPr wrap="square" lIns="0" rIns="0" tIns="0" bIns="0">
+            <a:spAutoFit/>
+          </a:bodyPr>
+          <a:lstStyle/>
+          <a:p>
+            <a:pPr algn="l">
+              <a:lnSpc>
+                <a:spcPct val="100000"/>
+              </a:lnSpc>
+            </a:pPr>
+            <a:r>
+              <a:rPr sz="2200" b="1">
+                <a:solidFill>
+                  <a:srgbClr val="002333"/>
+                </a:solidFill>
+                <a:latin typeface="League Spartan"/>
+              </a:rPr>
+              <a:t>1.5–5 min</a:t>
+            </a:r>
+          </a:p>
+        </p:txBody>
+      </p:sp>
+      <p:sp>
+        <p:nvSpPr>
+          <p:cNvPr id="12" name="Rectangle 11"/>
+          <p:cNvSpPr/>
+          <p:nvPr/>
+        </p:nvSpPr>
+        <p:spPr>
+          <a:xfrm>
+            <a:off x="3556000" y="1943100"/>
+            <a:ext cx="6350" cy="1371600"/>
+          </a:xfrm>
+          <a:prstGeom prst="rect">
+            <a:avLst/>
+          </a:prstGeom>
+          <a:solidFill>
+            <a:srgbClr val="CDD9DE"/>
+          </a:solidFill>
+          <a:ln>
+            <a:noFill/>
+          </a:ln>
+          <a:effectLst/>
+        </p:spPr>
+        <p:style>
+          <a:lnRef idx="1">
+            <a:schemeClr val="accent1"/>
+          </a:lnRef>
+          <a:fillRef idx="3">
+            <a:schemeClr val="accent1"/>
+          </a:fillRef>
+          <a:effectRef idx="2">
+            <a:schemeClr val="accent1"/>
+          </a:effectRef>
+          <a:fontRef idx="minor">
+            <a:schemeClr val="lt1"/>
+          </a:fontRef>
+        </p:style>
+        <p:txBody>
+          <a:bodyPr rtlCol="0" anchor="ctr"/>
+          <a:lstStyle/>
+          <a:p>
+            <a:pPr algn="ctr"/>
+          </a:p>
+        </p:txBody>
+      </p:sp>
+      <p:sp>
+        <p:nvSpPr>
+          <p:cNvPr id="13" name="TextBox 12"/>
+          <p:cNvSpPr txBox="1"/>
+          <p:nvPr/>
+        </p:nvSpPr>
+        <p:spPr>
+          <a:xfrm>
+            <a:off x="3302000" y="3416300"/>
+            <a:ext cx="508000" cy="228600"/>
+          </a:xfrm>
+          <a:prstGeom prst="rect">
+            <a:avLst/>
+          </a:prstGeom>
+          <a:noFill/>
+        </p:spPr>
+        <p:txBody>
+          <a:bodyPr wrap="square" lIns="0" rIns="0" tIns="0" bIns="0">
+            <a:spAutoFit/>
+          </a:bodyPr>
+          <a:lstStyle/>
+          <a:p>
+            <a:pPr algn="r">
+              <a:lnSpc>
+                <a:spcPct val="120000"/>
+              </a:lnSpc>
+            </a:pPr>
+            <a:r>
+              <a:rPr sz="1200" b="0">
+                <a:solidFill>
+                  <a:srgbClr val="5B7480"/>
+                </a:solidFill>
+                <a:latin typeface="Inter"/>
+              </a:rPr>
+              <a:t>0</a:t>
+            </a:r>
+          </a:p>
+        </p:txBody>
+      </p:sp>
+      <p:sp>
+        <p:nvSpPr>
+          <p:cNvPr id="14" name="TextBox 13"/>
+          <p:cNvSpPr txBox="1"/>
+          <p:nvPr/>
+        </p:nvSpPr>
+        <p:spPr>
+          <a:xfrm>
+            <a:off x="8382000" y="3416300"/>
+            <a:ext cx="1270000" cy="228600"/>
+          </a:xfrm>
+          <a:prstGeom prst="rect">
+            <a:avLst/>
+          </a:prstGeom>
+          <a:noFill/>
+        </p:spPr>
+        <p:txBody>
+          <a:bodyPr wrap="square" lIns="0" rIns="0" tIns="0" bIns="0">
+            <a:spAutoFit/>
+          </a:bodyPr>
+          <a:lstStyle/>
+          <a:p>
+            <a:pPr algn="r">
+              <a:lnSpc>
+                <a:spcPct val="120000"/>
+              </a:lnSpc>
+            </a:pPr>
+            <a:r>
+              <a:rPr sz="1200" b="0">
+                <a:solidFill>
+                  <a:srgbClr val="5B7480"/>
+                </a:solidFill>
+                <a:latin typeface="Inter"/>
+              </a:rPr>
+              <a:t>30</a:t>
+            </a:r>
+          </a:p>
+        </p:txBody>
+      </p:sp>
+      <p:sp>
+        <p:nvSpPr>
+          <p:cNvPr id="15" name="TextBox 14"/>
+          <p:cNvSpPr txBox="1"/>
+          <p:nvPr/>
+        </p:nvSpPr>
+        <p:spPr>
+          <a:xfrm>
+            <a:off x="3556000" y="3416300"/>
+            <a:ext cx="6096000" cy="228600"/>
+          </a:xfrm>
+          <a:prstGeom prst="rect">
+            <a:avLst/>
+          </a:prstGeom>
+          <a:noFill/>
+        </p:spPr>
+        <p:txBody>
+          <a:bodyPr wrap="square" lIns="0" rIns="0" tIns="0" bIns="0">
+            <a:spAutoFit/>
+          </a:bodyPr>
+          <a:lstStyle/>
+          <a:p>
+            <a:pPr algn="ctr">
+              <a:lnSpc>
+                <a:spcPct val="120000"/>
+              </a:lnSpc>
+            </a:pPr>
+            <a:r>
+              <a:rPr sz="1200" b="0">
+                <a:solidFill>
+                  <a:srgbClr val="5B7480"/>
+                </a:solidFill>
+                <a:latin typeface="Inter"/>
+              </a:rPr>
+              <a:t>minutes per submission</a:t>
+            </a:r>
+          </a:p>
+        </p:txBody>
+      </p:sp>
+      <p:sp>
+        <p:nvSpPr>
+          <p:cNvPr id="16" name="Rounded Rectangle 15"/>
+          <p:cNvSpPr/>
+          <p:nvPr/>
+        </p:nvSpPr>
+        <p:spPr>
+          <a:xfrm>
+            <a:off x="762000" y="4191000"/>
+            <a:ext cx="10668000" cy="1447800"/>
+          </a:xfrm>
+          <a:prstGeom prst="roundRect">
+            <a:avLst>
+              <a:gd name="adj" fmla="val 8771"/>
+            </a:avLst>
+          </a:prstGeom>
+          <a:solidFill>
+            <a:srgbClr val="F3F7F8"/>
+          </a:solidFill>
+          <a:ln>
+            <a:noFill/>
+          </a:ln>
+          <a:effectLst/>
+        </p:spPr>
+        <p:style>
+          <a:lnRef idx="1">
+            <a:schemeClr val="accent1"/>
+          </a:lnRef>
+          <a:fillRef idx="3">
+            <a:schemeClr val="accent1"/>
+          </a:fillRef>
+          <a:effectRef idx="2">
+            <a:schemeClr val="accent1"/>
+          </a:effectRef>
+          <a:fontRef idx="minor">
+            <a:schemeClr val="lt1"/>
+          </a:fontRef>
+        </p:style>
+        <p:txBody>
+          <a:bodyPr rtlCol="0" anchor="ctr"/>
+          <a:lstStyle/>
+          <a:p>
+            <a:pPr algn="ctr"/>
+          </a:p>
+        </p:txBody>
+      </p:sp>
+      <p:sp>
+        <p:nvSpPr>
+          <p:cNvPr id="17" name="Rounded Rectangle 16"/>
+          <p:cNvSpPr/>
+          <p:nvPr/>
+        </p:nvSpPr>
+        <p:spPr>
+          <a:xfrm>
+            <a:off x="914400" y="4521200"/>
+            <a:ext cx="609600" cy="609600"/>
+          </a:xfrm>
+          <a:prstGeom prst="roundRect">
+            <a:avLst>
+              <a:gd name="adj" fmla="val 16666"/>
+            </a:avLst>
+          </a:prstGeom>
+          <a:solidFill>
+            <a:srgbClr val="FFFFFF"/>
+          </a:solidFill>
+          <a:ln>
+            <a:noFill/>
+          </a:ln>
+          <a:effectLst/>
+        </p:spPr>
+        <p:style>
+          <a:lnRef idx="1">
+            <a:schemeClr val="accent1"/>
+          </a:lnRef>
+          <a:fillRef idx="3">
+            <a:schemeClr val="accent1"/>
+          </a:fillRef>
+          <a:effectRef idx="2">
+            <a:schemeClr val="accent1"/>
+          </a:effectRef>
+          <a:fontRef idx="minor">
+            <a:schemeClr val="lt1"/>
+          </a:fontRef>
+        </p:style>
+        <p:txBody>
+          <a:bodyPr rtlCol="0" anchor="ctr"/>
+          <a:lstStyle/>
+          <a:p>
+            <a:pPr algn="ctr"/>
+          </a:p>
+        </p:txBody>
+      </p:sp>
       <p:pic>
         <p:nvPicPr>
-          <p:cNvPr id="11" name="Picture 10" descr="icon-check-green.png"/>
+          <p:cNvPr id="18" name="Picture 17" descr="icon-doel-greendeep.png"/>
           <p:cNvPicPr>
             <a:picLocks noChangeAspect="1"/>
           </p:cNvPicPr>
@@ -8379,8 +7561,8 @@
         </p:blipFill>
         <p:spPr>
           <a:xfrm>
-            <a:off x="6210300" y="2641600"/>
-            <a:ext cx="177800" cy="177800"/>
+            <a:off x="1066800" y="4673600"/>
+            <a:ext cx="304800" cy="304800"/>
           </a:xfrm>
           <a:prstGeom prst="rect">
             <a:avLst/>
@@ -8389,14 +7571,14 @@
       </p:pic>
       <p:sp>
         <p:nvSpPr>
-          <p:cNvPr id="12" name="TextBox 11"/>
+          <p:cNvPr id="19" name="TextBox 18"/>
           <p:cNvSpPr txBox="1"/>
           <p:nvPr/>
         </p:nvSpPr>
         <p:spPr>
           <a:xfrm>
-            <a:off x="6654800" y="2590800"/>
-            <a:ext cx="4318000" cy="304800"/>
+            <a:off x="1676400" y="4483100"/>
+            <a:ext cx="2438400" cy="406400"/>
           </a:xfrm>
           <a:prstGeom prst="rect">
             <a:avLst/>
@@ -8411,39 +7593,76 @@
           <a:p>
             <a:pPr algn="l">
               <a:lnSpc>
+                <a:spcPct val="100000"/>
+              </a:lnSpc>
+            </a:pPr>
+            <a:r>
+              <a:rPr sz="2200" b="1">
+                <a:solidFill>
+                  <a:srgbClr val="002333"/>
+                </a:solidFill>
+                <a:latin typeface="League Spartan"/>
+              </a:rPr>
+              <a:t>~94%</a:t>
+            </a:r>
+          </a:p>
+        </p:txBody>
+      </p:sp>
+      <p:sp>
+        <p:nvSpPr>
+          <p:cNvPr id="20" name="TextBox 19"/>
+          <p:cNvSpPr txBox="1"/>
+          <p:nvPr/>
+        </p:nvSpPr>
+        <p:spPr>
+          <a:xfrm>
+            <a:off x="1676400" y="4902200"/>
+            <a:ext cx="2438400" cy="571500"/>
+          </a:xfrm>
+          <a:prstGeom prst="rect">
+            <a:avLst/>
+          </a:prstGeom>
+          <a:noFill/>
+        </p:spPr>
+        <p:txBody>
+          <a:bodyPr wrap="square" lIns="0" rIns="0" tIns="0" bIns="0">
+            <a:spAutoFit/>
+          </a:bodyPr>
+          <a:lstStyle/>
+          <a:p>
+            <a:pPr algn="l">
+              <a:lnSpc>
                 <a:spcPct val="135000"/>
               </a:lnSpc>
             </a:pPr>
             <a:r>
-              <a:rPr sz="1600" b="0">
-                <a:solidFill>
-                  <a:srgbClr val="FFFFFF"/>
+              <a:rPr sz="1200" b="0">
+                <a:solidFill>
+                  <a:srgbClr val="5B7480"/>
                 </a:solidFill>
                 <a:latin typeface="Inter"/>
               </a:rPr>
-              <a:t>Discount for multi-year commitment</a:t>
-            </a:r>
-          </a:p>
-        </p:txBody>
-      </p:sp>
-      <p:sp>
-        <p:nvSpPr>
-          <p:cNvPr id="13" name="Rounded Rectangle 12"/>
+              <a:t>AI grading accuracy</a:t>
+            </a:r>
+          </a:p>
+        </p:txBody>
+      </p:sp>
+      <p:sp>
+        <p:nvSpPr>
+          <p:cNvPr id="21" name="Rectangle 20"/>
           <p:cNvSpPr/>
           <p:nvPr/>
         </p:nvSpPr>
         <p:spPr>
           <a:xfrm>
-            <a:off x="6121400" y="3162300"/>
-            <a:ext cx="355600" cy="355600"/>
-          </a:xfrm>
-          <a:prstGeom prst="roundRect">
-            <a:avLst>
-              <a:gd name="adj" fmla="val 25000"/>
-            </a:avLst>
+            <a:off x="4267200" y="4445000"/>
+            <a:ext cx="6350" cy="939800"/>
+          </a:xfrm>
+          <a:prstGeom prst="rect">
+            <a:avLst/>
           </a:prstGeom>
           <a:solidFill>
-            <a:srgbClr val="0A2C3B"/>
+            <a:srgbClr val="CDD9DE"/>
           </a:solidFill>
           <a:ln>
             <a:noFill/>
@@ -8472,24 +7691,70 @@
           </a:p>
         </p:txBody>
       </p:sp>
+      <p:sp>
+        <p:nvSpPr>
+          <p:cNvPr id="22" name="Rounded Rectangle 21"/>
+          <p:cNvSpPr/>
+          <p:nvPr/>
+        </p:nvSpPr>
+        <p:spPr>
+          <a:xfrm>
+            <a:off x="4572000" y="4521200"/>
+            <a:ext cx="609600" cy="609600"/>
+          </a:xfrm>
+          <a:prstGeom prst="roundRect">
+            <a:avLst>
+              <a:gd name="adj" fmla="val 16666"/>
+            </a:avLst>
+          </a:prstGeom>
+          <a:solidFill>
+            <a:srgbClr val="FFFFFF"/>
+          </a:solidFill>
+          <a:ln>
+            <a:noFill/>
+          </a:ln>
+          <a:effectLst/>
+        </p:spPr>
+        <p:style>
+          <a:lnRef idx="1">
+            <a:schemeClr val="accent1"/>
+          </a:lnRef>
+          <a:fillRef idx="3">
+            <a:schemeClr val="accent1"/>
+          </a:fillRef>
+          <a:effectRef idx="2">
+            <a:schemeClr val="accent1"/>
+          </a:effectRef>
+          <a:fontRef idx="minor">
+            <a:schemeClr val="lt1"/>
+          </a:fontRef>
+        </p:style>
+        <p:txBody>
+          <a:bodyPr rtlCol="0" anchor="ctr"/>
+          <a:lstStyle/>
+          <a:p>
+            <a:pPr algn="ctr"/>
+          </a:p>
+        </p:txBody>
+      </p:sp>
       <p:pic>
         <p:nvPicPr>
-          <p:cNvPr id="14" name="Picture 13" descr="icon-check-green.png"/>
+          <p:cNvPr id="23" name="Picture 22" descr="icon-bestand-greendeep.png"/>
           <p:cNvPicPr>
             <a:picLocks noChangeAspect="1"/>
           </p:cNvPicPr>
           <p:nvPr/>
         </p:nvPicPr>
         <p:blipFill>
-          <a:blip r:embed="rId2"/>
+          <a:blip r:embed="rId3"/>
           <a:stretch>
             <a:fillRect/>
           </a:stretch>
         </p:blipFill>
         <p:spPr>
           <a:xfrm>
-            <a:off x="6210300" y="3251200"/>
-            <a:ext cx="177800" cy="177800"/>
+            <a:off x="4724400" y="4673600"/>
+            <a:ext cx="304800" cy="304800"/>
           </a:xfrm>
           <a:prstGeom prst="rect">
             <a:avLst/>
@@ -8498,14 +7763,14 @@
       </p:pic>
       <p:sp>
         <p:nvSpPr>
-          <p:cNvPr id="15" name="TextBox 14"/>
+          <p:cNvPr id="24" name="TextBox 23"/>
           <p:cNvSpPr txBox="1"/>
           <p:nvPr/>
         </p:nvSpPr>
         <p:spPr>
           <a:xfrm>
-            <a:off x="6654800" y="3200400"/>
-            <a:ext cx="4318000" cy="304800"/>
+            <a:off x="5334000" y="4483100"/>
+            <a:ext cx="2438400" cy="406400"/>
           </a:xfrm>
           <a:prstGeom prst="rect">
             <a:avLst/>
@@ -8520,30 +7785,293 @@
           <a:p>
             <a:pPr algn="l">
               <a:lnSpc>
+                <a:spcPct val="100000"/>
+              </a:lnSpc>
+            </a:pPr>
+            <a:r>
+              <a:rPr sz="2200" b="1">
+                <a:solidFill>
+                  <a:srgbClr val="002333"/>
+                </a:solidFill>
+                <a:latin typeface="League Spartan"/>
+              </a:rPr>
+              <a:t>2,300+</a:t>
+            </a:r>
+          </a:p>
+        </p:txBody>
+      </p:sp>
+      <p:sp>
+        <p:nvSpPr>
+          <p:cNvPr id="25" name="TextBox 24"/>
+          <p:cNvSpPr txBox="1"/>
+          <p:nvPr/>
+        </p:nvSpPr>
+        <p:spPr>
+          <a:xfrm>
+            <a:off x="5334000" y="4902200"/>
+            <a:ext cx="2438400" cy="571500"/>
+          </a:xfrm>
+          <a:prstGeom prst="rect">
+            <a:avLst/>
+          </a:prstGeom>
+          <a:noFill/>
+        </p:spPr>
+        <p:txBody>
+          <a:bodyPr wrap="square" lIns="0" rIns="0" tIns="0" bIns="0">
+            <a:spAutoFit/>
+          </a:bodyPr>
+          <a:lstStyle/>
+          <a:p>
+            <a:pPr algn="l">
+              <a:lnSpc>
                 <a:spcPct val="135000"/>
               </a:lnSpc>
             </a:pPr>
             <a:r>
-              <a:rPr sz="1600" b="0">
-                <a:solidFill>
-                  <a:srgbClr val="FFFFFF"/>
+              <a:rPr sz="1200" b="0">
+                <a:solidFill>
+                  <a:srgbClr val="5B7480"/>
                 </a:solidFill>
                 <a:latin typeface="Inter"/>
               </a:rPr>
-              <a:t>Scales with growing students &amp; instructors</a:t>
-            </a:r>
-          </a:p>
-        </p:txBody>
-      </p:sp>
-      <p:sp>
-        <p:nvSpPr>
-          <p:cNvPr id="16" name="Rectangle 15"/>
+              <a:t>feedback items across</a:t>
+            </a:r>
+          </a:p>
+          <a:p>
+            <a:pPr algn="l">
+              <a:lnSpc>
+                <a:spcPct val="135000"/>
+              </a:lnSpc>
+            </a:pPr>
+            <a:r>
+              <a:rPr sz="1200" b="0">
+                <a:solidFill>
+                  <a:srgbClr val="5B7480"/>
+                </a:solidFill>
+                <a:latin typeface="Inter"/>
+              </a:rPr>
+              <a:t>435 submissions</a:t>
+            </a:r>
+          </a:p>
+        </p:txBody>
+      </p:sp>
+      <p:sp>
+        <p:nvSpPr>
+          <p:cNvPr id="26" name="Rectangle 25"/>
           <p:cNvSpPr/>
           <p:nvPr/>
         </p:nvSpPr>
         <p:spPr>
           <a:xfrm>
-            <a:off x="762000" y="4673600"/>
+            <a:off x="7924800" y="4445000"/>
+            <a:ext cx="6350" cy="939800"/>
+          </a:xfrm>
+          <a:prstGeom prst="rect">
+            <a:avLst/>
+          </a:prstGeom>
+          <a:solidFill>
+            <a:srgbClr val="CDD9DE"/>
+          </a:solidFill>
+          <a:ln>
+            <a:noFill/>
+          </a:ln>
+          <a:effectLst/>
+        </p:spPr>
+        <p:style>
+          <a:lnRef idx="1">
+            <a:schemeClr val="accent1"/>
+          </a:lnRef>
+          <a:fillRef idx="3">
+            <a:schemeClr val="accent1"/>
+          </a:fillRef>
+          <a:effectRef idx="2">
+            <a:schemeClr val="accent1"/>
+          </a:effectRef>
+          <a:fontRef idx="minor">
+            <a:schemeClr val="lt1"/>
+          </a:fontRef>
+        </p:style>
+        <p:txBody>
+          <a:bodyPr rtlCol="0" anchor="ctr"/>
+          <a:lstStyle/>
+          <a:p>
+            <a:pPr algn="ctr"/>
+          </a:p>
+        </p:txBody>
+      </p:sp>
+      <p:sp>
+        <p:nvSpPr>
+          <p:cNvPr id="27" name="Rounded Rectangle 26"/>
+          <p:cNvSpPr/>
+          <p:nvPr/>
+        </p:nvSpPr>
+        <p:spPr>
+          <a:xfrm>
+            <a:off x="8229600" y="4521200"/>
+            <a:ext cx="609600" cy="609600"/>
+          </a:xfrm>
+          <a:prstGeom prst="roundRect">
+            <a:avLst>
+              <a:gd name="adj" fmla="val 16666"/>
+            </a:avLst>
+          </a:prstGeom>
+          <a:solidFill>
+            <a:srgbClr val="FFFFFF"/>
+          </a:solidFill>
+          <a:ln>
+            <a:noFill/>
+          </a:ln>
+          <a:effectLst/>
+        </p:spPr>
+        <p:style>
+          <a:lnRef idx="1">
+            <a:schemeClr val="accent1"/>
+          </a:lnRef>
+          <a:fillRef idx="3">
+            <a:schemeClr val="accent1"/>
+          </a:fillRef>
+          <a:effectRef idx="2">
+            <a:schemeClr val="accent1"/>
+          </a:effectRef>
+          <a:fontRef idx="minor">
+            <a:schemeClr val="lt1"/>
+          </a:fontRef>
+        </p:style>
+        <p:txBody>
+          <a:bodyPr rtlCol="0" anchor="ctr"/>
+          <a:lstStyle/>
+          <a:p>
+            <a:pPr algn="ctr"/>
+          </a:p>
+        </p:txBody>
+      </p:sp>
+      <p:pic>
+        <p:nvPicPr>
+          <p:cNvPr id="28" name="Picture 27" descr="icon-klok-greendeep.png"/>
+          <p:cNvPicPr>
+            <a:picLocks noChangeAspect="1"/>
+          </p:cNvPicPr>
+          <p:nvPr/>
+        </p:nvPicPr>
+        <p:blipFill>
+          <a:blip r:embed="rId4"/>
+          <a:stretch>
+            <a:fillRect/>
+          </a:stretch>
+        </p:blipFill>
+        <p:spPr>
+          <a:xfrm>
+            <a:off x="8382000" y="4673600"/>
+            <a:ext cx="304800" cy="304800"/>
+          </a:xfrm>
+          <a:prstGeom prst="rect">
+            <a:avLst/>
+          </a:prstGeom>
+        </p:spPr>
+      </p:pic>
+      <p:sp>
+        <p:nvSpPr>
+          <p:cNvPr id="29" name="TextBox 28"/>
+          <p:cNvSpPr txBox="1"/>
+          <p:nvPr/>
+        </p:nvSpPr>
+        <p:spPr>
+          <a:xfrm>
+            <a:off x="8991600" y="4483100"/>
+            <a:ext cx="2438400" cy="406400"/>
+          </a:xfrm>
+          <a:prstGeom prst="rect">
+            <a:avLst/>
+          </a:prstGeom>
+          <a:noFill/>
+        </p:spPr>
+        <p:txBody>
+          <a:bodyPr wrap="square" lIns="0" rIns="0" tIns="0" bIns="0">
+            <a:spAutoFit/>
+          </a:bodyPr>
+          <a:lstStyle/>
+          <a:p>
+            <a:pPr algn="l">
+              <a:lnSpc>
+                <a:spcPct val="100000"/>
+              </a:lnSpc>
+            </a:pPr>
+            <a:r>
+              <a:rPr sz="2200" b="1">
+                <a:solidFill>
+                  <a:srgbClr val="002333"/>
+                </a:solidFill>
+                <a:latin typeface="League Spartan"/>
+              </a:rPr>
+              <a:t>15–20 hrs</a:t>
+            </a:r>
+          </a:p>
+        </p:txBody>
+      </p:sp>
+      <p:sp>
+        <p:nvSpPr>
+          <p:cNvPr id="30" name="TextBox 29"/>
+          <p:cNvSpPr txBox="1"/>
+          <p:nvPr/>
+        </p:nvSpPr>
+        <p:spPr>
+          <a:xfrm>
+            <a:off x="8991600" y="4902200"/>
+            <a:ext cx="2438400" cy="571500"/>
+          </a:xfrm>
+          <a:prstGeom prst="rect">
+            <a:avLst/>
+          </a:prstGeom>
+          <a:noFill/>
+        </p:spPr>
+        <p:txBody>
+          <a:bodyPr wrap="square" lIns="0" rIns="0" tIns="0" bIns="0">
+            <a:spAutoFit/>
+          </a:bodyPr>
+          <a:lstStyle/>
+          <a:p>
+            <a:pPr algn="l">
+              <a:lnSpc>
+                <a:spcPct val="135000"/>
+              </a:lnSpc>
+            </a:pPr>
+            <a:r>
+              <a:rPr sz="1200" b="0">
+                <a:solidFill>
+                  <a:srgbClr val="5B7480"/>
+                </a:solidFill>
+                <a:latin typeface="Inter"/>
+              </a:rPr>
+              <a:t>saved per 60-student cohort,</a:t>
+            </a:r>
+          </a:p>
+          <a:p>
+            <a:pPr algn="l">
+              <a:lnSpc>
+                <a:spcPct val="135000"/>
+              </a:lnSpc>
+            </a:pPr>
+            <a:r>
+              <a:rPr sz="1200" b="0">
+                <a:solidFill>
+                  <a:srgbClr val="5B7480"/>
+                </a:solidFill>
+                <a:latin typeface="Inter"/>
+              </a:rPr>
+              <a:t>every cycle</a:t>
+            </a:r>
+          </a:p>
+        </p:txBody>
+      </p:sp>
+      <p:sp>
+        <p:nvSpPr>
+          <p:cNvPr id="31" name="Rectangle 30"/>
+          <p:cNvSpPr/>
+          <p:nvPr/>
+        </p:nvSpPr>
+        <p:spPr>
+          <a:xfrm>
+            <a:off x="762000" y="6045200"/>
             <a:ext cx="10668000" cy="6350"/>
           </a:xfrm>
           <a:prstGeom prst="rect">
@@ -8579,312 +8107,9 @@
           </a:p>
         </p:txBody>
       </p:sp>
-      <p:sp>
-        <p:nvSpPr>
-          <p:cNvPr id="17" name="TextBox 16"/>
-          <p:cNvSpPr txBox="1"/>
-          <p:nvPr/>
-        </p:nvSpPr>
-        <p:spPr>
-          <a:xfrm>
-            <a:off x="762000" y="4826000"/>
-            <a:ext cx="3810000" cy="215900"/>
-          </a:xfrm>
-          <a:prstGeom prst="rect">
-            <a:avLst/>
-          </a:prstGeom>
-          <a:noFill/>
-        </p:spPr>
-        <p:txBody>
-          <a:bodyPr wrap="square" lIns="0" rIns="0" tIns="0" bIns="0">
-            <a:spAutoFit/>
-          </a:bodyPr>
-          <a:lstStyle/>
-          <a:p>
-            <a:pPr algn="l">
-              <a:lnSpc>
-                <a:spcPct val="120000"/>
-              </a:lnSpc>
-            </a:pPr>
-            <a:r>
-              <a:rPr sz="1200" b="0">
-                <a:solidFill>
-                  <a:srgbClr val="5B7480"/>
-                </a:solidFill>
-                <a:latin typeface="Inter"/>
-              </a:rPr>
-              <a:t>What that covers</a:t>
-            </a:r>
-          </a:p>
-        </p:txBody>
-      </p:sp>
-      <p:sp>
-        <p:nvSpPr>
-          <p:cNvPr id="18" name="Rounded Rectangle 17"/>
-          <p:cNvSpPr/>
-          <p:nvPr/>
-        </p:nvSpPr>
-        <p:spPr>
-          <a:xfrm>
-            <a:off x="762000" y="5207000"/>
-            <a:ext cx="457200" cy="457200"/>
-          </a:xfrm>
-          <a:prstGeom prst="roundRect">
-            <a:avLst>
-              <a:gd name="adj" fmla="val 22222"/>
-            </a:avLst>
-          </a:prstGeom>
-          <a:solidFill>
-            <a:srgbClr val="F3F7F8"/>
-          </a:solidFill>
-          <a:ln>
-            <a:noFill/>
-          </a:ln>
-          <a:effectLst/>
-        </p:spPr>
-        <p:style>
-          <a:lnRef idx="1">
-            <a:schemeClr val="accent1"/>
-          </a:lnRef>
-          <a:fillRef idx="3">
-            <a:schemeClr val="accent1"/>
-          </a:fillRef>
-          <a:effectRef idx="2">
-            <a:schemeClr val="accent1"/>
-          </a:effectRef>
-          <a:fontRef idx="minor">
-            <a:schemeClr val="lt1"/>
-          </a:fontRef>
-        </p:style>
-        <p:txBody>
-          <a:bodyPr rtlCol="0" anchor="ctr"/>
-          <a:lstStyle/>
-          <a:p>
-            <a:pPr algn="ctr"/>
-          </a:p>
-        </p:txBody>
-      </p:sp>
       <p:pic>
         <p:nvPicPr>
-          <p:cNvPr id="19" name="Picture 18" descr="icon-doel-navy.png"/>
-          <p:cNvPicPr>
-            <a:picLocks noChangeAspect="1"/>
-          </p:cNvPicPr>
-          <p:nvPr/>
-        </p:nvPicPr>
-        <p:blipFill>
-          <a:blip r:embed="rId3"/>
-          <a:stretch>
-            <a:fillRect/>
-          </a:stretch>
-        </p:blipFill>
-        <p:spPr>
-          <a:xfrm>
-            <a:off x="876300" y="5321300"/>
-            <a:ext cx="228600" cy="228600"/>
-          </a:xfrm>
-          <a:prstGeom prst="rect">
-            <a:avLst/>
-          </a:prstGeom>
-        </p:spPr>
-      </p:pic>
-      <p:sp>
-        <p:nvSpPr>
-          <p:cNvPr id="20" name="TextBox 19"/>
-          <p:cNvSpPr txBox="1"/>
-          <p:nvPr/>
-        </p:nvSpPr>
-        <p:spPr>
-          <a:xfrm>
-            <a:off x="1346200" y="5334000"/>
-            <a:ext cx="1854200" cy="254000"/>
-          </a:xfrm>
-          <a:prstGeom prst="rect">
-            <a:avLst/>
-          </a:prstGeom>
-          <a:noFill/>
-        </p:spPr>
-        <p:txBody>
-          <a:bodyPr wrap="square" lIns="0" rIns="0" tIns="0" bIns="0">
-            <a:spAutoFit/>
-          </a:bodyPr>
-          <a:lstStyle/>
-          <a:p>
-            <a:pPr algn="l">
-              <a:lnSpc>
-                <a:spcPct val="130000"/>
-              </a:lnSpc>
-            </a:pPr>
-            <a:r>
-              <a:rPr sz="1200" b="0">
-                <a:solidFill>
-                  <a:srgbClr val="5B7480"/>
-                </a:solidFill>
-                <a:latin typeface="Inter"/>
-              </a:rPr>
-              <a:t>Accuracy &amp; Consistency</a:t>
-            </a:r>
-          </a:p>
-        </p:txBody>
-      </p:sp>
-      <p:sp>
-        <p:nvSpPr>
-          <p:cNvPr id="21" name="Rounded Rectangle 20"/>
-          <p:cNvSpPr/>
-          <p:nvPr/>
-        </p:nvSpPr>
-        <p:spPr>
-          <a:xfrm>
-            <a:off x="3505200" y="5207000"/>
-            <a:ext cx="457200" cy="457200"/>
-          </a:xfrm>
-          <a:prstGeom prst="roundRect">
-            <a:avLst>
-              <a:gd name="adj" fmla="val 22222"/>
-            </a:avLst>
-          </a:prstGeom>
-          <a:solidFill>
-            <a:srgbClr val="F3F7F8"/>
-          </a:solidFill>
-          <a:ln>
-            <a:noFill/>
-          </a:ln>
-          <a:effectLst/>
-        </p:spPr>
-        <p:style>
-          <a:lnRef idx="1">
-            <a:schemeClr val="accent1"/>
-          </a:lnRef>
-          <a:fillRef idx="3">
-            <a:schemeClr val="accent1"/>
-          </a:fillRef>
-          <a:effectRef idx="2">
-            <a:schemeClr val="accent1"/>
-          </a:effectRef>
-          <a:fontRef idx="minor">
-            <a:schemeClr val="lt1"/>
-          </a:fontRef>
-        </p:style>
-        <p:txBody>
-          <a:bodyPr rtlCol="0" anchor="ctr"/>
-          <a:lstStyle/>
-          <a:p>
-            <a:pPr algn="ctr"/>
-          </a:p>
-        </p:txBody>
-      </p:sp>
-      <p:pic>
-        <p:nvPicPr>
-          <p:cNvPr id="22" name="Picture 21" descr="icon-sleutel-navy.png"/>
-          <p:cNvPicPr>
-            <a:picLocks noChangeAspect="1"/>
-          </p:cNvPicPr>
-          <p:nvPr/>
-        </p:nvPicPr>
-        <p:blipFill>
-          <a:blip r:embed="rId4"/>
-          <a:stretch>
-            <a:fillRect/>
-          </a:stretch>
-        </p:blipFill>
-        <p:spPr>
-          <a:xfrm>
-            <a:off x="3619500" y="5321300"/>
-            <a:ext cx="228600" cy="228600"/>
-          </a:xfrm>
-          <a:prstGeom prst="rect">
-            <a:avLst/>
-          </a:prstGeom>
-        </p:spPr>
-      </p:pic>
-      <p:sp>
-        <p:nvSpPr>
-          <p:cNvPr id="23" name="TextBox 22"/>
-          <p:cNvSpPr txBox="1"/>
-          <p:nvPr/>
-        </p:nvSpPr>
-        <p:spPr>
-          <a:xfrm>
-            <a:off x="4089400" y="5334000"/>
-            <a:ext cx="1854200" cy="254000"/>
-          </a:xfrm>
-          <a:prstGeom prst="rect">
-            <a:avLst/>
-          </a:prstGeom>
-          <a:noFill/>
-        </p:spPr>
-        <p:txBody>
-          <a:bodyPr wrap="square" lIns="0" rIns="0" tIns="0" bIns="0">
-            <a:spAutoFit/>
-          </a:bodyPr>
-          <a:lstStyle/>
-          <a:p>
-            <a:pPr algn="l">
-              <a:lnSpc>
-                <a:spcPct val="130000"/>
-              </a:lnSpc>
-            </a:pPr>
-            <a:r>
-              <a:rPr sz="1200" b="0">
-                <a:solidFill>
-                  <a:srgbClr val="5B7480"/>
-                </a:solidFill>
-                <a:latin typeface="Inter"/>
-              </a:rPr>
-              <a:t>Technical Domain Fit</a:t>
-            </a:r>
-          </a:p>
-        </p:txBody>
-      </p:sp>
-      <p:sp>
-        <p:nvSpPr>
-          <p:cNvPr id="24" name="Rounded Rectangle 23"/>
-          <p:cNvSpPr/>
-          <p:nvPr/>
-        </p:nvSpPr>
-        <p:spPr>
-          <a:xfrm>
-            <a:off x="6248400" y="5207000"/>
-            <a:ext cx="457200" cy="457200"/>
-          </a:xfrm>
-          <a:prstGeom prst="roundRect">
-            <a:avLst>
-              <a:gd name="adj" fmla="val 22222"/>
-            </a:avLst>
-          </a:prstGeom>
-          <a:solidFill>
-            <a:srgbClr val="F3F7F8"/>
-          </a:solidFill>
-          <a:ln>
-            <a:noFill/>
-          </a:ln>
-          <a:effectLst/>
-        </p:spPr>
-        <p:style>
-          <a:lnRef idx="1">
-            <a:schemeClr val="accent1"/>
-          </a:lnRef>
-          <a:fillRef idx="3">
-            <a:schemeClr val="accent1"/>
-          </a:fillRef>
-          <a:effectRef idx="2">
-            <a:schemeClr val="accent1"/>
-          </a:effectRef>
-          <a:fontRef idx="minor">
-            <a:schemeClr val="lt1"/>
-          </a:fontRef>
-        </p:style>
-        <p:txBody>
-          <a:bodyPr rtlCol="0" anchor="ctr"/>
-          <a:lstStyle/>
-          <a:p>
-            <a:pPr algn="ctr"/>
-          </a:p>
-        </p:txBody>
-      </p:sp>
-      <p:pic>
-        <p:nvPicPr>
-          <p:cNvPr id="25" name="Picture 24" descr="icon-instelling-navy.png"/>
+          <p:cNvPr id="32" name="Picture 31" descr="logo_navy.png"/>
           <p:cNvPicPr>
             <a:picLocks noChangeAspect="1"/>
           </p:cNvPicPr>
@@ -8898,8 +8123,8 @@
         </p:blipFill>
         <p:spPr>
           <a:xfrm>
-            <a:off x="6362700" y="5321300"/>
-            <a:ext cx="228600" cy="228600"/>
+            <a:off x="762000" y="6324600"/>
+            <a:ext cx="937957" cy="254000"/>
           </a:xfrm>
           <a:prstGeom prst="rect">
             <a:avLst/>
@@ -8908,61 +8133,20 @@
       </p:pic>
       <p:sp>
         <p:nvSpPr>
-          <p:cNvPr id="26" name="TextBox 25"/>
-          <p:cNvSpPr txBox="1"/>
-          <p:nvPr/>
-        </p:nvSpPr>
-        <p:spPr>
-          <a:xfrm>
-            <a:off x="6832600" y="5334000"/>
-            <a:ext cx="1854200" cy="254000"/>
-          </a:xfrm>
-          <a:prstGeom prst="rect">
-            <a:avLst/>
-          </a:prstGeom>
-          <a:noFill/>
-        </p:spPr>
-        <p:txBody>
-          <a:bodyPr wrap="square" lIns="0" rIns="0" tIns="0" bIns="0">
-            <a:spAutoFit/>
-          </a:bodyPr>
-          <a:lstStyle/>
-          <a:p>
-            <a:pPr algn="l">
-              <a:lnSpc>
-                <a:spcPct val="130000"/>
-              </a:lnSpc>
-            </a:pPr>
-            <a:r>
-              <a:rPr sz="1200" b="0">
-                <a:solidFill>
-                  <a:srgbClr val="5B7480"/>
-                </a:solidFill>
-                <a:latin typeface="Inter"/>
-              </a:rPr>
-              <a:t>Institution-Wide</a:t>
-            </a:r>
-          </a:p>
-        </p:txBody>
-      </p:sp>
-      <p:sp>
-        <p:nvSpPr>
-          <p:cNvPr id="27" name="Rounded Rectangle 26"/>
+          <p:cNvPr id="33" name="Rectangle 32"/>
           <p:cNvSpPr/>
           <p:nvPr/>
         </p:nvSpPr>
         <p:spPr>
           <a:xfrm>
-            <a:off x="8991600" y="5207000"/>
-            <a:ext cx="457200" cy="457200"/>
-          </a:xfrm>
-          <a:prstGeom prst="roundRect">
-            <a:avLst>
-              <a:gd name="adj" fmla="val 22222"/>
-            </a:avLst>
+            <a:off x="1968500" y="6311900"/>
+            <a:ext cx="6350" cy="279400"/>
+          </a:xfrm>
+          <a:prstGeom prst="rect">
+            <a:avLst/>
           </a:prstGeom>
           <a:solidFill>
-            <a:srgbClr val="F3F7F8"/>
+            <a:srgbClr val="CDD9DE"/>
           </a:solidFill>
           <a:ln>
             <a:noFill/>
@@ -8993,7 +8177,7 @@
       </p:sp>
       <p:pic>
         <p:nvPicPr>
-          <p:cNvPr id="28" name="Picture 27" descr="icon-schuifjes-navy.png"/>
+          <p:cNvPr id="34" name="Picture 33" descr="uti-logo.png"/>
           <p:cNvPicPr>
             <a:picLocks noChangeAspect="1"/>
           </p:cNvPicPr>
@@ -9007,8 +8191,8 @@
         </p:blipFill>
         <p:spPr>
           <a:xfrm>
-            <a:off x="9105900" y="5321300"/>
-            <a:ext cx="228600" cy="228600"/>
+            <a:off x="2222500" y="6273800"/>
+            <a:ext cx="774246" cy="355600"/>
           </a:xfrm>
           <a:prstGeom prst="rect">
             <a:avLst/>
@@ -9017,14 +8201,14 @@
       </p:pic>
       <p:sp>
         <p:nvSpPr>
-          <p:cNvPr id="29" name="TextBox 28"/>
+          <p:cNvPr id="35" name="TextBox 34"/>
           <p:cNvSpPr txBox="1"/>
           <p:nvPr/>
         </p:nvSpPr>
         <p:spPr>
           <a:xfrm>
-            <a:off x="9575800" y="5334000"/>
-            <a:ext cx="1854200" cy="254000"/>
+            <a:off x="5715000" y="6375400"/>
+            <a:ext cx="5080000" cy="243840"/>
           </a:xfrm>
           <a:prstGeom prst="rect">
             <a:avLst/>
@@ -9037,9 +8221,9 @@
           </a:bodyPr>
           <a:lstStyle/>
           <a:p>
-            <a:pPr algn="l">
-              <a:lnSpc>
-                <a:spcPct val="130000"/>
+            <a:pPr algn="r">
+              <a:lnSpc>
+                <a:spcPct val="135000"/>
               </a:lnSpc>
             </a:pPr>
             <a:r>
@@ -9049,150 +8233,14 @@
                 </a:solidFill>
                 <a:latin typeface="Inter"/>
               </a:rPr>
-              <a:t>Self-Configuring</a:t>
-            </a:r>
-          </a:p>
-        </p:txBody>
-      </p:sp>
-      <p:sp>
-        <p:nvSpPr>
-          <p:cNvPr id="30" name="Rectangle 29"/>
-          <p:cNvSpPr/>
-          <p:nvPr/>
-        </p:nvSpPr>
-        <p:spPr>
-          <a:xfrm>
-            <a:off x="762000" y="6045200"/>
-            <a:ext cx="10668000" cy="6350"/>
-          </a:xfrm>
-          <a:prstGeom prst="rect">
-            <a:avLst/>
-          </a:prstGeom>
-          <a:solidFill>
-            <a:srgbClr val="E7EEF0"/>
-          </a:solidFill>
-          <a:ln>
-            <a:noFill/>
-          </a:ln>
-          <a:effectLst/>
-        </p:spPr>
-        <p:style>
-          <a:lnRef idx="1">
-            <a:schemeClr val="accent1"/>
-          </a:lnRef>
-          <a:fillRef idx="3">
-            <a:schemeClr val="accent1"/>
-          </a:fillRef>
-          <a:effectRef idx="2">
-            <a:schemeClr val="accent1"/>
-          </a:effectRef>
-          <a:fontRef idx="minor">
-            <a:schemeClr val="lt1"/>
-          </a:fontRef>
-        </p:style>
-        <p:txBody>
-          <a:bodyPr rtlCol="0" anchor="ctr"/>
-          <a:lstStyle/>
-          <a:p>
-            <a:pPr algn="ctr"/>
-          </a:p>
-        </p:txBody>
-      </p:sp>
-      <p:pic>
-        <p:nvPicPr>
-          <p:cNvPr id="31" name="Picture 30" descr="logo_navy.png"/>
-          <p:cNvPicPr>
-            <a:picLocks noChangeAspect="1"/>
-          </p:cNvPicPr>
-          <p:nvPr/>
-        </p:nvPicPr>
-        <p:blipFill>
-          <a:blip r:embed="rId7"/>
-          <a:stretch>
-            <a:fillRect/>
-          </a:stretch>
-        </p:blipFill>
-        <p:spPr>
-          <a:xfrm>
-            <a:off x="762000" y="6324600"/>
-            <a:ext cx="937957" cy="254000"/>
-          </a:xfrm>
-          <a:prstGeom prst="rect">
-            <a:avLst/>
-          </a:prstGeom>
-        </p:spPr>
-      </p:pic>
-      <p:sp>
-        <p:nvSpPr>
-          <p:cNvPr id="32" name="Rectangle 31"/>
-          <p:cNvSpPr/>
-          <p:nvPr/>
-        </p:nvSpPr>
-        <p:spPr>
-          <a:xfrm>
-            <a:off x="1968500" y="6311900"/>
-            <a:ext cx="6350" cy="279400"/>
-          </a:xfrm>
-          <a:prstGeom prst="rect">
-            <a:avLst/>
-          </a:prstGeom>
-          <a:solidFill>
-            <a:srgbClr val="CDD9DE"/>
-          </a:solidFill>
-          <a:ln>
-            <a:noFill/>
-          </a:ln>
-          <a:effectLst/>
-        </p:spPr>
-        <p:style>
-          <a:lnRef idx="1">
-            <a:schemeClr val="accent1"/>
-          </a:lnRef>
-          <a:fillRef idx="3">
-            <a:schemeClr val="accent1"/>
-          </a:fillRef>
-          <a:effectRef idx="2">
-            <a:schemeClr val="accent1"/>
-          </a:effectRef>
-          <a:fontRef idx="minor">
-            <a:schemeClr val="lt1"/>
-          </a:fontRef>
-        </p:style>
-        <p:txBody>
-          <a:bodyPr rtlCol="0" anchor="ctr"/>
-          <a:lstStyle/>
-          <a:p>
-            <a:pPr algn="ctr"/>
-          </a:p>
-        </p:txBody>
-      </p:sp>
-      <p:pic>
-        <p:nvPicPr>
-          <p:cNvPr id="33" name="Picture 32" descr="uti-logo.png"/>
-          <p:cNvPicPr>
-            <a:picLocks noChangeAspect="1"/>
-          </p:cNvPicPr>
-          <p:nvPr/>
-        </p:nvPicPr>
-        <p:blipFill>
-          <a:blip r:embed="rId8"/>
-          <a:stretch>
-            <a:fillRect/>
-          </a:stretch>
-        </p:blipFill>
-        <p:spPr>
-          <a:xfrm>
-            <a:off x="2222500" y="6273800"/>
-            <a:ext cx="774246" cy="355600"/>
-          </a:xfrm>
-          <a:prstGeom prst="rect">
-            <a:avLst/>
-          </a:prstGeom>
-        </p:spPr>
-      </p:pic>
-      <p:sp>
-        <p:nvSpPr>
-          <p:cNvPr id="34" name="TextBox 33"/>
+              <a:t>Source: Bath Spa University · Eduface pilot data.</a:t>
+            </a:r>
+          </a:p>
+        </p:txBody>
+      </p:sp>
+      <p:sp>
+        <p:nvSpPr>
+          <p:cNvPr id="36" name="TextBox 35"/>
           <p:cNvSpPr txBox="1"/>
           <p:nvPr/>
         </p:nvSpPr>
@@ -9262,6 +8310,130 @@
             <a:avLst/>
           </a:prstGeom>
           <a:solidFill>
+            <a:srgbClr val="FFFFFF"/>
+          </a:solidFill>
+          <a:ln>
+            <a:noFill/>
+          </a:ln>
+          <a:effectLst/>
+        </p:spPr>
+        <p:style>
+          <a:lnRef idx="1">
+            <a:schemeClr val="accent1"/>
+          </a:lnRef>
+          <a:fillRef idx="3">
+            <a:schemeClr val="accent1"/>
+          </a:fillRef>
+          <a:effectRef idx="2">
+            <a:schemeClr val="accent1"/>
+          </a:effectRef>
+          <a:fontRef idx="minor">
+            <a:schemeClr val="lt1"/>
+          </a:fontRef>
+        </p:style>
+        <p:txBody>
+          <a:bodyPr rtlCol="0" anchor="ctr"/>
+          <a:lstStyle/>
+          <a:p>
+            <a:pPr algn="ctr"/>
+          </a:p>
+        </p:txBody>
+      </p:sp>
+      <p:sp>
+        <p:nvSpPr>
+          <p:cNvPr id="3" name="TextBox 2"/>
+          <p:cNvSpPr txBox="1"/>
+          <p:nvPr/>
+        </p:nvSpPr>
+        <p:spPr>
+          <a:xfrm>
+            <a:off x="762000" y="558800"/>
+            <a:ext cx="10668000" cy="627380"/>
+          </a:xfrm>
+          <a:prstGeom prst="rect">
+            <a:avLst/>
+          </a:prstGeom>
+          <a:noFill/>
+        </p:spPr>
+        <p:txBody>
+          <a:bodyPr wrap="square" lIns="0" rIns="0" tIns="0" bIns="0">
+            <a:spAutoFit/>
+          </a:bodyPr>
+          <a:lstStyle/>
+          <a:p>
+            <a:pPr algn="l">
+              <a:lnSpc>
+                <a:spcPct val="104000"/>
+              </a:lnSpc>
+            </a:pPr>
+            <a:r>
+              <a:rPr sz="3800" b="1">
+                <a:solidFill>
+                  <a:srgbClr val="002333"/>
+                </a:solidFill>
+                <a:latin typeface="League Spartan"/>
+              </a:rPr>
+              <a:t>Institution-wide feedback, priced per student</a:t>
+            </a:r>
+          </a:p>
+        </p:txBody>
+      </p:sp>
+      <p:sp>
+        <p:nvSpPr>
+          <p:cNvPr id="4" name="TextBox 3"/>
+          <p:cNvSpPr txBox="1"/>
+          <p:nvPr/>
+        </p:nvSpPr>
+        <p:spPr>
+          <a:xfrm>
+            <a:off x="762000" y="1270000"/>
+            <a:ext cx="10668000" cy="304800"/>
+          </a:xfrm>
+          <a:prstGeom prst="rect">
+            <a:avLst/>
+          </a:prstGeom>
+          <a:noFill/>
+        </p:spPr>
+        <p:txBody>
+          <a:bodyPr wrap="square" lIns="0" rIns="0" tIns="0" bIns="0">
+            <a:spAutoFit/>
+          </a:bodyPr>
+          <a:lstStyle/>
+          <a:p>
+            <a:pPr algn="l">
+              <a:lnSpc>
+                <a:spcPct val="130000"/>
+              </a:lnSpc>
+            </a:pPr>
+            <a:r>
+              <a:rPr sz="1600" b="0">
+                <a:solidFill>
+                  <a:srgbClr val="5B7480"/>
+                </a:solidFill>
+                <a:latin typeface="Inter"/>
+              </a:rPr>
+              <a:t>Delivered by Eduface, mapped to what UTI needs.</a:t>
+            </a:r>
+          </a:p>
+        </p:txBody>
+      </p:sp>
+      <p:sp>
+        <p:nvSpPr>
+          <p:cNvPr id="5" name="Rounded Rectangle 4"/>
+          <p:cNvSpPr/>
+          <p:nvPr/>
+        </p:nvSpPr>
+        <p:spPr>
+          <a:xfrm>
+            <a:off x="762000" y="1905000"/>
+            <a:ext cx="10668000" cy="2260600"/>
+          </a:xfrm>
+          <a:prstGeom prst="roundRect">
+            <a:avLst>
+              <a:gd name="adj" fmla="val 6741"/>
+            </a:avLst>
+          </a:prstGeom>
+          <a:solidFill>
             <a:srgbClr val="002333"/>
           </a:solidFill>
           <a:ln>
@@ -9293,14 +8465,14 @@
       </p:sp>
       <p:sp>
         <p:nvSpPr>
-          <p:cNvPr id="3" name="TextBox 2"/>
+          <p:cNvPr id="6" name="TextBox 5"/>
           <p:cNvSpPr txBox="1"/>
           <p:nvPr/>
         </p:nvSpPr>
         <p:spPr>
           <a:xfrm>
-            <a:off x="762000" y="558800"/>
-            <a:ext cx="10668000" cy="627380"/>
+            <a:off x="1219200" y="2362200"/>
+            <a:ext cx="1905000" cy="1333500"/>
           </a:xfrm>
           <a:prstGeom prst="rect">
             <a:avLst/>
@@ -9315,31 +8487,125 @@
           <a:p>
             <a:pPr algn="l">
               <a:lnSpc>
-                <a:spcPct val="104000"/>
-              </a:lnSpc>
-            </a:pPr>
-            <a:r>
-              <a:rPr sz="3800" b="1">
+                <a:spcPct val="90000"/>
+              </a:lnSpc>
+            </a:pPr>
+            <a:r>
+              <a:rPr sz="9000" b="1">
                 <a:solidFill>
                   <a:srgbClr val="FFFFFF"/>
                 </a:solidFill>
                 <a:latin typeface="League Spartan"/>
               </a:rPr>
-              <a:t>Proposed Next Steps</a:t>
-            </a:r>
-          </a:p>
-        </p:txBody>
-      </p:sp>
-      <p:sp>
-        <p:nvSpPr>
-          <p:cNvPr id="4" name="Rectangle 3"/>
+              <a:t>$3</a:t>
+            </a:r>
+          </a:p>
+        </p:txBody>
+      </p:sp>
+      <p:sp>
+        <p:nvSpPr>
+          <p:cNvPr id="7" name="TextBox 6"/>
+          <p:cNvSpPr txBox="1"/>
+          <p:nvPr/>
+        </p:nvSpPr>
+        <p:spPr>
+          <a:xfrm>
+            <a:off x="2717800" y="2540000"/>
+            <a:ext cx="2667000" cy="711200"/>
+          </a:xfrm>
+          <a:prstGeom prst="rect">
+            <a:avLst/>
+          </a:prstGeom>
+          <a:noFill/>
+        </p:spPr>
+        <p:txBody>
+          <a:bodyPr wrap="square" lIns="0" rIns="0" tIns="0" bIns="0">
+            <a:spAutoFit/>
+          </a:bodyPr>
+          <a:lstStyle/>
+          <a:p>
+            <a:pPr algn="l">
+              <a:lnSpc>
+                <a:spcPct val="115000"/>
+              </a:lnSpc>
+            </a:pPr>
+            <a:r>
+              <a:rPr sz="2200" b="1">
+                <a:solidFill>
+                  <a:srgbClr val="FFFFFF"/>
+                </a:solidFill>
+                <a:latin typeface="League Spartan"/>
+              </a:rPr>
+              <a:t>per student,</a:t>
+            </a:r>
+          </a:p>
+          <a:p>
+            <a:pPr algn="l">
+              <a:lnSpc>
+                <a:spcPct val="115000"/>
+              </a:lnSpc>
+            </a:pPr>
+            <a:r>
+              <a:rPr sz="2200" b="1">
+                <a:solidFill>
+                  <a:srgbClr val="FFFFFF"/>
+                </a:solidFill>
+                <a:latin typeface="League Spartan"/>
+              </a:rPr>
+              <a:t>per month</a:t>
+            </a:r>
+          </a:p>
+        </p:txBody>
+      </p:sp>
+      <p:sp>
+        <p:nvSpPr>
+          <p:cNvPr id="8" name="TextBox 7"/>
+          <p:cNvSpPr txBox="1"/>
+          <p:nvPr/>
+        </p:nvSpPr>
+        <p:spPr>
+          <a:xfrm>
+            <a:off x="1219200" y="3429000"/>
+            <a:ext cx="3302000" cy="279400"/>
+          </a:xfrm>
+          <a:prstGeom prst="rect">
+            <a:avLst/>
+          </a:prstGeom>
+          <a:noFill/>
+        </p:spPr>
+        <p:txBody>
+          <a:bodyPr wrap="square" lIns="0" rIns="0" tIns="0" bIns="0">
+            <a:spAutoFit/>
+          </a:bodyPr>
+          <a:lstStyle/>
+          <a:p>
+            <a:pPr algn="l">
+              <a:lnSpc>
+                <a:spcPct val="120000"/>
+              </a:lnSpc>
+            </a:pPr>
+            <a:r>
+              <a:rPr sz="1600" b="0">
+                <a:solidFill>
+                  <a:srgbClr val="9EABB1"/>
+                </a:solidFill>
+                <a:latin typeface="Inter"/>
+              </a:rPr>
+              <a:t>billed annually</a:t>
+            </a:r>
+          </a:p>
+        </p:txBody>
+      </p:sp>
+      <p:sp>
+        <p:nvSpPr>
+          <p:cNvPr id="9" name="Rectangle 8"/>
           <p:cNvSpPr/>
           <p:nvPr/>
         </p:nvSpPr>
         <p:spPr>
           <a:xfrm>
-            <a:off x="1466850" y="2070100"/>
-            <a:ext cx="12700" cy="3251200"/>
+            <a:off x="5715000" y="2159000"/>
+            <a:ext cx="6350" cy="1752600"/>
           </a:xfrm>
           <a:prstGeom prst="rect">
             <a:avLst/>
@@ -9376,6 +8642,1063 @@
       </p:sp>
       <p:sp>
         <p:nvSpPr>
+          <p:cNvPr id="10" name="Rounded Rectangle 9"/>
+          <p:cNvSpPr/>
+          <p:nvPr/>
+        </p:nvSpPr>
+        <p:spPr>
+          <a:xfrm>
+            <a:off x="6121400" y="2552700"/>
+            <a:ext cx="355600" cy="355600"/>
+          </a:xfrm>
+          <a:prstGeom prst="roundRect">
+            <a:avLst>
+              <a:gd name="adj" fmla="val 25000"/>
+            </a:avLst>
+          </a:prstGeom>
+          <a:solidFill>
+            <a:srgbClr val="0A2C3B"/>
+          </a:solidFill>
+          <a:ln>
+            <a:noFill/>
+          </a:ln>
+          <a:effectLst/>
+        </p:spPr>
+        <p:style>
+          <a:lnRef idx="1">
+            <a:schemeClr val="accent1"/>
+          </a:lnRef>
+          <a:fillRef idx="3">
+            <a:schemeClr val="accent1"/>
+          </a:fillRef>
+          <a:effectRef idx="2">
+            <a:schemeClr val="accent1"/>
+          </a:effectRef>
+          <a:fontRef idx="minor">
+            <a:schemeClr val="lt1"/>
+          </a:fontRef>
+        </p:style>
+        <p:txBody>
+          <a:bodyPr rtlCol="0" anchor="ctr"/>
+          <a:lstStyle/>
+          <a:p>
+            <a:pPr algn="ctr"/>
+          </a:p>
+        </p:txBody>
+      </p:sp>
+      <p:pic>
+        <p:nvPicPr>
+          <p:cNvPr id="11" name="Picture 10" descr="icon-check-green.png"/>
+          <p:cNvPicPr>
+            <a:picLocks noChangeAspect="1"/>
+          </p:cNvPicPr>
+          <p:nvPr/>
+        </p:nvPicPr>
+        <p:blipFill>
+          <a:blip r:embed="rId2"/>
+          <a:stretch>
+            <a:fillRect/>
+          </a:stretch>
+        </p:blipFill>
+        <p:spPr>
+          <a:xfrm>
+            <a:off x="6210300" y="2641600"/>
+            <a:ext cx="177800" cy="177800"/>
+          </a:xfrm>
+          <a:prstGeom prst="rect">
+            <a:avLst/>
+          </a:prstGeom>
+        </p:spPr>
+      </p:pic>
+      <p:sp>
+        <p:nvSpPr>
+          <p:cNvPr id="12" name="TextBox 11"/>
+          <p:cNvSpPr txBox="1"/>
+          <p:nvPr/>
+        </p:nvSpPr>
+        <p:spPr>
+          <a:xfrm>
+            <a:off x="6654800" y="2590800"/>
+            <a:ext cx="4318000" cy="304800"/>
+          </a:xfrm>
+          <a:prstGeom prst="rect">
+            <a:avLst/>
+          </a:prstGeom>
+          <a:noFill/>
+        </p:spPr>
+        <p:txBody>
+          <a:bodyPr wrap="square" lIns="0" rIns="0" tIns="0" bIns="0">
+            <a:spAutoFit/>
+          </a:bodyPr>
+          <a:lstStyle/>
+          <a:p>
+            <a:pPr algn="l">
+              <a:lnSpc>
+                <a:spcPct val="135000"/>
+              </a:lnSpc>
+            </a:pPr>
+            <a:r>
+              <a:rPr sz="1600" b="0">
+                <a:solidFill>
+                  <a:srgbClr val="FFFFFF"/>
+                </a:solidFill>
+                <a:latin typeface="Inter"/>
+              </a:rPr>
+              <a:t>Discount for multi-year commitment</a:t>
+            </a:r>
+          </a:p>
+        </p:txBody>
+      </p:sp>
+      <p:sp>
+        <p:nvSpPr>
+          <p:cNvPr id="13" name="Rounded Rectangle 12"/>
+          <p:cNvSpPr/>
+          <p:nvPr/>
+        </p:nvSpPr>
+        <p:spPr>
+          <a:xfrm>
+            <a:off x="6121400" y="3162300"/>
+            <a:ext cx="355600" cy="355600"/>
+          </a:xfrm>
+          <a:prstGeom prst="roundRect">
+            <a:avLst>
+              <a:gd name="adj" fmla="val 25000"/>
+            </a:avLst>
+          </a:prstGeom>
+          <a:solidFill>
+            <a:srgbClr val="0A2C3B"/>
+          </a:solidFill>
+          <a:ln>
+            <a:noFill/>
+          </a:ln>
+          <a:effectLst/>
+        </p:spPr>
+        <p:style>
+          <a:lnRef idx="1">
+            <a:schemeClr val="accent1"/>
+          </a:lnRef>
+          <a:fillRef idx="3">
+            <a:schemeClr val="accent1"/>
+          </a:fillRef>
+          <a:effectRef idx="2">
+            <a:schemeClr val="accent1"/>
+          </a:effectRef>
+          <a:fontRef idx="minor">
+            <a:schemeClr val="lt1"/>
+          </a:fontRef>
+        </p:style>
+        <p:txBody>
+          <a:bodyPr rtlCol="0" anchor="ctr"/>
+          <a:lstStyle/>
+          <a:p>
+            <a:pPr algn="ctr"/>
+          </a:p>
+        </p:txBody>
+      </p:sp>
+      <p:pic>
+        <p:nvPicPr>
+          <p:cNvPr id="14" name="Picture 13" descr="icon-check-green.png"/>
+          <p:cNvPicPr>
+            <a:picLocks noChangeAspect="1"/>
+          </p:cNvPicPr>
+          <p:nvPr/>
+        </p:nvPicPr>
+        <p:blipFill>
+          <a:blip r:embed="rId2"/>
+          <a:stretch>
+            <a:fillRect/>
+          </a:stretch>
+        </p:blipFill>
+        <p:spPr>
+          <a:xfrm>
+            <a:off x="6210300" y="3251200"/>
+            <a:ext cx="177800" cy="177800"/>
+          </a:xfrm>
+          <a:prstGeom prst="rect">
+            <a:avLst/>
+          </a:prstGeom>
+        </p:spPr>
+      </p:pic>
+      <p:sp>
+        <p:nvSpPr>
+          <p:cNvPr id="15" name="TextBox 14"/>
+          <p:cNvSpPr txBox="1"/>
+          <p:nvPr/>
+        </p:nvSpPr>
+        <p:spPr>
+          <a:xfrm>
+            <a:off x="6654800" y="3200400"/>
+            <a:ext cx="4318000" cy="304800"/>
+          </a:xfrm>
+          <a:prstGeom prst="rect">
+            <a:avLst/>
+          </a:prstGeom>
+          <a:noFill/>
+        </p:spPr>
+        <p:txBody>
+          <a:bodyPr wrap="square" lIns="0" rIns="0" tIns="0" bIns="0">
+            <a:spAutoFit/>
+          </a:bodyPr>
+          <a:lstStyle/>
+          <a:p>
+            <a:pPr algn="l">
+              <a:lnSpc>
+                <a:spcPct val="135000"/>
+              </a:lnSpc>
+            </a:pPr>
+            <a:r>
+              <a:rPr sz="1600" b="0">
+                <a:solidFill>
+                  <a:srgbClr val="FFFFFF"/>
+                </a:solidFill>
+                <a:latin typeface="Inter"/>
+              </a:rPr>
+              <a:t>Scales with growing students &amp; instructors</a:t>
+            </a:r>
+          </a:p>
+        </p:txBody>
+      </p:sp>
+      <p:sp>
+        <p:nvSpPr>
+          <p:cNvPr id="16" name="Rectangle 15"/>
+          <p:cNvSpPr/>
+          <p:nvPr/>
+        </p:nvSpPr>
+        <p:spPr>
+          <a:xfrm>
+            <a:off x="762000" y="4673600"/>
+            <a:ext cx="10668000" cy="6350"/>
+          </a:xfrm>
+          <a:prstGeom prst="rect">
+            <a:avLst/>
+          </a:prstGeom>
+          <a:solidFill>
+            <a:srgbClr val="E7EEF0"/>
+          </a:solidFill>
+          <a:ln>
+            <a:noFill/>
+          </a:ln>
+          <a:effectLst/>
+        </p:spPr>
+        <p:style>
+          <a:lnRef idx="1">
+            <a:schemeClr val="accent1"/>
+          </a:lnRef>
+          <a:fillRef idx="3">
+            <a:schemeClr val="accent1"/>
+          </a:fillRef>
+          <a:effectRef idx="2">
+            <a:schemeClr val="accent1"/>
+          </a:effectRef>
+          <a:fontRef idx="minor">
+            <a:schemeClr val="lt1"/>
+          </a:fontRef>
+        </p:style>
+        <p:txBody>
+          <a:bodyPr rtlCol="0" anchor="ctr"/>
+          <a:lstStyle/>
+          <a:p>
+            <a:pPr algn="ctr"/>
+          </a:p>
+        </p:txBody>
+      </p:sp>
+      <p:sp>
+        <p:nvSpPr>
+          <p:cNvPr id="17" name="TextBox 16"/>
+          <p:cNvSpPr txBox="1"/>
+          <p:nvPr/>
+        </p:nvSpPr>
+        <p:spPr>
+          <a:xfrm>
+            <a:off x="762000" y="4826000"/>
+            <a:ext cx="3810000" cy="215900"/>
+          </a:xfrm>
+          <a:prstGeom prst="rect">
+            <a:avLst/>
+          </a:prstGeom>
+          <a:noFill/>
+        </p:spPr>
+        <p:txBody>
+          <a:bodyPr wrap="square" lIns="0" rIns="0" tIns="0" bIns="0">
+            <a:spAutoFit/>
+          </a:bodyPr>
+          <a:lstStyle/>
+          <a:p>
+            <a:pPr algn="l">
+              <a:lnSpc>
+                <a:spcPct val="120000"/>
+              </a:lnSpc>
+            </a:pPr>
+            <a:r>
+              <a:rPr sz="1200" b="0">
+                <a:solidFill>
+                  <a:srgbClr val="5B7480"/>
+                </a:solidFill>
+                <a:latin typeface="Inter"/>
+              </a:rPr>
+              <a:t>What that covers</a:t>
+            </a:r>
+          </a:p>
+        </p:txBody>
+      </p:sp>
+      <p:sp>
+        <p:nvSpPr>
+          <p:cNvPr id="18" name="Rounded Rectangle 17"/>
+          <p:cNvSpPr/>
+          <p:nvPr/>
+        </p:nvSpPr>
+        <p:spPr>
+          <a:xfrm>
+            <a:off x="762000" y="5207000"/>
+            <a:ext cx="457200" cy="457200"/>
+          </a:xfrm>
+          <a:prstGeom prst="roundRect">
+            <a:avLst>
+              <a:gd name="adj" fmla="val 22222"/>
+            </a:avLst>
+          </a:prstGeom>
+          <a:solidFill>
+            <a:srgbClr val="F3F7F8"/>
+          </a:solidFill>
+          <a:ln>
+            <a:noFill/>
+          </a:ln>
+          <a:effectLst/>
+        </p:spPr>
+        <p:style>
+          <a:lnRef idx="1">
+            <a:schemeClr val="accent1"/>
+          </a:lnRef>
+          <a:fillRef idx="3">
+            <a:schemeClr val="accent1"/>
+          </a:fillRef>
+          <a:effectRef idx="2">
+            <a:schemeClr val="accent1"/>
+          </a:effectRef>
+          <a:fontRef idx="minor">
+            <a:schemeClr val="lt1"/>
+          </a:fontRef>
+        </p:style>
+        <p:txBody>
+          <a:bodyPr rtlCol="0" anchor="ctr"/>
+          <a:lstStyle/>
+          <a:p>
+            <a:pPr algn="ctr"/>
+          </a:p>
+        </p:txBody>
+      </p:sp>
+      <p:pic>
+        <p:nvPicPr>
+          <p:cNvPr id="19" name="Picture 18" descr="icon-doel-navy.png"/>
+          <p:cNvPicPr>
+            <a:picLocks noChangeAspect="1"/>
+          </p:cNvPicPr>
+          <p:nvPr/>
+        </p:nvPicPr>
+        <p:blipFill>
+          <a:blip r:embed="rId3"/>
+          <a:stretch>
+            <a:fillRect/>
+          </a:stretch>
+        </p:blipFill>
+        <p:spPr>
+          <a:xfrm>
+            <a:off x="876300" y="5321300"/>
+            <a:ext cx="228600" cy="228600"/>
+          </a:xfrm>
+          <a:prstGeom prst="rect">
+            <a:avLst/>
+          </a:prstGeom>
+        </p:spPr>
+      </p:pic>
+      <p:sp>
+        <p:nvSpPr>
+          <p:cNvPr id="20" name="TextBox 19"/>
+          <p:cNvSpPr txBox="1"/>
+          <p:nvPr/>
+        </p:nvSpPr>
+        <p:spPr>
+          <a:xfrm>
+            <a:off x="1346200" y="5334000"/>
+            <a:ext cx="1854200" cy="254000"/>
+          </a:xfrm>
+          <a:prstGeom prst="rect">
+            <a:avLst/>
+          </a:prstGeom>
+          <a:noFill/>
+        </p:spPr>
+        <p:txBody>
+          <a:bodyPr wrap="square" lIns="0" rIns="0" tIns="0" bIns="0">
+            <a:spAutoFit/>
+          </a:bodyPr>
+          <a:lstStyle/>
+          <a:p>
+            <a:pPr algn="l">
+              <a:lnSpc>
+                <a:spcPct val="130000"/>
+              </a:lnSpc>
+            </a:pPr>
+            <a:r>
+              <a:rPr sz="1200" b="0">
+                <a:solidFill>
+                  <a:srgbClr val="5B7480"/>
+                </a:solidFill>
+                <a:latin typeface="Inter"/>
+              </a:rPr>
+              <a:t>Accuracy &amp; Consistency</a:t>
+            </a:r>
+          </a:p>
+        </p:txBody>
+      </p:sp>
+      <p:sp>
+        <p:nvSpPr>
+          <p:cNvPr id="21" name="Rounded Rectangle 20"/>
+          <p:cNvSpPr/>
+          <p:nvPr/>
+        </p:nvSpPr>
+        <p:spPr>
+          <a:xfrm>
+            <a:off x="3505200" y="5207000"/>
+            <a:ext cx="457200" cy="457200"/>
+          </a:xfrm>
+          <a:prstGeom prst="roundRect">
+            <a:avLst>
+              <a:gd name="adj" fmla="val 22222"/>
+            </a:avLst>
+          </a:prstGeom>
+          <a:solidFill>
+            <a:srgbClr val="F3F7F8"/>
+          </a:solidFill>
+          <a:ln>
+            <a:noFill/>
+          </a:ln>
+          <a:effectLst/>
+        </p:spPr>
+        <p:style>
+          <a:lnRef idx="1">
+            <a:schemeClr val="accent1"/>
+          </a:lnRef>
+          <a:fillRef idx="3">
+            <a:schemeClr val="accent1"/>
+          </a:fillRef>
+          <a:effectRef idx="2">
+            <a:schemeClr val="accent1"/>
+          </a:effectRef>
+          <a:fontRef idx="minor">
+            <a:schemeClr val="lt1"/>
+          </a:fontRef>
+        </p:style>
+        <p:txBody>
+          <a:bodyPr rtlCol="0" anchor="ctr"/>
+          <a:lstStyle/>
+          <a:p>
+            <a:pPr algn="ctr"/>
+          </a:p>
+        </p:txBody>
+      </p:sp>
+      <p:pic>
+        <p:nvPicPr>
+          <p:cNvPr id="22" name="Picture 21" descr="icon-sleutel-navy.png"/>
+          <p:cNvPicPr>
+            <a:picLocks noChangeAspect="1"/>
+          </p:cNvPicPr>
+          <p:nvPr/>
+        </p:nvPicPr>
+        <p:blipFill>
+          <a:blip r:embed="rId4"/>
+          <a:stretch>
+            <a:fillRect/>
+          </a:stretch>
+        </p:blipFill>
+        <p:spPr>
+          <a:xfrm>
+            <a:off x="3619500" y="5321300"/>
+            <a:ext cx="228600" cy="228600"/>
+          </a:xfrm>
+          <a:prstGeom prst="rect">
+            <a:avLst/>
+          </a:prstGeom>
+        </p:spPr>
+      </p:pic>
+      <p:sp>
+        <p:nvSpPr>
+          <p:cNvPr id="23" name="TextBox 22"/>
+          <p:cNvSpPr txBox="1"/>
+          <p:nvPr/>
+        </p:nvSpPr>
+        <p:spPr>
+          <a:xfrm>
+            <a:off x="4089400" y="5334000"/>
+            <a:ext cx="1854200" cy="254000"/>
+          </a:xfrm>
+          <a:prstGeom prst="rect">
+            <a:avLst/>
+          </a:prstGeom>
+          <a:noFill/>
+        </p:spPr>
+        <p:txBody>
+          <a:bodyPr wrap="square" lIns="0" rIns="0" tIns="0" bIns="0">
+            <a:spAutoFit/>
+          </a:bodyPr>
+          <a:lstStyle/>
+          <a:p>
+            <a:pPr algn="l">
+              <a:lnSpc>
+                <a:spcPct val="130000"/>
+              </a:lnSpc>
+            </a:pPr>
+            <a:r>
+              <a:rPr sz="1200" b="0">
+                <a:solidFill>
+                  <a:srgbClr val="5B7480"/>
+                </a:solidFill>
+                <a:latin typeface="Inter"/>
+              </a:rPr>
+              <a:t>Technical Domain Fit</a:t>
+            </a:r>
+          </a:p>
+        </p:txBody>
+      </p:sp>
+      <p:sp>
+        <p:nvSpPr>
+          <p:cNvPr id="24" name="Rounded Rectangle 23"/>
+          <p:cNvSpPr/>
+          <p:nvPr/>
+        </p:nvSpPr>
+        <p:spPr>
+          <a:xfrm>
+            <a:off x="6248400" y="5207000"/>
+            <a:ext cx="457200" cy="457200"/>
+          </a:xfrm>
+          <a:prstGeom prst="roundRect">
+            <a:avLst>
+              <a:gd name="adj" fmla="val 22222"/>
+            </a:avLst>
+          </a:prstGeom>
+          <a:solidFill>
+            <a:srgbClr val="F3F7F8"/>
+          </a:solidFill>
+          <a:ln>
+            <a:noFill/>
+          </a:ln>
+          <a:effectLst/>
+        </p:spPr>
+        <p:style>
+          <a:lnRef idx="1">
+            <a:schemeClr val="accent1"/>
+          </a:lnRef>
+          <a:fillRef idx="3">
+            <a:schemeClr val="accent1"/>
+          </a:fillRef>
+          <a:effectRef idx="2">
+            <a:schemeClr val="accent1"/>
+          </a:effectRef>
+          <a:fontRef idx="minor">
+            <a:schemeClr val="lt1"/>
+          </a:fontRef>
+        </p:style>
+        <p:txBody>
+          <a:bodyPr rtlCol="0" anchor="ctr"/>
+          <a:lstStyle/>
+          <a:p>
+            <a:pPr algn="ctr"/>
+          </a:p>
+        </p:txBody>
+      </p:sp>
+      <p:pic>
+        <p:nvPicPr>
+          <p:cNvPr id="25" name="Picture 24" descr="icon-instelling-navy.png"/>
+          <p:cNvPicPr>
+            <a:picLocks noChangeAspect="1"/>
+          </p:cNvPicPr>
+          <p:nvPr/>
+        </p:nvPicPr>
+        <p:blipFill>
+          <a:blip r:embed="rId5"/>
+          <a:stretch>
+            <a:fillRect/>
+          </a:stretch>
+        </p:blipFill>
+        <p:spPr>
+          <a:xfrm>
+            <a:off x="6362700" y="5321300"/>
+            <a:ext cx="228600" cy="228600"/>
+          </a:xfrm>
+          <a:prstGeom prst="rect">
+            <a:avLst/>
+          </a:prstGeom>
+        </p:spPr>
+      </p:pic>
+      <p:sp>
+        <p:nvSpPr>
+          <p:cNvPr id="26" name="TextBox 25"/>
+          <p:cNvSpPr txBox="1"/>
+          <p:nvPr/>
+        </p:nvSpPr>
+        <p:spPr>
+          <a:xfrm>
+            <a:off x="6832600" y="5334000"/>
+            <a:ext cx="1854200" cy="254000"/>
+          </a:xfrm>
+          <a:prstGeom prst="rect">
+            <a:avLst/>
+          </a:prstGeom>
+          <a:noFill/>
+        </p:spPr>
+        <p:txBody>
+          <a:bodyPr wrap="square" lIns="0" rIns="0" tIns="0" bIns="0">
+            <a:spAutoFit/>
+          </a:bodyPr>
+          <a:lstStyle/>
+          <a:p>
+            <a:pPr algn="l">
+              <a:lnSpc>
+                <a:spcPct val="130000"/>
+              </a:lnSpc>
+            </a:pPr>
+            <a:r>
+              <a:rPr sz="1200" b="0">
+                <a:solidFill>
+                  <a:srgbClr val="5B7480"/>
+                </a:solidFill>
+                <a:latin typeface="Inter"/>
+              </a:rPr>
+              <a:t>Institution-Wide</a:t>
+            </a:r>
+          </a:p>
+        </p:txBody>
+      </p:sp>
+      <p:sp>
+        <p:nvSpPr>
+          <p:cNvPr id="27" name="Rounded Rectangle 26"/>
+          <p:cNvSpPr/>
+          <p:nvPr/>
+        </p:nvSpPr>
+        <p:spPr>
+          <a:xfrm>
+            <a:off x="8991600" y="5207000"/>
+            <a:ext cx="457200" cy="457200"/>
+          </a:xfrm>
+          <a:prstGeom prst="roundRect">
+            <a:avLst>
+              <a:gd name="adj" fmla="val 22222"/>
+            </a:avLst>
+          </a:prstGeom>
+          <a:solidFill>
+            <a:srgbClr val="F3F7F8"/>
+          </a:solidFill>
+          <a:ln>
+            <a:noFill/>
+          </a:ln>
+          <a:effectLst/>
+        </p:spPr>
+        <p:style>
+          <a:lnRef idx="1">
+            <a:schemeClr val="accent1"/>
+          </a:lnRef>
+          <a:fillRef idx="3">
+            <a:schemeClr val="accent1"/>
+          </a:fillRef>
+          <a:effectRef idx="2">
+            <a:schemeClr val="accent1"/>
+          </a:effectRef>
+          <a:fontRef idx="minor">
+            <a:schemeClr val="lt1"/>
+          </a:fontRef>
+        </p:style>
+        <p:txBody>
+          <a:bodyPr rtlCol="0" anchor="ctr"/>
+          <a:lstStyle/>
+          <a:p>
+            <a:pPr algn="ctr"/>
+          </a:p>
+        </p:txBody>
+      </p:sp>
+      <p:pic>
+        <p:nvPicPr>
+          <p:cNvPr id="28" name="Picture 27" descr="icon-schuifjes-navy.png"/>
+          <p:cNvPicPr>
+            <a:picLocks noChangeAspect="1"/>
+          </p:cNvPicPr>
+          <p:nvPr/>
+        </p:nvPicPr>
+        <p:blipFill>
+          <a:blip r:embed="rId6"/>
+          <a:stretch>
+            <a:fillRect/>
+          </a:stretch>
+        </p:blipFill>
+        <p:spPr>
+          <a:xfrm>
+            <a:off x="9105900" y="5321300"/>
+            <a:ext cx="228600" cy="228600"/>
+          </a:xfrm>
+          <a:prstGeom prst="rect">
+            <a:avLst/>
+          </a:prstGeom>
+        </p:spPr>
+      </p:pic>
+      <p:sp>
+        <p:nvSpPr>
+          <p:cNvPr id="29" name="TextBox 28"/>
+          <p:cNvSpPr txBox="1"/>
+          <p:nvPr/>
+        </p:nvSpPr>
+        <p:spPr>
+          <a:xfrm>
+            <a:off x="9575800" y="5334000"/>
+            <a:ext cx="1854200" cy="254000"/>
+          </a:xfrm>
+          <a:prstGeom prst="rect">
+            <a:avLst/>
+          </a:prstGeom>
+          <a:noFill/>
+        </p:spPr>
+        <p:txBody>
+          <a:bodyPr wrap="square" lIns="0" rIns="0" tIns="0" bIns="0">
+            <a:spAutoFit/>
+          </a:bodyPr>
+          <a:lstStyle/>
+          <a:p>
+            <a:pPr algn="l">
+              <a:lnSpc>
+                <a:spcPct val="130000"/>
+              </a:lnSpc>
+            </a:pPr>
+            <a:r>
+              <a:rPr sz="1200" b="0">
+                <a:solidFill>
+                  <a:srgbClr val="5B7480"/>
+                </a:solidFill>
+                <a:latin typeface="Inter"/>
+              </a:rPr>
+              <a:t>Self-Configuring</a:t>
+            </a:r>
+          </a:p>
+        </p:txBody>
+      </p:sp>
+      <p:sp>
+        <p:nvSpPr>
+          <p:cNvPr id="30" name="Rectangle 29"/>
+          <p:cNvSpPr/>
+          <p:nvPr/>
+        </p:nvSpPr>
+        <p:spPr>
+          <a:xfrm>
+            <a:off x="762000" y="6045200"/>
+            <a:ext cx="10668000" cy="6350"/>
+          </a:xfrm>
+          <a:prstGeom prst="rect">
+            <a:avLst/>
+          </a:prstGeom>
+          <a:solidFill>
+            <a:srgbClr val="E7EEF0"/>
+          </a:solidFill>
+          <a:ln>
+            <a:noFill/>
+          </a:ln>
+          <a:effectLst/>
+        </p:spPr>
+        <p:style>
+          <a:lnRef idx="1">
+            <a:schemeClr val="accent1"/>
+          </a:lnRef>
+          <a:fillRef idx="3">
+            <a:schemeClr val="accent1"/>
+          </a:fillRef>
+          <a:effectRef idx="2">
+            <a:schemeClr val="accent1"/>
+          </a:effectRef>
+          <a:fontRef idx="minor">
+            <a:schemeClr val="lt1"/>
+          </a:fontRef>
+        </p:style>
+        <p:txBody>
+          <a:bodyPr rtlCol="0" anchor="ctr"/>
+          <a:lstStyle/>
+          <a:p>
+            <a:pPr algn="ctr"/>
+          </a:p>
+        </p:txBody>
+      </p:sp>
+      <p:pic>
+        <p:nvPicPr>
+          <p:cNvPr id="31" name="Picture 30" descr="logo_navy.png"/>
+          <p:cNvPicPr>
+            <a:picLocks noChangeAspect="1"/>
+          </p:cNvPicPr>
+          <p:nvPr/>
+        </p:nvPicPr>
+        <p:blipFill>
+          <a:blip r:embed="rId7"/>
+          <a:stretch>
+            <a:fillRect/>
+          </a:stretch>
+        </p:blipFill>
+        <p:spPr>
+          <a:xfrm>
+            <a:off x="762000" y="6324600"/>
+            <a:ext cx="937957" cy="254000"/>
+          </a:xfrm>
+          <a:prstGeom prst="rect">
+            <a:avLst/>
+          </a:prstGeom>
+        </p:spPr>
+      </p:pic>
+      <p:sp>
+        <p:nvSpPr>
+          <p:cNvPr id="32" name="Rectangle 31"/>
+          <p:cNvSpPr/>
+          <p:nvPr/>
+        </p:nvSpPr>
+        <p:spPr>
+          <a:xfrm>
+            <a:off x="1968500" y="6311900"/>
+            <a:ext cx="6350" cy="279400"/>
+          </a:xfrm>
+          <a:prstGeom prst="rect">
+            <a:avLst/>
+          </a:prstGeom>
+          <a:solidFill>
+            <a:srgbClr val="CDD9DE"/>
+          </a:solidFill>
+          <a:ln>
+            <a:noFill/>
+          </a:ln>
+          <a:effectLst/>
+        </p:spPr>
+        <p:style>
+          <a:lnRef idx="1">
+            <a:schemeClr val="accent1"/>
+          </a:lnRef>
+          <a:fillRef idx="3">
+            <a:schemeClr val="accent1"/>
+          </a:fillRef>
+          <a:effectRef idx="2">
+            <a:schemeClr val="accent1"/>
+          </a:effectRef>
+          <a:fontRef idx="minor">
+            <a:schemeClr val="lt1"/>
+          </a:fontRef>
+        </p:style>
+        <p:txBody>
+          <a:bodyPr rtlCol="0" anchor="ctr"/>
+          <a:lstStyle/>
+          <a:p>
+            <a:pPr algn="ctr"/>
+          </a:p>
+        </p:txBody>
+      </p:sp>
+      <p:pic>
+        <p:nvPicPr>
+          <p:cNvPr id="33" name="Picture 32" descr="uti-logo.png"/>
+          <p:cNvPicPr>
+            <a:picLocks noChangeAspect="1"/>
+          </p:cNvPicPr>
+          <p:nvPr/>
+        </p:nvPicPr>
+        <p:blipFill>
+          <a:blip r:embed="rId8"/>
+          <a:stretch>
+            <a:fillRect/>
+          </a:stretch>
+        </p:blipFill>
+        <p:spPr>
+          <a:xfrm>
+            <a:off x="2222500" y="6273800"/>
+            <a:ext cx="774246" cy="355600"/>
+          </a:xfrm>
+          <a:prstGeom prst="rect">
+            <a:avLst/>
+          </a:prstGeom>
+        </p:spPr>
+      </p:pic>
+      <p:sp>
+        <p:nvSpPr>
+          <p:cNvPr id="34" name="TextBox 33"/>
+          <p:cNvSpPr txBox="1"/>
+          <p:nvPr/>
+        </p:nvSpPr>
+        <p:spPr>
+          <a:xfrm>
+            <a:off x="10922000" y="6375400"/>
+            <a:ext cx="508000" cy="228600"/>
+          </a:xfrm>
+          <a:prstGeom prst="rect">
+            <a:avLst/>
+          </a:prstGeom>
+          <a:noFill/>
+        </p:spPr>
+        <p:txBody>
+          <a:bodyPr wrap="square" lIns="0" rIns="0" tIns="0" bIns="0">
+            <a:spAutoFit/>
+          </a:bodyPr>
+          <a:lstStyle/>
+          <a:p>
+            <a:pPr algn="r">
+              <a:lnSpc>
+                <a:spcPct val="115000"/>
+              </a:lnSpc>
+            </a:pPr>
+            <a:r>
+              <a:rPr sz="1200" b="0">
+                <a:solidFill>
+                  <a:srgbClr val="5B7480"/>
+                </a:solidFill>
+                <a:latin typeface="Inter"/>
+              </a:rPr>
+              <a:t>15</a:t>
+            </a:r>
+          </a:p>
+        </p:txBody>
+      </p:sp>
+    </p:spTree>
+  </p:cSld>
+  <p:clrMapOvr>
+    <a:masterClrMapping/>
+  </p:clrMapOvr>
+</p:sld>
+</file>
+
+<file path=ppt/slides/slide16.xml><?xml version="1.0" encoding="utf-8"?>
+<p:sld xmlns:a="http://schemas.openxmlformats.org/drawingml/2006/main" xmlns:p="http://schemas.openxmlformats.org/presentationml/2006/main" xmlns:r="http://schemas.openxmlformats.org/officeDocument/2006/relationships">
+  <p:cSld>
+    <p:spTree>
+      <p:nvGrpSpPr>
+        <p:cNvPr id="1" name=""/>
+        <p:cNvGrpSpPr/>
+        <p:nvPr/>
+      </p:nvGrpSpPr>
+      <p:grpSpPr/>
+      <p:sp>
+        <p:nvSpPr>
+          <p:cNvPr id="2" name="Rectangle 1"/>
+          <p:cNvSpPr/>
+          <p:nvPr/>
+        </p:nvSpPr>
+        <p:spPr>
+          <a:xfrm>
+            <a:off x="0" y="0"/>
+            <a:ext cx="12192000" cy="6858000"/>
+          </a:xfrm>
+          <a:prstGeom prst="rect">
+            <a:avLst/>
+          </a:prstGeom>
+          <a:solidFill>
+            <a:srgbClr val="002333"/>
+          </a:solidFill>
+          <a:ln>
+            <a:noFill/>
+          </a:ln>
+          <a:effectLst/>
+        </p:spPr>
+        <p:style>
+          <a:lnRef idx="1">
+            <a:schemeClr val="accent1"/>
+          </a:lnRef>
+          <a:fillRef idx="3">
+            <a:schemeClr val="accent1"/>
+          </a:fillRef>
+          <a:effectRef idx="2">
+            <a:schemeClr val="accent1"/>
+          </a:effectRef>
+          <a:fontRef idx="minor">
+            <a:schemeClr val="lt1"/>
+          </a:fontRef>
+        </p:style>
+        <p:txBody>
+          <a:bodyPr rtlCol="0" anchor="ctr"/>
+          <a:lstStyle/>
+          <a:p>
+            <a:pPr algn="ctr"/>
+          </a:p>
+        </p:txBody>
+      </p:sp>
+      <p:sp>
+        <p:nvSpPr>
+          <p:cNvPr id="3" name="TextBox 2"/>
+          <p:cNvSpPr txBox="1"/>
+          <p:nvPr/>
+        </p:nvSpPr>
+        <p:spPr>
+          <a:xfrm>
+            <a:off x="762000" y="558800"/>
+            <a:ext cx="10668000" cy="627380"/>
+          </a:xfrm>
+          <a:prstGeom prst="rect">
+            <a:avLst/>
+          </a:prstGeom>
+          <a:noFill/>
+        </p:spPr>
+        <p:txBody>
+          <a:bodyPr wrap="square" lIns="0" rIns="0" tIns="0" bIns="0">
+            <a:spAutoFit/>
+          </a:bodyPr>
+          <a:lstStyle/>
+          <a:p>
+            <a:pPr algn="l">
+              <a:lnSpc>
+                <a:spcPct val="104000"/>
+              </a:lnSpc>
+            </a:pPr>
+            <a:r>
+              <a:rPr sz="3800" b="1">
+                <a:solidFill>
+                  <a:srgbClr val="FFFFFF"/>
+                </a:solidFill>
+                <a:latin typeface="League Spartan"/>
+              </a:rPr>
+              <a:t>Proposed Next Steps</a:t>
+            </a:r>
+          </a:p>
+        </p:txBody>
+      </p:sp>
+      <p:sp>
+        <p:nvSpPr>
+          <p:cNvPr id="4" name="Rectangle 3"/>
+          <p:cNvSpPr/>
+          <p:nvPr/>
+        </p:nvSpPr>
+        <p:spPr>
+          <a:xfrm>
+            <a:off x="1466850" y="2070100"/>
+            <a:ext cx="12700" cy="3251200"/>
+          </a:xfrm>
+          <a:prstGeom prst="rect">
+            <a:avLst/>
+          </a:prstGeom>
+          <a:solidFill>
+            <a:srgbClr val="1F3D4B"/>
+          </a:solidFill>
+          <a:ln>
+            <a:noFill/>
+          </a:ln>
+          <a:effectLst/>
+        </p:spPr>
+        <p:style>
+          <a:lnRef idx="1">
+            <a:schemeClr val="accent1"/>
+          </a:lnRef>
+          <a:fillRef idx="3">
+            <a:schemeClr val="accent1"/>
+          </a:fillRef>
+          <a:effectRef idx="2">
+            <a:schemeClr val="accent1"/>
+          </a:effectRef>
+          <a:fontRef idx="minor">
+            <a:schemeClr val="lt1"/>
+          </a:fontRef>
+        </p:style>
+        <p:txBody>
+          <a:bodyPr rtlCol="0" anchor="ctr"/>
+          <a:lstStyle/>
+          <a:p>
+            <a:pPr algn="ctr"/>
+          </a:p>
+        </p:txBody>
+      </p:sp>
+      <p:sp>
+        <p:nvSpPr>
           <p:cNvPr id="5" name="Rounded Rectangle 4"/>
           <p:cNvSpPr/>
           <p:nvPr/>
@@ -10644,7 +10967,7 @@
                 </a:solidFill>
                 <a:latin typeface="Inter"/>
               </a:rPr>
-              <a:t>15</a:t>
+              <a:t>16</a:t>
             </a:r>
           </a:p>
         </p:txBody>
@@ -11511,7 +11834,7 @@
                 </a:solidFill>
                 <a:latin typeface="Inter"/>
               </a:rPr>
-              <a:t>Proven Results</a:t>
+              <a:t>Demo</a:t>
             </a:r>
           </a:p>
         </p:txBody>
@@ -11633,7 +11956,7 @@
                 </a:solidFill>
                 <a:latin typeface="Inter"/>
               </a:rPr>
-              <a:t>Our Solution</a:t>
+              <a:t>Proven Results</a:t>
             </a:r>
           </a:p>
         </p:txBody>
@@ -11755,7 +12078,7 @@
                 </a:solidFill>
                 <a:latin typeface="Inter"/>
               </a:rPr>
-              <a:t>Next Steps</a:t>
+              <a:t>Our Solution</a:t>
             </a:r>
           </a:p>
         </p:txBody>
@@ -11768,8 +12091,8 @@
         </p:nvSpPr>
         <p:spPr>
           <a:xfrm>
-            <a:off x="762000" y="6045200"/>
-            <a:ext cx="10668000" cy="6350"/>
+            <a:off x="6985000" y="4622800"/>
+            <a:ext cx="4445000" cy="6350"/>
           </a:xfrm>
           <a:prstGeom prst="rect">
             <a:avLst/>
@@ -11804,9 +12127,131 @@
           </a:p>
         </p:txBody>
       </p:sp>
+      <p:sp>
+        <p:nvSpPr>
+          <p:cNvPr id="30" name="TextBox 29"/>
+          <p:cNvSpPr txBox="1"/>
+          <p:nvPr/>
+        </p:nvSpPr>
+        <p:spPr>
+          <a:xfrm>
+            <a:off x="6985000" y="4997450"/>
+            <a:ext cx="381000" cy="215900"/>
+          </a:xfrm>
+          <a:prstGeom prst="rect">
+            <a:avLst/>
+          </a:prstGeom>
+          <a:noFill/>
+        </p:spPr>
+        <p:txBody>
+          <a:bodyPr wrap="square" lIns="0" rIns="0" tIns="0" bIns="0">
+            <a:spAutoFit/>
+          </a:bodyPr>
+          <a:lstStyle/>
+          <a:p>
+            <a:pPr algn="l">
+              <a:lnSpc>
+                <a:spcPct val="100000"/>
+              </a:lnSpc>
+            </a:pPr>
+            <a:r>
+              <a:rPr sz="1200" b="0">
+                <a:solidFill>
+                  <a:srgbClr val="5B7480"/>
+                </a:solidFill>
+                <a:latin typeface="League Spartan"/>
+              </a:rPr>
+              <a:t>10</a:t>
+            </a:r>
+          </a:p>
+        </p:txBody>
+      </p:sp>
+      <p:sp>
+        <p:nvSpPr>
+          <p:cNvPr id="31" name="TextBox 30"/>
+          <p:cNvSpPr txBox="1"/>
+          <p:nvPr/>
+        </p:nvSpPr>
+        <p:spPr>
+          <a:xfrm>
+            <a:off x="7442200" y="4940300"/>
+            <a:ext cx="3987800" cy="304800"/>
+          </a:xfrm>
+          <a:prstGeom prst="rect">
+            <a:avLst/>
+          </a:prstGeom>
+          <a:noFill/>
+        </p:spPr>
+        <p:txBody>
+          <a:bodyPr wrap="square" lIns="0" rIns="0" tIns="0" bIns="0">
+            <a:spAutoFit/>
+          </a:bodyPr>
+          <a:lstStyle/>
+          <a:p>
+            <a:pPr algn="l">
+              <a:lnSpc>
+                <a:spcPct val="120000"/>
+              </a:lnSpc>
+            </a:pPr>
+            <a:r>
+              <a:rPr sz="1600" b="0">
+                <a:solidFill>
+                  <a:srgbClr val="002333"/>
+                </a:solidFill>
+                <a:latin typeface="Inter"/>
+              </a:rPr>
+              <a:t>Next Steps</a:t>
+            </a:r>
+          </a:p>
+        </p:txBody>
+      </p:sp>
+      <p:sp>
+        <p:nvSpPr>
+          <p:cNvPr id="32" name="Rectangle 31"/>
+          <p:cNvSpPr/>
+          <p:nvPr/>
+        </p:nvSpPr>
+        <p:spPr>
+          <a:xfrm>
+            <a:off x="762000" y="6045200"/>
+            <a:ext cx="10668000" cy="6350"/>
+          </a:xfrm>
+          <a:prstGeom prst="rect">
+            <a:avLst/>
+          </a:prstGeom>
+          <a:solidFill>
+            <a:srgbClr val="E7EEF0"/>
+          </a:solidFill>
+          <a:ln>
+            <a:noFill/>
+          </a:ln>
+          <a:effectLst/>
+        </p:spPr>
+        <p:style>
+          <a:lnRef idx="1">
+            <a:schemeClr val="accent1"/>
+          </a:lnRef>
+          <a:fillRef idx="3">
+            <a:schemeClr val="accent1"/>
+          </a:fillRef>
+          <a:effectRef idx="2">
+            <a:schemeClr val="accent1"/>
+          </a:effectRef>
+          <a:fontRef idx="minor">
+            <a:schemeClr val="lt1"/>
+          </a:fontRef>
+        </p:style>
+        <p:txBody>
+          <a:bodyPr rtlCol="0" anchor="ctr"/>
+          <a:lstStyle/>
+          <a:p>
+            <a:pPr algn="ctr"/>
+          </a:p>
+        </p:txBody>
+      </p:sp>
       <p:pic>
         <p:nvPicPr>
-          <p:cNvPr id="30" name="Picture 29" descr="logo_navy.png"/>
+          <p:cNvPr id="33" name="Picture 32" descr="logo_navy.png"/>
           <p:cNvPicPr>
             <a:picLocks noChangeAspect="1"/>
           </p:cNvPicPr>
@@ -11830,7 +12275,7 @@
       </p:pic>
       <p:sp>
         <p:nvSpPr>
-          <p:cNvPr id="31" name="Rectangle 30"/>
+          <p:cNvPr id="34" name="Rectangle 33"/>
           <p:cNvSpPr/>
           <p:nvPr/>
         </p:nvSpPr>
@@ -11874,7 +12319,7 @@
       </p:sp>
       <p:pic>
         <p:nvPicPr>
-          <p:cNvPr id="32" name="Picture 31" descr="uti-logo.png"/>
+          <p:cNvPr id="35" name="Picture 34" descr="uti-logo.png"/>
           <p:cNvPicPr>
             <a:picLocks noChangeAspect="1"/>
           </p:cNvPicPr>
@@ -11898,7 +12343,7 @@
       </p:pic>
       <p:sp>
         <p:nvSpPr>
-          <p:cNvPr id="33" name="TextBox 32"/>
+          <p:cNvPr id="36" name="TextBox 35"/>
           <p:cNvSpPr txBox="1"/>
           <p:nvPr/>
         </p:nvSpPr>

--- a/projects/uti/deck/UTI-Eduface-deck.pptx
+++ b/projects/uti/deck/UTI-Eduface-deck.pptx
@@ -9661,8 +9661,8 @@
         </p:nvSpPr>
         <p:spPr>
           <a:xfrm>
-            <a:off x="1466850" y="2070100"/>
-            <a:ext cx="12700" cy="3251200"/>
+            <a:off x="1619250" y="2540000"/>
+            <a:ext cx="12700" cy="2540000"/>
           </a:xfrm>
           <a:prstGeom prst="rect">
             <a:avLst/>
@@ -9705,16 +9705,16 @@
         </p:nvSpPr>
         <p:spPr>
           <a:xfrm>
-            <a:off x="1219200" y="1816100"/>
-            <a:ext cx="508000" cy="508000"/>
+            <a:off x="1270000" y="2184400"/>
+            <a:ext cx="711200" cy="711200"/>
           </a:xfrm>
           <a:prstGeom prst="roundRect">
             <a:avLst>
-              <a:gd name="adj" fmla="val 22500"/>
+              <a:gd name="adj" fmla="val 19642"/>
             </a:avLst>
           </a:prstGeom>
           <a:solidFill>
-            <a:srgbClr val="00E075"/>
+            <a:srgbClr val="0A2C3B"/>
           </a:solidFill>
           <a:ln>
             <a:noFill/>
@@ -9745,7 +9745,7 @@
       </p:sp>
       <p:pic>
         <p:nvPicPr>
-          <p:cNvPr id="6" name="Picture 5" descr="icon-mensen-navy.png"/>
+          <p:cNvPr id="6" name="Picture 5" descr="icon-vlag-green.png"/>
           <p:cNvPicPr>
             <a:picLocks noChangeAspect="1"/>
           </p:cNvPicPr>
@@ -9759,8 +9759,8 @@
         </p:blipFill>
         <p:spPr>
           <a:xfrm>
-            <a:off x="1346200" y="1943100"/>
-            <a:ext cx="254000" cy="254000"/>
+            <a:off x="1447800" y="2362200"/>
+            <a:ext cx="355600" cy="355600"/>
           </a:xfrm>
           <a:prstGeom prst="rect">
             <a:avLst/>
@@ -9775,8 +9775,8 @@
         </p:nvSpPr>
         <p:spPr>
           <a:xfrm>
-            <a:off x="762000" y="1955800"/>
-            <a:ext cx="355600" cy="228600"/>
+            <a:off x="762000" y="2400300"/>
+            <a:ext cx="406400" cy="279400"/>
           </a:xfrm>
           <a:prstGeom prst="rect">
             <a:avLst/>
@@ -9795,9 +9795,9 @@
               </a:lnSpc>
             </a:pPr>
             <a:r>
-              <a:rPr sz="1200" b="0">
-                <a:solidFill>
-                  <a:srgbClr val="00E075"/>
+              <a:rPr sz="1600" b="0">
+                <a:solidFill>
+                  <a:srgbClr val="9EABB1"/>
                 </a:solidFill>
                 <a:latin typeface="League Spartan"/>
               </a:rPr>
@@ -9814,8 +9814,8 @@
         </p:nvSpPr>
         <p:spPr>
           <a:xfrm>
-            <a:off x="1981200" y="1765300"/>
-            <a:ext cx="2159000" cy="528320"/>
+            <a:off x="2235200" y="2095500"/>
+            <a:ext cx="2794000" cy="726440"/>
           </a:xfrm>
           <a:prstGeom prst="rect">
             <a:avLst/>
@@ -9830,33 +9830,33 @@
           <a:p>
             <a:pPr algn="l">
               <a:lnSpc>
-                <a:spcPct val="120000"/>
-              </a:lnSpc>
-            </a:pPr>
-            <a:r>
-              <a:rPr sz="1600" b="1">
+                <a:spcPct val="118000"/>
+              </a:lnSpc>
+            </a:pPr>
+            <a:r>
+              <a:rPr sz="2200" b="1">
                 <a:solidFill>
                   <a:srgbClr val="FFFFFF"/>
                 </a:solidFill>
                 <a:latin typeface="League Spartan"/>
               </a:rPr>
-              <a:t>Confirm Priority</a:t>
+              <a:t>Pilot the</a:t>
             </a:r>
           </a:p>
           <a:p>
             <a:pPr algn="l">
               <a:lnSpc>
-                <a:spcPct val="120000"/>
-              </a:lnSpc>
-            </a:pPr>
-            <a:r>
-              <a:rPr sz="1600" b="1">
+                <a:spcPct val="118000"/>
+              </a:lnSpc>
+            </a:pPr>
+            <a:r>
+              <a:rPr sz="2200" b="1">
                 <a:solidFill>
                   <a:srgbClr val="FFFFFF"/>
                 </a:solidFill>
                 <a:latin typeface="League Spartan"/>
               </a:rPr>
-              <a:t>and Budget</a:t>
+              <a:t>Start Group</a:t>
             </a:r>
           </a:p>
         </p:txBody>
@@ -9869,8 +9869,8 @@
         </p:nvSpPr>
         <p:spPr>
           <a:xfrm>
-            <a:off x="4445000" y="1765300"/>
-            <a:ext cx="6985000" cy="528320"/>
+            <a:off x="5334000" y="2120900"/>
+            <a:ext cx="6096000" cy="650240"/>
           </a:xfrm>
           <a:prstGeom prst="rect">
             <a:avLst/>
@@ -9895,7 +9895,7 @@
                 </a:solidFill>
                 <a:latin typeface="Inter"/>
               </a:rPr>
-              <a:t>Gauge with the Executive Board whether this is a priority now.</a:t>
+              <a:t>Launch with a self-scaling license. On-site instructor training support from the Eduface team at pilot start. Target launch December 2026.</a:t>
             </a:r>
           </a:p>
         </p:txBody>
@@ -9908,12 +9908,12 @@
         </p:nvSpPr>
         <p:spPr>
           <a:xfrm>
-            <a:off x="1219200" y="2628900"/>
-            <a:ext cx="508000" cy="508000"/>
+            <a:off x="1270000" y="3454400"/>
+            <a:ext cx="711200" cy="711200"/>
           </a:xfrm>
           <a:prstGeom prst="roundRect">
             <a:avLst>
-              <a:gd name="adj" fmla="val 22500"/>
+              <a:gd name="adj" fmla="val 19642"/>
             </a:avLst>
           </a:prstGeom>
           <a:solidFill>
@@ -9948,7 +9948,7 @@
       </p:sp>
       <p:pic>
         <p:nvPicPr>
-          <p:cNvPr id="11" name="Picture 10" descr="icon-globe-green.png"/>
+          <p:cNvPr id="11" name="Picture 10" descr="icon-route-green.png"/>
           <p:cNvPicPr>
             <a:picLocks noChangeAspect="1"/>
           </p:cNvPicPr>
@@ -9962,8 +9962,8 @@
         </p:blipFill>
         <p:spPr>
           <a:xfrm>
-            <a:off x="1346200" y="2755900"/>
-            <a:ext cx="254000" cy="254000"/>
+            <a:off x="1447800" y="3632200"/>
+            <a:ext cx="355600" cy="355600"/>
           </a:xfrm>
           <a:prstGeom prst="rect">
             <a:avLst/>
@@ -9978,8 +9978,8 @@
         </p:nvSpPr>
         <p:spPr>
           <a:xfrm>
-            <a:off x="762000" y="2768600"/>
-            <a:ext cx="355600" cy="228600"/>
+            <a:off x="762000" y="3670300"/>
+            <a:ext cx="406400" cy="279400"/>
           </a:xfrm>
           <a:prstGeom prst="rect">
             <a:avLst/>
@@ -9998,7 +9998,7 @@
               </a:lnSpc>
             </a:pPr>
             <a:r>
-              <a:rPr sz="1200" b="0">
+              <a:rPr sz="1600" b="0">
                 <a:solidFill>
                   <a:srgbClr val="9EABB1"/>
                 </a:solidFill>
@@ -10017,8 +10017,8 @@
         </p:nvSpPr>
         <p:spPr>
           <a:xfrm>
-            <a:off x="1981200" y="2578100"/>
-            <a:ext cx="2159000" cy="528320"/>
+            <a:off x="2235200" y="3365500"/>
+            <a:ext cx="2794000" cy="726440"/>
           </a:xfrm>
           <a:prstGeom prst="rect">
             <a:avLst/>
@@ -10033,33 +10033,33 @@
           <a:p>
             <a:pPr algn="l">
               <a:lnSpc>
-                <a:spcPct val="120000"/>
-              </a:lnSpc>
-            </a:pPr>
-            <a:r>
-              <a:rPr sz="1600" b="1">
+                <a:spcPct val="118000"/>
+              </a:lnSpc>
+            </a:pPr>
+            <a:r>
+              <a:rPr sz="2200" b="1">
                 <a:solidFill>
                   <a:srgbClr val="FFFFFF"/>
                 </a:solidFill>
                 <a:latin typeface="League Spartan"/>
               </a:rPr>
-              <a:t>Validate</a:t>
+              <a:t>Programmatic</a:t>
             </a:r>
           </a:p>
           <a:p>
             <a:pPr algn="l">
               <a:lnSpc>
-                <a:spcPct val="120000"/>
-              </a:lnSpc>
-            </a:pPr>
-            <a:r>
-              <a:rPr sz="1600" b="1">
+                <a:spcPct val="118000"/>
+              </a:lnSpc>
+            </a:pPr>
+            <a:r>
+              <a:rPr sz="2200" b="1">
                 <a:solidFill>
                   <a:srgbClr val="FFFFFF"/>
                 </a:solidFill>
                 <a:latin typeface="League Spartan"/>
               </a:rPr>
-              <a:t>in the U.S.</a:t>
+              <a:t>Expansion</a:t>
             </a:r>
           </a:p>
         </p:txBody>
@@ -10072,8 +10072,8 @@
         </p:nvSpPr>
         <p:spPr>
           <a:xfrm>
-            <a:off x="4445000" y="2578100"/>
-            <a:ext cx="6985000" cy="528320"/>
+            <a:off x="5334000" y="3390900"/>
+            <a:ext cx="6096000" cy="650240"/>
           </a:xfrm>
           <a:prstGeom prst="rect">
             <a:avLst/>
@@ -10098,7 +10098,7 @@
                 </a:solidFill>
                 <a:latin typeface="Inter"/>
               </a:rPr>
-              <a:t>On-site with instructors, students, and leadership. Legal and IT validation, approximately one month or more.</a:t>
+              <a:t>Roll out to additional program(s) following pilot success.</a:t>
             </a:r>
           </a:p>
         </p:txBody>
@@ -10111,12 +10111,12 @@
         </p:nvSpPr>
         <p:spPr>
           <a:xfrm>
-            <a:off x="1219200" y="3441700"/>
-            <a:ext cx="508000" cy="508000"/>
+            <a:off x="1270000" y="4724400"/>
+            <a:ext cx="711200" cy="711200"/>
           </a:xfrm>
           <a:prstGeom prst="roundRect">
             <a:avLst>
-              <a:gd name="adj" fmla="val 22500"/>
+              <a:gd name="adj" fmla="val 19642"/>
             </a:avLst>
           </a:prstGeom>
           <a:solidFill>
@@ -10151,7 +10151,7 @@
       </p:sp>
       <p:pic>
         <p:nvPicPr>
-          <p:cNvPr id="16" name="Picture 15" descr="icon-vlag-green.png"/>
+          <p:cNvPr id="16" name="Picture 15" descr="icon-kalender-green.png"/>
           <p:cNvPicPr>
             <a:picLocks noChangeAspect="1"/>
           </p:cNvPicPr>
@@ -10165,8 +10165,8 @@
         </p:blipFill>
         <p:spPr>
           <a:xfrm>
-            <a:off x="1346200" y="3568700"/>
-            <a:ext cx="254000" cy="254000"/>
+            <a:off x="1447800" y="4902200"/>
+            <a:ext cx="355600" cy="355600"/>
           </a:xfrm>
           <a:prstGeom prst="rect">
             <a:avLst/>
@@ -10181,8 +10181,8 @@
         </p:nvSpPr>
         <p:spPr>
           <a:xfrm>
-            <a:off x="762000" y="3581400"/>
-            <a:ext cx="355600" cy="228600"/>
+            <a:off x="762000" y="4940300"/>
+            <a:ext cx="406400" cy="279400"/>
           </a:xfrm>
           <a:prstGeom prst="rect">
             <a:avLst/>
@@ -10201,7 +10201,7 @@
               </a:lnSpc>
             </a:pPr>
             <a:r>
-              <a:rPr sz="1200" b="0">
+              <a:rPr sz="1600" b="0">
                 <a:solidFill>
                   <a:srgbClr val="9EABB1"/>
                 </a:solidFill>
@@ -10220,8 +10220,8 @@
         </p:nvSpPr>
         <p:spPr>
           <a:xfrm>
-            <a:off x="1981200" y="3390900"/>
-            <a:ext cx="2159000" cy="528320"/>
+            <a:off x="2235200" y="4635500"/>
+            <a:ext cx="2794000" cy="726440"/>
           </a:xfrm>
           <a:prstGeom prst="rect">
             <a:avLst/>
@@ -10236,33 +10236,33 @@
           <a:p>
             <a:pPr algn="l">
               <a:lnSpc>
-                <a:spcPct val="120000"/>
-              </a:lnSpc>
-            </a:pPr>
-            <a:r>
-              <a:rPr sz="1600" b="1">
+                <a:spcPct val="118000"/>
+              </a:lnSpc>
+            </a:pPr>
+            <a:r>
+              <a:rPr sz="2200" b="1">
                 <a:solidFill>
                   <a:srgbClr val="FFFFFF"/>
                 </a:solidFill>
                 <a:latin typeface="League Spartan"/>
               </a:rPr>
-              <a:t>Pilot the</a:t>
+              <a:t>Full Institutional</a:t>
             </a:r>
           </a:p>
           <a:p>
             <a:pPr algn="l">
               <a:lnSpc>
-                <a:spcPct val="120000"/>
-              </a:lnSpc>
-            </a:pPr>
-            <a:r>
-              <a:rPr sz="1600" b="1">
+                <a:spcPct val="118000"/>
+              </a:lnSpc>
+            </a:pPr>
+            <a:r>
+              <a:rPr sz="2200" b="1">
                 <a:solidFill>
                   <a:srgbClr val="FFFFFF"/>
                 </a:solidFill>
                 <a:latin typeface="League Spartan"/>
               </a:rPr>
-              <a:t>Start Group</a:t>
+              <a:t>Integration</a:t>
             </a:r>
           </a:p>
         </p:txBody>
@@ -10275,8 +10275,8 @@
         </p:nvSpPr>
         <p:spPr>
           <a:xfrm>
-            <a:off x="4445000" y="3390900"/>
-            <a:ext cx="6985000" cy="528320"/>
+            <a:off x="5334000" y="4660900"/>
+            <a:ext cx="6096000" cy="650240"/>
           </a:xfrm>
           <a:prstGeom prst="rect">
             <a:avLst/>
@@ -10301,29 +10301,27 @@
                 </a:solidFill>
                 <a:latin typeface="Inter"/>
               </a:rPr>
-              <a:t>Launch with a self-scaling license. On-site instructor training support from the Eduface team at pilot start. Target launch December 2026.</a:t>
-            </a:r>
-          </a:p>
-        </p:txBody>
-      </p:sp>
-      <p:sp>
-        <p:nvSpPr>
-          <p:cNvPr id="20" name="Rounded Rectangle 19"/>
+              <a:t>Roll out institution-wide from next academic year.</a:t>
+            </a:r>
+          </a:p>
+        </p:txBody>
+      </p:sp>
+      <p:sp>
+        <p:nvSpPr>
+          <p:cNvPr id="20" name="Rectangle 19"/>
           <p:cNvSpPr/>
           <p:nvPr/>
         </p:nvSpPr>
         <p:spPr>
           <a:xfrm>
-            <a:off x="1219200" y="4254500"/>
-            <a:ext cx="508000" cy="508000"/>
-          </a:xfrm>
-          <a:prstGeom prst="roundRect">
-            <a:avLst>
-              <a:gd name="adj" fmla="val 22500"/>
-            </a:avLst>
+            <a:off x="762000" y="6045200"/>
+            <a:ext cx="10668000" cy="6350"/>
+          </a:xfrm>
+          <a:prstGeom prst="rect">
+            <a:avLst/>
           </a:prstGeom>
           <a:solidFill>
-            <a:srgbClr val="0A2C3B"/>
+            <a:srgbClr val="1F3D4B"/>
           </a:solidFill>
           <a:ln>
             <a:noFill/>
@@ -10354,7 +10352,7 @@
       </p:sp>
       <p:pic>
         <p:nvPicPr>
-          <p:cNvPr id="21" name="Picture 20" descr="icon-route-green.png"/>
+          <p:cNvPr id="21" name="Picture 20" descr="logo_white.png"/>
           <p:cNvPicPr>
             <a:picLocks noChangeAspect="1"/>
           </p:cNvPicPr>
@@ -10368,8 +10366,8 @@
         </p:blipFill>
         <p:spPr>
           <a:xfrm>
-            <a:off x="1346200" y="4381500"/>
-            <a:ext cx="254000" cy="254000"/>
+            <a:off x="762000" y="6324600"/>
+            <a:ext cx="934528" cy="254000"/>
           </a:xfrm>
           <a:prstGeom prst="rect">
             <a:avLst/>
@@ -10378,155 +10376,20 @@
       </p:pic>
       <p:sp>
         <p:nvSpPr>
-          <p:cNvPr id="22" name="TextBox 21"/>
-          <p:cNvSpPr txBox="1"/>
-          <p:nvPr/>
-        </p:nvSpPr>
-        <p:spPr>
-          <a:xfrm>
-            <a:off x="762000" y="4394200"/>
-            <a:ext cx="355600" cy="228600"/>
-          </a:xfrm>
-          <a:prstGeom prst="rect">
-            <a:avLst/>
-          </a:prstGeom>
-          <a:noFill/>
-        </p:spPr>
-        <p:txBody>
-          <a:bodyPr wrap="square" lIns="0" rIns="0" tIns="0" bIns="0">
-            <a:spAutoFit/>
-          </a:bodyPr>
-          <a:lstStyle/>
-          <a:p>
-            <a:pPr algn="l">
-              <a:lnSpc>
-                <a:spcPct val="100000"/>
-              </a:lnSpc>
-            </a:pPr>
-            <a:r>
-              <a:rPr sz="1200" b="0">
-                <a:solidFill>
-                  <a:srgbClr val="9EABB1"/>
-                </a:solidFill>
-                <a:latin typeface="League Spartan"/>
-              </a:rPr>
-              <a:t>04</a:t>
-            </a:r>
-          </a:p>
-        </p:txBody>
-      </p:sp>
-      <p:sp>
-        <p:nvSpPr>
-          <p:cNvPr id="23" name="TextBox 22"/>
-          <p:cNvSpPr txBox="1"/>
-          <p:nvPr/>
-        </p:nvSpPr>
-        <p:spPr>
-          <a:xfrm>
-            <a:off x="1981200" y="4203700"/>
-            <a:ext cx="2159000" cy="528320"/>
-          </a:xfrm>
-          <a:prstGeom prst="rect">
-            <a:avLst/>
-          </a:prstGeom>
-          <a:noFill/>
-        </p:spPr>
-        <p:txBody>
-          <a:bodyPr wrap="square" lIns="0" rIns="0" tIns="0" bIns="0">
-            <a:spAutoFit/>
-          </a:bodyPr>
-          <a:lstStyle/>
-          <a:p>
-            <a:pPr algn="l">
-              <a:lnSpc>
-                <a:spcPct val="120000"/>
-              </a:lnSpc>
-            </a:pPr>
-            <a:r>
-              <a:rPr sz="1600" b="1">
-                <a:solidFill>
-                  <a:srgbClr val="FFFFFF"/>
-                </a:solidFill>
-                <a:latin typeface="League Spartan"/>
-              </a:rPr>
-              <a:t>Programmatic</a:t>
-            </a:r>
-          </a:p>
-          <a:p>
-            <a:pPr algn="l">
-              <a:lnSpc>
-                <a:spcPct val="120000"/>
-              </a:lnSpc>
-            </a:pPr>
-            <a:r>
-              <a:rPr sz="1600" b="1">
-                <a:solidFill>
-                  <a:srgbClr val="FFFFFF"/>
-                </a:solidFill>
-                <a:latin typeface="League Spartan"/>
-              </a:rPr>
-              <a:t>Expansion</a:t>
-            </a:r>
-          </a:p>
-        </p:txBody>
-      </p:sp>
-      <p:sp>
-        <p:nvSpPr>
-          <p:cNvPr id="24" name="TextBox 23"/>
-          <p:cNvSpPr txBox="1"/>
-          <p:nvPr/>
-        </p:nvSpPr>
-        <p:spPr>
-          <a:xfrm>
-            <a:off x="4445000" y="4203700"/>
-            <a:ext cx="6985000" cy="528320"/>
-          </a:xfrm>
-          <a:prstGeom prst="rect">
-            <a:avLst/>
-          </a:prstGeom>
-          <a:noFill/>
-        </p:spPr>
-        <p:txBody>
-          <a:bodyPr wrap="square" lIns="0" rIns="0" tIns="0" bIns="0">
-            <a:spAutoFit/>
-          </a:bodyPr>
-          <a:lstStyle/>
-          <a:p>
-            <a:pPr algn="l">
-              <a:lnSpc>
-                <a:spcPct val="145000"/>
-              </a:lnSpc>
-            </a:pPr>
-            <a:r>
-              <a:rPr sz="1600" b="0">
-                <a:solidFill>
-                  <a:srgbClr val="9EABB1"/>
-                </a:solidFill>
-                <a:latin typeface="Inter"/>
-              </a:rPr>
-              <a:t>Roll out to additional programs following pilot success.</a:t>
-            </a:r>
-          </a:p>
-        </p:txBody>
-      </p:sp>
-      <p:sp>
-        <p:nvSpPr>
-          <p:cNvPr id="25" name="Rounded Rectangle 24"/>
+          <p:cNvPr id="22" name="Rectangle 21"/>
           <p:cNvSpPr/>
           <p:nvPr/>
         </p:nvSpPr>
         <p:spPr>
           <a:xfrm>
-            <a:off x="1219200" y="5067300"/>
-            <a:ext cx="508000" cy="508000"/>
-          </a:xfrm>
-          <a:prstGeom prst="roundRect">
-            <a:avLst>
-              <a:gd name="adj" fmla="val 22500"/>
-            </a:avLst>
+            <a:off x="1968500" y="6311900"/>
+            <a:ext cx="6350" cy="279400"/>
+          </a:xfrm>
+          <a:prstGeom prst="rect">
+            <a:avLst/>
           </a:prstGeom>
           <a:solidFill>
-            <a:srgbClr val="0A2C3B"/>
+            <a:srgbClr val="1F3D4B"/>
           </a:solidFill>
           <a:ln>
             <a:noFill/>
@@ -10555,9 +10418,55 @@
           </a:p>
         </p:txBody>
       </p:sp>
+      <p:sp>
+        <p:nvSpPr>
+          <p:cNvPr id="23" name="Rounded Rectangle 22"/>
+          <p:cNvSpPr/>
+          <p:nvPr/>
+        </p:nvSpPr>
+        <p:spPr>
+          <a:xfrm>
+            <a:off x="2133600" y="6184900"/>
+            <a:ext cx="952046" cy="533400"/>
+          </a:xfrm>
+          <a:prstGeom prst="roundRect">
+            <a:avLst>
+              <a:gd name="adj" fmla="val 11904"/>
+            </a:avLst>
+          </a:prstGeom>
+          <a:solidFill>
+            <a:srgbClr val="FFFFFF"/>
+          </a:solidFill>
+          <a:ln>
+            <a:noFill/>
+          </a:ln>
+          <a:effectLst/>
+        </p:spPr>
+        <p:style>
+          <a:lnRef idx="1">
+            <a:schemeClr val="accent1"/>
+          </a:lnRef>
+          <a:fillRef idx="3">
+            <a:schemeClr val="accent1"/>
+          </a:fillRef>
+          <a:effectRef idx="2">
+            <a:schemeClr val="accent1"/>
+          </a:effectRef>
+          <a:fontRef idx="minor">
+            <a:schemeClr val="lt1"/>
+          </a:fontRef>
+        </p:style>
+        <p:txBody>
+          <a:bodyPr rtlCol="0" anchor="ctr"/>
+          <a:lstStyle/>
+          <a:p>
+            <a:pPr algn="ctr"/>
+          </a:p>
+        </p:txBody>
+      </p:sp>
       <p:pic>
         <p:nvPicPr>
-          <p:cNvPr id="26" name="Picture 25" descr="icon-kalender-green.png"/>
+          <p:cNvPr id="24" name="Picture 23" descr="uti-logo.png"/>
           <p:cNvPicPr>
             <a:picLocks noChangeAspect="1"/>
           </p:cNvPicPr>
@@ -10571,8 +10480,8 @@
         </p:blipFill>
         <p:spPr>
           <a:xfrm>
-            <a:off x="1346200" y="5194300"/>
-            <a:ext cx="254000" cy="254000"/>
+            <a:off x="2222500" y="6273800"/>
+            <a:ext cx="774246" cy="355600"/>
           </a:xfrm>
           <a:prstGeom prst="rect">
             <a:avLst/>
@@ -10581,14 +10490,14 @@
       </p:pic>
       <p:sp>
         <p:nvSpPr>
-          <p:cNvPr id="27" name="TextBox 26"/>
+          <p:cNvPr id="25" name="TextBox 24"/>
           <p:cNvSpPr txBox="1"/>
           <p:nvPr/>
         </p:nvSpPr>
         <p:spPr>
           <a:xfrm>
-            <a:off x="762000" y="5207000"/>
-            <a:ext cx="355600" cy="228600"/>
+            <a:off x="5715000" y="6375400"/>
+            <a:ext cx="5080000" cy="243840"/>
           </a:xfrm>
           <a:prstGeom prst="rect">
             <a:avLst/>
@@ -10601,9 +10510,9 @@
           </a:bodyPr>
           <a:lstStyle/>
           <a:p>
-            <a:pPr algn="l">
-              <a:lnSpc>
-                <a:spcPct val="100000"/>
+            <a:pPr algn="r">
+              <a:lnSpc>
+                <a:spcPct val="135000"/>
               </a:lnSpc>
             </a:pPr>
             <a:r>
@@ -10611,323 +10520,8 @@
                 <a:solidFill>
                   <a:srgbClr val="9EABB1"/>
                 </a:solidFill>
-                <a:latin typeface="League Spartan"/>
-              </a:rPr>
-              <a:t>05</a:t>
-            </a:r>
-          </a:p>
-        </p:txBody>
-      </p:sp>
-      <p:sp>
-        <p:nvSpPr>
-          <p:cNvPr id="28" name="TextBox 27"/>
-          <p:cNvSpPr txBox="1"/>
-          <p:nvPr/>
-        </p:nvSpPr>
-        <p:spPr>
-          <a:xfrm>
-            <a:off x="1981200" y="5016500"/>
-            <a:ext cx="2159000" cy="528320"/>
-          </a:xfrm>
-          <a:prstGeom prst="rect">
-            <a:avLst/>
-          </a:prstGeom>
-          <a:noFill/>
-        </p:spPr>
-        <p:txBody>
-          <a:bodyPr wrap="square" lIns="0" rIns="0" tIns="0" bIns="0">
-            <a:spAutoFit/>
-          </a:bodyPr>
-          <a:lstStyle/>
-          <a:p>
-            <a:pPr algn="l">
-              <a:lnSpc>
-                <a:spcPct val="120000"/>
-              </a:lnSpc>
-            </a:pPr>
-            <a:r>
-              <a:rPr sz="1600" b="1">
-                <a:solidFill>
-                  <a:srgbClr val="FFFFFF"/>
-                </a:solidFill>
-                <a:latin typeface="League Spartan"/>
-              </a:rPr>
-              <a:t>Full Institutional</a:t>
-            </a:r>
-          </a:p>
-          <a:p>
-            <a:pPr algn="l">
-              <a:lnSpc>
-                <a:spcPct val="120000"/>
-              </a:lnSpc>
-            </a:pPr>
-            <a:r>
-              <a:rPr sz="1600" b="1">
-                <a:solidFill>
-                  <a:srgbClr val="FFFFFF"/>
-                </a:solidFill>
-                <a:latin typeface="League Spartan"/>
-              </a:rPr>
-              <a:t>Integration</a:t>
-            </a:r>
-          </a:p>
-        </p:txBody>
-      </p:sp>
-      <p:sp>
-        <p:nvSpPr>
-          <p:cNvPr id="29" name="TextBox 28"/>
-          <p:cNvSpPr txBox="1"/>
-          <p:nvPr/>
-        </p:nvSpPr>
-        <p:spPr>
-          <a:xfrm>
-            <a:off x="4445000" y="5016500"/>
-            <a:ext cx="6985000" cy="528320"/>
-          </a:xfrm>
-          <a:prstGeom prst="rect">
-            <a:avLst/>
-          </a:prstGeom>
-          <a:noFill/>
-        </p:spPr>
-        <p:txBody>
-          <a:bodyPr wrap="square" lIns="0" rIns="0" tIns="0" bIns="0">
-            <a:spAutoFit/>
-          </a:bodyPr>
-          <a:lstStyle/>
-          <a:p>
-            <a:pPr algn="l">
-              <a:lnSpc>
-                <a:spcPct val="145000"/>
-              </a:lnSpc>
-            </a:pPr>
-            <a:r>
-              <a:rPr sz="1600" b="0">
-                <a:solidFill>
-                  <a:srgbClr val="9EABB1"/>
-                </a:solidFill>
                 <a:latin typeface="Inter"/>
               </a:rPr>
-              <a:t>Roll out institution-wide from next academic year.</a:t>
-            </a:r>
-          </a:p>
-        </p:txBody>
-      </p:sp>
-      <p:sp>
-        <p:nvSpPr>
-          <p:cNvPr id="30" name="Rectangle 29"/>
-          <p:cNvSpPr/>
-          <p:nvPr/>
-        </p:nvSpPr>
-        <p:spPr>
-          <a:xfrm>
-            <a:off x="762000" y="6045200"/>
-            <a:ext cx="10668000" cy="6350"/>
-          </a:xfrm>
-          <a:prstGeom prst="rect">
-            <a:avLst/>
-          </a:prstGeom>
-          <a:solidFill>
-            <a:srgbClr val="1F3D4B"/>
-          </a:solidFill>
-          <a:ln>
-            <a:noFill/>
-          </a:ln>
-          <a:effectLst/>
-        </p:spPr>
-        <p:style>
-          <a:lnRef idx="1">
-            <a:schemeClr val="accent1"/>
-          </a:lnRef>
-          <a:fillRef idx="3">
-            <a:schemeClr val="accent1"/>
-          </a:fillRef>
-          <a:effectRef idx="2">
-            <a:schemeClr val="accent1"/>
-          </a:effectRef>
-          <a:fontRef idx="minor">
-            <a:schemeClr val="lt1"/>
-          </a:fontRef>
-        </p:style>
-        <p:txBody>
-          <a:bodyPr rtlCol="0" anchor="ctr"/>
-          <a:lstStyle/>
-          <a:p>
-            <a:pPr algn="ctr"/>
-          </a:p>
-        </p:txBody>
-      </p:sp>
-      <p:pic>
-        <p:nvPicPr>
-          <p:cNvPr id="31" name="Picture 30" descr="logo_white.png"/>
-          <p:cNvPicPr>
-            <a:picLocks noChangeAspect="1"/>
-          </p:cNvPicPr>
-          <p:nvPr/>
-        </p:nvPicPr>
-        <p:blipFill>
-          <a:blip r:embed="rId7"/>
-          <a:stretch>
-            <a:fillRect/>
-          </a:stretch>
-        </p:blipFill>
-        <p:spPr>
-          <a:xfrm>
-            <a:off x="762000" y="6324600"/>
-            <a:ext cx="934528" cy="254000"/>
-          </a:xfrm>
-          <a:prstGeom prst="rect">
-            <a:avLst/>
-          </a:prstGeom>
-        </p:spPr>
-      </p:pic>
-      <p:sp>
-        <p:nvSpPr>
-          <p:cNvPr id="32" name="Rectangle 31"/>
-          <p:cNvSpPr/>
-          <p:nvPr/>
-        </p:nvSpPr>
-        <p:spPr>
-          <a:xfrm>
-            <a:off x="1968500" y="6311900"/>
-            <a:ext cx="6350" cy="279400"/>
-          </a:xfrm>
-          <a:prstGeom prst="rect">
-            <a:avLst/>
-          </a:prstGeom>
-          <a:solidFill>
-            <a:srgbClr val="1F3D4B"/>
-          </a:solidFill>
-          <a:ln>
-            <a:noFill/>
-          </a:ln>
-          <a:effectLst/>
-        </p:spPr>
-        <p:style>
-          <a:lnRef idx="1">
-            <a:schemeClr val="accent1"/>
-          </a:lnRef>
-          <a:fillRef idx="3">
-            <a:schemeClr val="accent1"/>
-          </a:fillRef>
-          <a:effectRef idx="2">
-            <a:schemeClr val="accent1"/>
-          </a:effectRef>
-          <a:fontRef idx="minor">
-            <a:schemeClr val="lt1"/>
-          </a:fontRef>
-        </p:style>
-        <p:txBody>
-          <a:bodyPr rtlCol="0" anchor="ctr"/>
-          <a:lstStyle/>
-          <a:p>
-            <a:pPr algn="ctr"/>
-          </a:p>
-        </p:txBody>
-      </p:sp>
-      <p:sp>
-        <p:nvSpPr>
-          <p:cNvPr id="33" name="Rounded Rectangle 32"/>
-          <p:cNvSpPr/>
-          <p:nvPr/>
-        </p:nvSpPr>
-        <p:spPr>
-          <a:xfrm>
-            <a:off x="2133600" y="6184900"/>
-            <a:ext cx="952046" cy="533400"/>
-          </a:xfrm>
-          <a:prstGeom prst="roundRect">
-            <a:avLst>
-              <a:gd name="adj" fmla="val 11904"/>
-            </a:avLst>
-          </a:prstGeom>
-          <a:solidFill>
-            <a:srgbClr val="FFFFFF"/>
-          </a:solidFill>
-          <a:ln>
-            <a:noFill/>
-          </a:ln>
-          <a:effectLst/>
-        </p:spPr>
-        <p:style>
-          <a:lnRef idx="1">
-            <a:schemeClr val="accent1"/>
-          </a:lnRef>
-          <a:fillRef idx="3">
-            <a:schemeClr val="accent1"/>
-          </a:fillRef>
-          <a:effectRef idx="2">
-            <a:schemeClr val="accent1"/>
-          </a:effectRef>
-          <a:fontRef idx="minor">
-            <a:schemeClr val="lt1"/>
-          </a:fontRef>
-        </p:style>
-        <p:txBody>
-          <a:bodyPr rtlCol="0" anchor="ctr"/>
-          <a:lstStyle/>
-          <a:p>
-            <a:pPr algn="ctr"/>
-          </a:p>
-        </p:txBody>
-      </p:sp>
-      <p:pic>
-        <p:nvPicPr>
-          <p:cNvPr id="34" name="Picture 33" descr="uti-logo.png"/>
-          <p:cNvPicPr>
-            <a:picLocks noChangeAspect="1"/>
-          </p:cNvPicPr>
-          <p:nvPr/>
-        </p:nvPicPr>
-        <p:blipFill>
-          <a:blip r:embed="rId8"/>
-          <a:stretch>
-            <a:fillRect/>
-          </a:stretch>
-        </p:blipFill>
-        <p:spPr>
-          <a:xfrm>
-            <a:off x="2222500" y="6273800"/>
-            <a:ext cx="774246" cy="355600"/>
-          </a:xfrm>
-          <a:prstGeom prst="rect">
-            <a:avLst/>
-          </a:prstGeom>
-        </p:spPr>
-      </p:pic>
-      <p:sp>
-        <p:nvSpPr>
-          <p:cNvPr id="35" name="TextBox 34"/>
-          <p:cNvSpPr txBox="1"/>
-          <p:nvPr/>
-        </p:nvSpPr>
-        <p:spPr>
-          <a:xfrm>
-            <a:off x="5715000" y="6375400"/>
-            <a:ext cx="5080000" cy="243840"/>
-          </a:xfrm>
-          <a:prstGeom prst="rect">
-            <a:avLst/>
-          </a:prstGeom>
-          <a:noFill/>
-        </p:spPr>
-        <p:txBody>
-          <a:bodyPr wrap="square" lIns="0" rIns="0" tIns="0" bIns="0">
-            <a:spAutoFit/>
-          </a:bodyPr>
-          <a:lstStyle/>
-          <a:p>
-            <a:pPr algn="r">
-              <a:lnSpc>
-                <a:spcPct val="135000"/>
-              </a:lnSpc>
-            </a:pPr>
-            <a:r>
-              <a:rPr sz="1200" b="0">
-                <a:solidFill>
-                  <a:srgbClr val="9EABB1"/>
-                </a:solidFill>
-                <a:latin typeface="Inter"/>
-              </a:rPr>
               <a:t>Concept, for discussion.</a:t>
             </a:r>
           </a:p>
@@ -10935,7 +10529,7 @@
       </p:sp>
       <p:sp>
         <p:nvSpPr>
-          <p:cNvPr id="36" name="TextBox 35"/>
+          <p:cNvPr id="26" name="TextBox 25"/>
           <p:cNvSpPr txBox="1"/>
           <p:nvPr/>
         </p:nvSpPr>
